--- a/Aula 02 - Passo a Passo.pptx
+++ b/Aula 02 - Passo a Passo.pptx
@@ -5,10 +5,10 @@
     <p:sldMasterId id="2147483670" r:id="rId1"/>
   </p:sldMasterIdLst>
   <p:notesMasterIdLst>
-    <p:notesMasterId r:id="rId86"/>
+    <p:notesMasterId r:id="rId94"/>
   </p:notesMasterIdLst>
   <p:handoutMasterIdLst>
-    <p:handoutMasterId r:id="rId87"/>
+    <p:handoutMasterId r:id="rId95"/>
   </p:handoutMasterIdLst>
   <p:sldIdLst>
     <p:sldId id="256" r:id="rId2"/>
@@ -83,18 +83,26 @@
     <p:sldId id="324" r:id="rId71"/>
     <p:sldId id="325" r:id="rId72"/>
     <p:sldId id="327" r:id="rId73"/>
-    <p:sldId id="328" r:id="rId74"/>
-    <p:sldId id="329" r:id="rId75"/>
-    <p:sldId id="330" r:id="rId76"/>
-    <p:sldId id="331" r:id="rId77"/>
-    <p:sldId id="332" r:id="rId78"/>
-    <p:sldId id="333" r:id="rId79"/>
-    <p:sldId id="335" r:id="rId80"/>
-    <p:sldId id="334" r:id="rId81"/>
-    <p:sldId id="336" r:id="rId82"/>
-    <p:sldId id="337" r:id="rId83"/>
-    <p:sldId id="338" r:id="rId84"/>
-    <p:sldId id="339" r:id="rId85"/>
+    <p:sldId id="340" r:id="rId74"/>
+    <p:sldId id="328" r:id="rId75"/>
+    <p:sldId id="329" r:id="rId76"/>
+    <p:sldId id="330" r:id="rId77"/>
+    <p:sldId id="331" r:id="rId78"/>
+    <p:sldId id="332" r:id="rId79"/>
+    <p:sldId id="333" r:id="rId80"/>
+    <p:sldId id="335" r:id="rId81"/>
+    <p:sldId id="334" r:id="rId82"/>
+    <p:sldId id="336" r:id="rId83"/>
+    <p:sldId id="337" r:id="rId84"/>
+    <p:sldId id="341" r:id="rId85"/>
+    <p:sldId id="338" r:id="rId86"/>
+    <p:sldId id="339" r:id="rId87"/>
+    <p:sldId id="342" r:id="rId88"/>
+    <p:sldId id="343" r:id="rId89"/>
+    <p:sldId id="344" r:id="rId90"/>
+    <p:sldId id="346" r:id="rId91"/>
+    <p:sldId id="347" r:id="rId92"/>
+    <p:sldId id="345" r:id="rId93"/>
   </p:sldIdLst>
   <p:sldSz cx="12192000" cy="6858000"/>
   <p:notesSz cx="6858000" cy="9144000"/>
@@ -294,7 +302,7 @@
           <a:p>
             <a:fld id="{04173D99-D067-41B2-AE6C-277A67A29C02}" type="datetimeFigureOut">
               <a:rPr lang="pt-BR" smtClean="0"/>
-              <a:t>23/10/2026</a:t>
+              <a:t>29/10/2026</a:t>
             </a:fld>
             <a:endParaRPr lang="pt-BR"/>
           </a:p>
@@ -460,7 +468,7 @@
           <a:p>
             <a:fld id="{9E9AB6CA-B409-437D-9273-FF0DF7C26A26}" type="datetimeFigureOut">
               <a:rPr lang="pt-BR" smtClean="0"/>
-              <a:t>23/10/2026</a:t>
+              <a:t>29/10/2026</a:t>
             </a:fld>
             <a:endParaRPr lang="pt-BR"/>
           </a:p>
@@ -14459,10 +14467,14 @@
         </p:nvSpPr>
         <p:spPr/>
         <p:txBody>
-          <a:bodyPr/>
+          <a:bodyPr anchor="b"/>
           <a:lstStyle/>
           <a:p>
-            <a:endParaRPr lang="pt-BR"/>
+            <a:pPr algn="r"/>
+            <a:r>
+              <a:rPr lang="pt-BR" dirty="0"/>
+              <a:t>29/10/2026</a:t>
+            </a:r>
           </a:p>
         </p:txBody>
       </p:sp>
@@ -14524,12 +14536,40 @@
           <a:chExt cx="0" cy="0"/>
         </a:xfrm>
       </p:grpSpPr>
+      <p:sp>
+        <p:nvSpPr>
+          <p:cNvPr id="2" name="Título 1">
+            <a:extLst>
+              <a:ext uri="{FF2B5EF4-FFF2-40B4-BE49-F238E27FC236}">
+                <a16:creationId xmlns:a16="http://schemas.microsoft.com/office/drawing/2014/main" id="{F271D4A5-1702-45CD-BFBA-2B7B82899900}"/>
+              </a:ext>
+            </a:extLst>
+          </p:cNvPr>
+          <p:cNvSpPr>
+            <a:spLocks noGrp="1"/>
+          </p:cNvSpPr>
+          <p:nvPr>
+            <p:ph type="title"/>
+          </p:nvPr>
+        </p:nvSpPr>
+        <p:spPr/>
+        <p:txBody>
+          <a:bodyPr/>
+          <a:lstStyle/>
+          <a:p>
+            <a:r>
+              <a:rPr lang="pt-BR" dirty="0"/>
+              <a:t>Objetivo</a:t>
+            </a:r>
+          </a:p>
+        </p:txBody>
+      </p:sp>
       <p:pic>
         <p:nvPicPr>
-          <p:cNvPr id="5" name="Imagem 4" descr="Interface gráfica do usuário, Texto, Aplicativo&#10;&#10;O conteúdo gerado por IA pode estar incorreto.">
-            <a:extLst>
-              <a:ext uri="{FF2B5EF4-FFF2-40B4-BE49-F238E27FC236}">
-                <a16:creationId xmlns:a16="http://schemas.microsoft.com/office/drawing/2014/main" id="{FA61F0D6-1357-D0F1-3FF8-2101DDE537FB}"/>
+          <p:cNvPr id="3" name="Imagem 2">
+            <a:extLst>
+              <a:ext uri="{FF2B5EF4-FFF2-40B4-BE49-F238E27FC236}">
+                <a16:creationId xmlns:a16="http://schemas.microsoft.com/office/drawing/2014/main" id="{FE7BC9E1-831A-4263-BA1F-E431E8819612}"/>
               </a:ext>
             </a:extLst>
           </p:cNvPr>
@@ -14539,21 +14579,15 @@
           <p:nvPr/>
         </p:nvPicPr>
         <p:blipFill>
-          <a:blip r:embed="rId2">
-            <a:extLst>
-              <a:ext uri="{28A0092B-C50C-407E-A947-70E740481C1C}">
-                <a14:useLocalDpi xmlns:a14="http://schemas.microsoft.com/office/drawing/2010/main" val="0"/>
-              </a:ext>
-            </a:extLst>
-          </a:blip>
+          <a:blip r:embed="rId2"/>
           <a:stretch>
             <a:fillRect/>
           </a:stretch>
         </p:blipFill>
         <p:spPr>
           <a:xfrm>
-            <a:off x="1103150" y="436318"/>
-            <a:ext cx="3976849" cy="6006188"/>
+            <a:off x="2438400" y="1628774"/>
+            <a:ext cx="7315200" cy="4943475"/>
           </a:xfrm>
           <a:prstGeom prst="rect">
             <a:avLst/>
@@ -14562,10 +14596,10 @@
       </p:pic>
       <p:sp>
         <p:nvSpPr>
-          <p:cNvPr id="6" name="Retângulo 5">
-            <a:extLst>
-              <a:ext uri="{FF2B5EF4-FFF2-40B4-BE49-F238E27FC236}">
-                <a16:creationId xmlns:a16="http://schemas.microsoft.com/office/drawing/2014/main" id="{E6243093-EE39-1411-ED3C-8B2597F90487}"/>
+          <p:cNvPr id="4" name="Seta: para a Direita 3">
+            <a:extLst>
+              <a:ext uri="{FF2B5EF4-FFF2-40B4-BE49-F238E27FC236}">
+                <a16:creationId xmlns:a16="http://schemas.microsoft.com/office/drawing/2014/main" id="{43BDE1F6-4318-4889-9CA8-84B1A7C97884}"/>
               </a:ext>
             </a:extLst>
           </p:cNvPr>
@@ -14573,14 +14607,16 @@
           <p:nvPr/>
         </p:nvSpPr>
         <p:spPr bwMode="auto">
-          <a:xfrm>
-            <a:off x="1384300" y="2870200"/>
-            <a:ext cx="2286000" cy="558800"/>
-          </a:xfrm>
-          <a:prstGeom prst="rect">
-            <a:avLst/>
-          </a:prstGeom>
-          <a:noFill/>
+          <a:xfrm rot="19807790">
+            <a:off x="967273" y="2649893"/>
+            <a:ext cx="1436915" cy="727788"/>
+          </a:xfrm>
+          <a:prstGeom prst="rightArrow">
+            <a:avLst/>
+          </a:prstGeom>
+          <a:solidFill>
+            <a:srgbClr val="FFFF00"/>
+          </a:solidFill>
           <a:ln w="38100">
             <a:solidFill>
               <a:srgbClr val="FF0000"/>
@@ -14623,10 +14659,10 @@
       </p:sp>
       <p:sp>
         <p:nvSpPr>
-          <p:cNvPr id="7" name="Seta: para a Esquerda 6">
-            <a:extLst>
-              <a:ext uri="{FF2B5EF4-FFF2-40B4-BE49-F238E27FC236}">
-                <a16:creationId xmlns:a16="http://schemas.microsoft.com/office/drawing/2014/main" id="{9875FE6F-BC36-C4FF-A036-9C09DE62F939}"/>
+          <p:cNvPr id="5" name="Seta: para a Direita 4">
+            <a:extLst>
+              <a:ext uri="{FF2B5EF4-FFF2-40B4-BE49-F238E27FC236}">
+                <a16:creationId xmlns:a16="http://schemas.microsoft.com/office/drawing/2014/main" id="{E2E1F98A-A412-4CCA-AC33-03A92FC78DA6}"/>
               </a:ext>
             </a:extLst>
           </p:cNvPr>
@@ -14634,11 +14670,11 @@
           <p:nvPr/>
         </p:nvSpPr>
         <p:spPr bwMode="auto">
-          <a:xfrm>
-            <a:off x="3951450" y="2120900"/>
-            <a:ext cx="4267200" cy="1955800"/>
-          </a:xfrm>
-          <a:prstGeom prst="leftArrow">
+          <a:xfrm rot="1735855">
+            <a:off x="1019436" y="5542317"/>
+            <a:ext cx="1436915" cy="727788"/>
+          </a:xfrm>
+          <a:prstGeom prst="rightArrow">
             <a:avLst/>
           </a:prstGeom>
           <a:solidFill>
@@ -14675,34 +14711,145 @@
           <a:lstStyle/>
           <a:p>
             <a:pPr algn="ctr"/>
-            <a:r>
-              <a:rPr lang="pt-BR" sz="2000" dirty="0">
-                <a:solidFill>
-                  <a:schemeClr val="tx1"/>
-                </a:solidFill>
-                <a:latin typeface="Arial" charset="0"/>
-              </a:rPr>
-              <a:t>Crie o arquivo</a:t>
-            </a:r>
-          </a:p>
+            <a:endParaRPr lang="pt-BR" sz="2000" dirty="0">
+              <a:solidFill>
+                <a:schemeClr val="tx1"/>
+              </a:solidFill>
+              <a:latin typeface="Arial" charset="0"/>
+            </a:endParaRPr>
+          </a:p>
+        </p:txBody>
+      </p:sp>
+      <p:sp>
+        <p:nvSpPr>
+          <p:cNvPr id="9" name="Seta: para a Direita 8">
+            <a:extLst>
+              <a:ext uri="{FF2B5EF4-FFF2-40B4-BE49-F238E27FC236}">
+                <a16:creationId xmlns:a16="http://schemas.microsoft.com/office/drawing/2014/main" id="{9C571307-497A-4A1A-B0A3-8019A859BF86}"/>
+              </a:ext>
+            </a:extLst>
+          </p:cNvPr>
+          <p:cNvSpPr/>
+          <p:nvPr/>
+        </p:nvSpPr>
+        <p:spPr bwMode="auto">
+          <a:xfrm rot="1792210" flipH="1">
+            <a:off x="9839390" y="2649894"/>
+            <a:ext cx="1436915" cy="727788"/>
+          </a:xfrm>
+          <a:prstGeom prst="rightArrow">
+            <a:avLst/>
+          </a:prstGeom>
+          <a:solidFill>
+            <a:srgbClr val="FFFF00"/>
+          </a:solidFill>
+          <a:ln w="38100">
+            <a:solidFill>
+              <a:srgbClr val="FF0000"/>
+            </a:solidFill>
+            <a:headEnd type="none" w="med" len="med"/>
+            <a:tailEnd type="triangle" w="med" len="med"/>
+          </a:ln>
+        </p:spPr>
+        <p:style>
+          <a:lnRef idx="1">
+            <a:schemeClr val="accent3"/>
+          </a:lnRef>
+          <a:fillRef idx="2">
+            <a:schemeClr val="accent3"/>
+          </a:fillRef>
+          <a:effectRef idx="1">
+            <a:schemeClr val="accent3"/>
+          </a:effectRef>
+          <a:fontRef idx="minor">
+            <a:schemeClr val="dk1"/>
+          </a:fontRef>
+        </p:style>
+        <p:txBody>
+          <a:bodyPr vert="horz" wrap="square" lIns="90000" tIns="46800" rIns="90000" bIns="46800" numCol="1" rtlCol="0" anchor="ctr" anchorCtr="0" compatLnSpc="1">
+            <a:prstTxWarp prst="textNoShape">
+              <a:avLst/>
+            </a:prstTxWarp>
+          </a:bodyPr>
+          <a:lstStyle/>
           <a:p>
             <a:pPr algn="ctr"/>
-            <a:r>
-              <a:rPr lang="pt-BR" sz="3200" b="1" dirty="0">
-                <a:solidFill>
-                  <a:schemeClr val="tx1"/>
-                </a:solidFill>
-                <a:latin typeface="Arial" charset="0"/>
-              </a:rPr>
-              <a:t>exemplo4.html</a:t>
-            </a:r>
+            <a:endParaRPr lang="pt-BR" sz="2000" dirty="0">
+              <a:solidFill>
+                <a:schemeClr val="tx1"/>
+              </a:solidFill>
+              <a:latin typeface="Arial" charset="0"/>
+            </a:endParaRPr>
+          </a:p>
+        </p:txBody>
+      </p:sp>
+      <p:sp>
+        <p:nvSpPr>
+          <p:cNvPr id="10" name="Seta: para a Direita 9">
+            <a:extLst>
+              <a:ext uri="{FF2B5EF4-FFF2-40B4-BE49-F238E27FC236}">
+                <a16:creationId xmlns:a16="http://schemas.microsoft.com/office/drawing/2014/main" id="{85CFACDB-68D7-49EB-B1BB-5FC8A2A3E919}"/>
+              </a:ext>
+            </a:extLst>
+          </p:cNvPr>
+          <p:cNvSpPr/>
+          <p:nvPr/>
+        </p:nvSpPr>
+        <p:spPr bwMode="auto">
+          <a:xfrm rot="19864145" flipH="1">
+            <a:off x="9891553" y="5542318"/>
+            <a:ext cx="1436915" cy="727788"/>
+          </a:xfrm>
+          <a:prstGeom prst="rightArrow">
+            <a:avLst/>
+          </a:prstGeom>
+          <a:solidFill>
+            <a:srgbClr val="FFFF00"/>
+          </a:solidFill>
+          <a:ln w="38100">
+            <a:solidFill>
+              <a:srgbClr val="FF0000"/>
+            </a:solidFill>
+            <a:headEnd type="none" w="med" len="med"/>
+            <a:tailEnd type="triangle" w="med" len="med"/>
+          </a:ln>
+        </p:spPr>
+        <p:style>
+          <a:lnRef idx="1">
+            <a:schemeClr val="accent3"/>
+          </a:lnRef>
+          <a:fillRef idx="2">
+            <a:schemeClr val="accent3"/>
+          </a:fillRef>
+          <a:effectRef idx="1">
+            <a:schemeClr val="accent3"/>
+          </a:effectRef>
+          <a:fontRef idx="minor">
+            <a:schemeClr val="dk1"/>
+          </a:fontRef>
+        </p:style>
+        <p:txBody>
+          <a:bodyPr vert="horz" wrap="square" lIns="90000" tIns="46800" rIns="90000" bIns="46800" numCol="1" rtlCol="0" anchor="ctr" anchorCtr="0" compatLnSpc="1">
+            <a:prstTxWarp prst="textNoShape">
+              <a:avLst/>
+            </a:prstTxWarp>
+          </a:bodyPr>
+          <a:lstStyle/>
+          <a:p>
+            <a:pPr algn="ctr"/>
+            <a:endParaRPr lang="pt-BR" sz="2000" dirty="0">
+              <a:solidFill>
+                <a:schemeClr val="tx1"/>
+              </a:solidFill>
+              <a:latin typeface="Arial" charset="0"/>
+            </a:endParaRPr>
           </a:p>
         </p:txBody>
       </p:sp>
     </p:spTree>
     <p:extLst>
       <p:ext uri="{BB962C8B-B14F-4D97-AF65-F5344CB8AC3E}">
-        <p14:creationId xmlns:p14="http://schemas.microsoft.com/office/powerpoint/2010/main" val="1070636952"/>
+        <p14:creationId xmlns:p14="http://schemas.microsoft.com/office/powerpoint/2010/main" val="200019216"/>
       </p:ext>
     </p:extLst>
   </p:cSld>
@@ -14731,10 +14878,10 @@
       </p:grpSpPr>
       <p:pic>
         <p:nvPicPr>
-          <p:cNvPr id="5" name="Imagem 4">
-            <a:extLst>
-              <a:ext uri="{FF2B5EF4-FFF2-40B4-BE49-F238E27FC236}">
-                <a16:creationId xmlns:a16="http://schemas.microsoft.com/office/drawing/2014/main" id="{75E719C6-BED2-B4E9-9C52-40267E954964}"/>
+          <p:cNvPr id="5" name="Imagem 4" descr="Interface gráfica do usuário, Texto, Aplicativo&#10;&#10;O conteúdo gerado por IA pode estar incorreto.">
+            <a:extLst>
+              <a:ext uri="{FF2B5EF4-FFF2-40B4-BE49-F238E27FC236}">
+                <a16:creationId xmlns:a16="http://schemas.microsoft.com/office/drawing/2014/main" id="{FA61F0D6-1357-D0F1-3FF8-2101DDE537FB}"/>
               </a:ext>
             </a:extLst>
           </p:cNvPr>
@@ -14744,14 +14891,21 @@
           <p:nvPr/>
         </p:nvPicPr>
         <p:blipFill>
-          <a:blip r:embed="rId2"/>
-          <a:srcRect b="35807"/>
-          <a:stretch/>
+          <a:blip r:embed="rId2">
+            <a:extLst>
+              <a:ext uri="{28A0092B-C50C-407E-A947-70E740481C1C}">
+                <a14:useLocalDpi xmlns:a14="http://schemas.microsoft.com/office/drawing/2010/main" val="0"/>
+              </a:ext>
+            </a:extLst>
+          </a:blip>
+          <a:stretch>
+            <a:fillRect/>
+          </a:stretch>
         </p:blipFill>
         <p:spPr>
           <a:xfrm>
-            <a:off x="1493324" y="520947"/>
-            <a:ext cx="9205350" cy="3733554"/>
+            <a:off x="1103150" y="436318"/>
+            <a:ext cx="3976849" cy="6006188"/>
           </a:xfrm>
           <a:prstGeom prst="rect">
             <a:avLst/>
@@ -14763,7 +14917,7 @@
           <p:cNvPr id="6" name="Retângulo 5">
             <a:extLst>
               <a:ext uri="{FF2B5EF4-FFF2-40B4-BE49-F238E27FC236}">
-                <a16:creationId xmlns:a16="http://schemas.microsoft.com/office/drawing/2014/main" id="{E37761EC-91F8-FC9E-FEF0-412F7CD574BA}"/>
+                <a16:creationId xmlns:a16="http://schemas.microsoft.com/office/drawing/2014/main" id="{E6243093-EE39-1411-ED3C-8B2597F90487}"/>
               </a:ext>
             </a:extLst>
           </p:cNvPr>
@@ -14772,8 +14926,8 @@
         </p:nvSpPr>
         <p:spPr bwMode="auto">
           <a:xfrm>
-            <a:off x="2628900" y="2933700"/>
-            <a:ext cx="4889500" cy="660400"/>
+            <a:off x="1384300" y="2870200"/>
+            <a:ext cx="2286000" cy="558800"/>
           </a:xfrm>
           <a:prstGeom prst="rect">
             <a:avLst/>
@@ -14821,10 +14975,10 @@
       </p:sp>
       <p:sp>
         <p:nvSpPr>
-          <p:cNvPr id="8" name="Seta: para a Direita 7">
-            <a:extLst>
-              <a:ext uri="{FF2B5EF4-FFF2-40B4-BE49-F238E27FC236}">
-                <a16:creationId xmlns:a16="http://schemas.microsoft.com/office/drawing/2014/main" id="{40C21325-0813-D832-6CC8-23245091F31B}"/>
+          <p:cNvPr id="7" name="Seta: para a Esquerda 6">
+            <a:extLst>
+              <a:ext uri="{FF2B5EF4-FFF2-40B4-BE49-F238E27FC236}">
+                <a16:creationId xmlns:a16="http://schemas.microsoft.com/office/drawing/2014/main" id="{9875FE6F-BC36-C4FF-A036-9C09DE62F939}"/>
               </a:ext>
             </a:extLst>
           </p:cNvPr>
@@ -14833,10 +14987,10 @@
         </p:nvSpPr>
         <p:spPr bwMode="auto">
           <a:xfrm>
-            <a:off x="355600" y="2641600"/>
-            <a:ext cx="1993900" cy="1219200"/>
-          </a:xfrm>
-          <a:prstGeom prst="rightArrow">
+            <a:off x="3951450" y="2120900"/>
+            <a:ext cx="4267200" cy="1955800"/>
+          </a:xfrm>
+          <a:prstGeom prst="leftArrow">
             <a:avLst/>
           </a:prstGeom>
           <a:solidFill>
@@ -14880,7 +15034,19 @@
                 </a:solidFill>
                 <a:latin typeface="Arial" charset="0"/>
               </a:rPr>
-              <a:t>Digite </a:t>
+              <a:t>Crie o arquivo</a:t>
+            </a:r>
+          </a:p>
+          <a:p>
+            <a:pPr algn="ctr"/>
+            <a:r>
+              <a:rPr lang="pt-BR" sz="3200" b="1" dirty="0">
+                <a:solidFill>
+                  <a:schemeClr val="tx1"/>
+                </a:solidFill>
+                <a:latin typeface="Arial" charset="0"/>
+              </a:rPr>
+              <a:t>exemplo4.html</a:t>
             </a:r>
           </a:p>
         </p:txBody>
@@ -14888,7 +15054,7 @@
     </p:spTree>
     <p:extLst>
       <p:ext uri="{BB962C8B-B14F-4D97-AF65-F5344CB8AC3E}">
-        <p14:creationId xmlns:p14="http://schemas.microsoft.com/office/powerpoint/2010/main" val="4150168352"/>
+        <p14:creationId xmlns:p14="http://schemas.microsoft.com/office/powerpoint/2010/main" val="1070636952"/>
       </p:ext>
     </p:extLst>
   </p:cSld>
@@ -14917,10 +15083,10 @@
       </p:grpSpPr>
       <p:pic>
         <p:nvPicPr>
-          <p:cNvPr id="23" name="Imagem 22">
-            <a:extLst>
-              <a:ext uri="{FF2B5EF4-FFF2-40B4-BE49-F238E27FC236}">
-                <a16:creationId xmlns:a16="http://schemas.microsoft.com/office/drawing/2014/main" id="{348930DD-D095-B63D-F36B-DC101F9D2C6F}"/>
+          <p:cNvPr id="5" name="Imagem 4">
+            <a:extLst>
+              <a:ext uri="{FF2B5EF4-FFF2-40B4-BE49-F238E27FC236}">
+                <a16:creationId xmlns:a16="http://schemas.microsoft.com/office/drawing/2014/main" id="{75E719C6-BED2-B4E9-9C52-40267E954964}"/>
               </a:ext>
             </a:extLst>
           </p:cNvPr>
@@ -14931,14 +15097,13 @@
         </p:nvPicPr>
         <p:blipFill>
           <a:blip r:embed="rId2"/>
-          <a:stretch>
-            <a:fillRect/>
-          </a:stretch>
+          <a:srcRect b="35807"/>
+          <a:stretch/>
         </p:blipFill>
         <p:spPr>
           <a:xfrm>
-            <a:off x="3362011" y="323728"/>
-            <a:ext cx="5467977" cy="6210542"/>
+            <a:off x="1493324" y="520947"/>
+            <a:ext cx="9205350" cy="3733554"/>
           </a:xfrm>
           <a:prstGeom prst="rect">
             <a:avLst/>
@@ -14947,10 +15112,10 @@
       </p:pic>
       <p:sp>
         <p:nvSpPr>
-          <p:cNvPr id="9" name="Retângulo 8">
-            <a:extLst>
-              <a:ext uri="{FF2B5EF4-FFF2-40B4-BE49-F238E27FC236}">
-                <a16:creationId xmlns:a16="http://schemas.microsoft.com/office/drawing/2014/main" id="{625771A2-6C01-3660-EC1E-BEA18899C424}"/>
+          <p:cNvPr id="6" name="Retângulo 5">
+            <a:extLst>
+              <a:ext uri="{FF2B5EF4-FFF2-40B4-BE49-F238E27FC236}">
+                <a16:creationId xmlns:a16="http://schemas.microsoft.com/office/drawing/2014/main" id="{E37761EC-91F8-FC9E-FEF0-412F7CD574BA}"/>
               </a:ext>
             </a:extLst>
           </p:cNvPr>
@@ -14959,8 +15124,8 @@
         </p:nvSpPr>
         <p:spPr bwMode="auto">
           <a:xfrm>
-            <a:off x="3882362" y="939800"/>
-            <a:ext cx="3695700" cy="4432300"/>
+            <a:off x="2628900" y="2933700"/>
+            <a:ext cx="4889500" cy="660400"/>
           </a:xfrm>
           <a:prstGeom prst="rect">
             <a:avLst/>
@@ -15008,10 +15173,10 @@
       </p:sp>
       <p:sp>
         <p:nvSpPr>
-          <p:cNvPr id="10" name="Retângulo 9">
-            <a:extLst>
-              <a:ext uri="{FF2B5EF4-FFF2-40B4-BE49-F238E27FC236}">
-                <a16:creationId xmlns:a16="http://schemas.microsoft.com/office/drawing/2014/main" id="{887A9ED0-D574-DD2F-72C1-C8B3C4F8EDEF}"/>
+          <p:cNvPr id="8" name="Seta: para a Direita 7">
+            <a:extLst>
+              <a:ext uri="{FF2B5EF4-FFF2-40B4-BE49-F238E27FC236}">
+                <a16:creationId xmlns:a16="http://schemas.microsoft.com/office/drawing/2014/main" id="{40C21325-0813-D832-6CC8-23245091F31B}"/>
               </a:ext>
             </a:extLst>
           </p:cNvPr>
@@ -15020,16 +15185,18 @@
         </p:nvSpPr>
         <p:spPr bwMode="auto">
           <a:xfrm>
-            <a:off x="4479262" y="1549400"/>
-            <a:ext cx="2717800" cy="1468112"/>
-          </a:xfrm>
-          <a:prstGeom prst="rect">
-            <a:avLst/>
-          </a:prstGeom>
-          <a:noFill/>
+            <a:off x="355600" y="2641600"/>
+            <a:ext cx="1993900" cy="1219200"/>
+          </a:xfrm>
+          <a:prstGeom prst="rightArrow">
+            <a:avLst/>
+          </a:prstGeom>
+          <a:solidFill>
+            <a:srgbClr val="FFFF00"/>
+          </a:solidFill>
           <a:ln w="38100">
             <a:solidFill>
-              <a:srgbClr val="00B050"/>
+              <a:srgbClr val="FF0000"/>
             </a:solidFill>
             <a:headEnd type="none" w="med" len="med"/>
             <a:tailEnd type="triangle" w="med" len="med"/>
@@ -15058,21 +15225,59 @@
           <a:lstStyle/>
           <a:p>
             <a:pPr algn="ctr"/>
-            <a:endParaRPr lang="pt-BR" sz="2000" dirty="0">
-              <a:solidFill>
-                <a:schemeClr val="tx1"/>
-              </a:solidFill>
-              <a:latin typeface="Arial" charset="0"/>
-            </a:endParaRPr>
+            <a:r>
+              <a:rPr lang="pt-BR" sz="2000" dirty="0">
+                <a:solidFill>
+                  <a:schemeClr val="tx1"/>
+                </a:solidFill>
+                <a:latin typeface="Arial" charset="0"/>
+              </a:rPr>
+              <a:t>Digite </a:t>
+            </a:r>
           </a:p>
         </p:txBody>
       </p:sp>
+      <p:cxnSp>
+        <p:nvCxnSpPr>
+          <p:cNvPr id="3" name="Conector de Seta Reta 2">
+            <a:extLst>
+              <a:ext uri="{FF2B5EF4-FFF2-40B4-BE49-F238E27FC236}">
+                <a16:creationId xmlns:a16="http://schemas.microsoft.com/office/drawing/2014/main" id="{26ED7FB7-876F-4378-86D4-2EBD61A4C9E2}"/>
+              </a:ext>
+            </a:extLst>
+          </p:cNvPr>
+          <p:cNvCxnSpPr/>
+          <p:nvPr/>
+        </p:nvCxnSpPr>
+        <p:spPr bwMode="auto">
+          <a:xfrm flipH="1" flipV="1">
+            <a:off x="6512767" y="3429000"/>
+            <a:ext cx="2099388" cy="1880118"/>
+          </a:xfrm>
+          <a:prstGeom prst="straightConnector1">
+            <a:avLst/>
+          </a:prstGeom>
+          <a:solidFill>
+            <a:schemeClr val="accent1"/>
+          </a:solidFill>
+          <a:ln w="38100" cap="flat" cmpd="sng" algn="ctr">
+            <a:solidFill>
+              <a:srgbClr val="FF0000"/>
+            </a:solidFill>
+            <a:prstDash val="solid"/>
+            <a:round/>
+            <a:headEnd type="none" w="med" len="med"/>
+            <a:tailEnd type="triangle"/>
+          </a:ln>
+          <a:effectLst/>
+        </p:spPr>
+      </p:cxnSp>
       <p:sp>
         <p:nvSpPr>
-          <p:cNvPr id="11" name="Retângulo 10">
-            <a:extLst>
-              <a:ext uri="{FF2B5EF4-FFF2-40B4-BE49-F238E27FC236}">
-                <a16:creationId xmlns:a16="http://schemas.microsoft.com/office/drawing/2014/main" id="{AE391BCB-5E15-6B77-0FF1-3C958E7ED800}"/>
+          <p:cNvPr id="4" name="Elipse 3">
+            <a:extLst>
+              <a:ext uri="{FF2B5EF4-FFF2-40B4-BE49-F238E27FC236}">
+                <a16:creationId xmlns:a16="http://schemas.microsoft.com/office/drawing/2014/main" id="{AF62753A-B05D-4B3F-9CA6-78FAEE8724E7}"/>
               </a:ext>
             </a:extLst>
           </p:cNvPr>
@@ -15081,16 +15286,18 @@
         </p:nvSpPr>
         <p:spPr bwMode="auto">
           <a:xfrm>
-            <a:off x="4479262" y="3041650"/>
-            <a:ext cx="2717800" cy="1468112"/>
-          </a:xfrm>
-          <a:prstGeom prst="rect">
-            <a:avLst/>
-          </a:prstGeom>
-          <a:noFill/>
+            <a:off x="8033657" y="4851918"/>
+            <a:ext cx="2985796" cy="1614196"/>
+          </a:xfrm>
+          <a:prstGeom prst="ellipse">
+            <a:avLst/>
+          </a:prstGeom>
+          <a:solidFill>
+            <a:srgbClr val="FFFF00"/>
+          </a:solidFill>
           <a:ln w="38100">
             <a:solidFill>
-              <a:srgbClr val="00B050"/>
+              <a:srgbClr val="FF0000"/>
             </a:solidFill>
             <a:headEnd type="none" w="med" len="med"/>
             <a:tailEnd type="triangle" w="med" len="med"/>
@@ -15119,6 +15326,142 @@
           <a:lstStyle/>
           <a:p>
             <a:pPr algn="ctr"/>
+            <a:r>
+              <a:rPr lang="pt-BR" sz="2000" dirty="0">
+                <a:solidFill>
+                  <a:schemeClr val="tx1"/>
+                </a:solidFill>
+                <a:latin typeface="Arial" charset="0"/>
+              </a:rPr>
+              <a:t>Informar</a:t>
+            </a:r>
+          </a:p>
+          <a:p>
+            <a:pPr algn="ctr"/>
+            <a:r>
+              <a:rPr lang="pt-BR" sz="2800" b="1" dirty="0">
+                <a:solidFill>
+                  <a:schemeClr val="tx1"/>
+                </a:solidFill>
+                <a:latin typeface="Arial" charset="0"/>
+              </a:rPr>
+              <a:t>estilos.css</a:t>
+            </a:r>
+          </a:p>
+        </p:txBody>
+      </p:sp>
+    </p:spTree>
+    <p:extLst>
+      <p:ext uri="{BB962C8B-B14F-4D97-AF65-F5344CB8AC3E}">
+        <p14:creationId xmlns:p14="http://schemas.microsoft.com/office/powerpoint/2010/main" val="4150168352"/>
+      </p:ext>
+    </p:extLst>
+  </p:cSld>
+  <p:clrMapOvr>
+    <a:masterClrMapping/>
+  </p:clrMapOvr>
+</p:sld>
+</file>
+
+<file path=ppt/slides/slide76.xml><?xml version="1.0" encoding="utf-8"?>
+<p:sld xmlns:a="http://schemas.openxmlformats.org/drawingml/2006/main" xmlns:r="http://schemas.openxmlformats.org/officeDocument/2006/relationships" xmlns:p="http://schemas.openxmlformats.org/presentationml/2006/main">
+  <p:cSld>
+    <p:spTree>
+      <p:nvGrpSpPr>
+        <p:cNvPr id="1" name=""/>
+        <p:cNvGrpSpPr/>
+        <p:nvPr/>
+      </p:nvGrpSpPr>
+      <p:grpSpPr>
+        <a:xfrm>
+          <a:off x="0" y="0"/>
+          <a:ext cx="0" cy="0"/>
+          <a:chOff x="0" y="0"/>
+          <a:chExt cx="0" cy="0"/>
+        </a:xfrm>
+      </p:grpSpPr>
+      <p:pic>
+        <p:nvPicPr>
+          <p:cNvPr id="23" name="Imagem 22">
+            <a:extLst>
+              <a:ext uri="{FF2B5EF4-FFF2-40B4-BE49-F238E27FC236}">
+                <a16:creationId xmlns:a16="http://schemas.microsoft.com/office/drawing/2014/main" id="{348930DD-D095-B63D-F36B-DC101F9D2C6F}"/>
+              </a:ext>
+            </a:extLst>
+          </p:cNvPr>
+          <p:cNvPicPr>
+            <a:picLocks noChangeAspect="1"/>
+          </p:cNvPicPr>
+          <p:nvPr/>
+        </p:nvPicPr>
+        <p:blipFill>
+          <a:blip r:embed="rId2"/>
+          <a:stretch>
+            <a:fillRect/>
+          </a:stretch>
+        </p:blipFill>
+        <p:spPr>
+          <a:xfrm>
+            <a:off x="3362011" y="323728"/>
+            <a:ext cx="5467977" cy="6210542"/>
+          </a:xfrm>
+          <a:prstGeom prst="rect">
+            <a:avLst/>
+          </a:prstGeom>
+        </p:spPr>
+      </p:pic>
+      <p:sp>
+        <p:nvSpPr>
+          <p:cNvPr id="9" name="Retângulo 8">
+            <a:extLst>
+              <a:ext uri="{FF2B5EF4-FFF2-40B4-BE49-F238E27FC236}">
+                <a16:creationId xmlns:a16="http://schemas.microsoft.com/office/drawing/2014/main" id="{625771A2-6C01-3660-EC1E-BEA18899C424}"/>
+              </a:ext>
+            </a:extLst>
+          </p:cNvPr>
+          <p:cNvSpPr/>
+          <p:nvPr/>
+        </p:nvSpPr>
+        <p:spPr bwMode="auto">
+          <a:xfrm>
+            <a:off x="3882362" y="939800"/>
+            <a:ext cx="3695700" cy="4432300"/>
+          </a:xfrm>
+          <a:prstGeom prst="rect">
+            <a:avLst/>
+          </a:prstGeom>
+          <a:noFill/>
+          <a:ln w="38100">
+            <a:solidFill>
+              <a:srgbClr val="FF0000"/>
+            </a:solidFill>
+            <a:headEnd type="none" w="med" len="med"/>
+            <a:tailEnd type="triangle" w="med" len="med"/>
+          </a:ln>
+        </p:spPr>
+        <p:style>
+          <a:lnRef idx="1">
+            <a:schemeClr val="accent3"/>
+          </a:lnRef>
+          <a:fillRef idx="2">
+            <a:schemeClr val="accent3"/>
+          </a:fillRef>
+          <a:effectRef idx="1">
+            <a:schemeClr val="accent3"/>
+          </a:effectRef>
+          <a:fontRef idx="minor">
+            <a:schemeClr val="dk1"/>
+          </a:fontRef>
+        </p:style>
+        <p:txBody>
+          <a:bodyPr vert="horz" wrap="square" lIns="90000" tIns="46800" rIns="90000" bIns="46800" numCol="1" rtlCol="0" anchor="ctr" anchorCtr="0" compatLnSpc="1">
+            <a:prstTxWarp prst="textNoShape">
+              <a:avLst/>
+            </a:prstTxWarp>
+          </a:bodyPr>
+          <a:lstStyle/>
+          <a:p>
+            <a:pPr algn="ctr"/>
             <a:endParaRPr lang="pt-BR" sz="2000" dirty="0">
               <a:solidFill>
                 <a:schemeClr val="tx1"/>
@@ -15130,10 +15473,10 @@
       </p:sp>
       <p:sp>
         <p:nvSpPr>
-          <p:cNvPr id="12" name="Seta: para a Direita 11">
-            <a:extLst>
-              <a:ext uri="{FF2B5EF4-FFF2-40B4-BE49-F238E27FC236}">
-                <a16:creationId xmlns:a16="http://schemas.microsoft.com/office/drawing/2014/main" id="{B64B8BE9-082B-B7FF-A64D-A5A50560A86C}"/>
+          <p:cNvPr id="10" name="Retângulo 9">
+            <a:extLst>
+              <a:ext uri="{FF2B5EF4-FFF2-40B4-BE49-F238E27FC236}">
+                <a16:creationId xmlns:a16="http://schemas.microsoft.com/office/drawing/2014/main" id="{887A9ED0-D574-DD2F-72C1-C8B3C4F8EDEF}"/>
               </a:ext>
             </a:extLst>
           </p:cNvPr>
@@ -15142,8 +15485,130 @@
         </p:nvSpPr>
         <p:spPr bwMode="auto">
           <a:xfrm>
-            <a:off x="977900" y="1466850"/>
-            <a:ext cx="2494573" cy="1314450"/>
+            <a:off x="4479262" y="1549400"/>
+            <a:ext cx="2717800" cy="1468112"/>
+          </a:xfrm>
+          <a:prstGeom prst="rect">
+            <a:avLst/>
+          </a:prstGeom>
+          <a:noFill/>
+          <a:ln w="38100">
+            <a:solidFill>
+              <a:srgbClr val="00B050"/>
+            </a:solidFill>
+            <a:headEnd type="none" w="med" len="med"/>
+            <a:tailEnd type="triangle" w="med" len="med"/>
+          </a:ln>
+        </p:spPr>
+        <p:style>
+          <a:lnRef idx="1">
+            <a:schemeClr val="accent3"/>
+          </a:lnRef>
+          <a:fillRef idx="2">
+            <a:schemeClr val="accent3"/>
+          </a:fillRef>
+          <a:effectRef idx="1">
+            <a:schemeClr val="accent3"/>
+          </a:effectRef>
+          <a:fontRef idx="minor">
+            <a:schemeClr val="dk1"/>
+          </a:fontRef>
+        </p:style>
+        <p:txBody>
+          <a:bodyPr vert="horz" wrap="square" lIns="90000" tIns="46800" rIns="90000" bIns="46800" numCol="1" rtlCol="0" anchor="ctr" anchorCtr="0" compatLnSpc="1">
+            <a:prstTxWarp prst="textNoShape">
+              <a:avLst/>
+            </a:prstTxWarp>
+          </a:bodyPr>
+          <a:lstStyle/>
+          <a:p>
+            <a:pPr algn="ctr"/>
+            <a:endParaRPr lang="pt-BR" sz="2000" dirty="0">
+              <a:solidFill>
+                <a:schemeClr val="tx1"/>
+              </a:solidFill>
+              <a:latin typeface="Arial" charset="0"/>
+            </a:endParaRPr>
+          </a:p>
+        </p:txBody>
+      </p:sp>
+      <p:sp>
+        <p:nvSpPr>
+          <p:cNvPr id="11" name="Retângulo 10">
+            <a:extLst>
+              <a:ext uri="{FF2B5EF4-FFF2-40B4-BE49-F238E27FC236}">
+                <a16:creationId xmlns:a16="http://schemas.microsoft.com/office/drawing/2014/main" id="{AE391BCB-5E15-6B77-0FF1-3C958E7ED800}"/>
+              </a:ext>
+            </a:extLst>
+          </p:cNvPr>
+          <p:cNvSpPr/>
+          <p:nvPr/>
+        </p:nvSpPr>
+        <p:spPr bwMode="auto">
+          <a:xfrm>
+            <a:off x="4479262" y="3041650"/>
+            <a:ext cx="2717800" cy="1468112"/>
+          </a:xfrm>
+          <a:prstGeom prst="rect">
+            <a:avLst/>
+          </a:prstGeom>
+          <a:noFill/>
+          <a:ln w="38100">
+            <a:solidFill>
+              <a:srgbClr val="00B050"/>
+            </a:solidFill>
+            <a:headEnd type="none" w="med" len="med"/>
+            <a:tailEnd type="triangle" w="med" len="med"/>
+          </a:ln>
+        </p:spPr>
+        <p:style>
+          <a:lnRef idx="1">
+            <a:schemeClr val="accent3"/>
+          </a:lnRef>
+          <a:fillRef idx="2">
+            <a:schemeClr val="accent3"/>
+          </a:fillRef>
+          <a:effectRef idx="1">
+            <a:schemeClr val="accent3"/>
+          </a:effectRef>
+          <a:fontRef idx="minor">
+            <a:schemeClr val="dk1"/>
+          </a:fontRef>
+        </p:style>
+        <p:txBody>
+          <a:bodyPr vert="horz" wrap="square" lIns="90000" tIns="46800" rIns="90000" bIns="46800" numCol="1" rtlCol="0" anchor="ctr" anchorCtr="0" compatLnSpc="1">
+            <a:prstTxWarp prst="textNoShape">
+              <a:avLst/>
+            </a:prstTxWarp>
+          </a:bodyPr>
+          <a:lstStyle/>
+          <a:p>
+            <a:pPr algn="ctr"/>
+            <a:endParaRPr lang="pt-BR" sz="2000" dirty="0">
+              <a:solidFill>
+                <a:schemeClr val="tx1"/>
+              </a:solidFill>
+              <a:latin typeface="Arial" charset="0"/>
+            </a:endParaRPr>
+          </a:p>
+        </p:txBody>
+      </p:sp>
+      <p:sp>
+        <p:nvSpPr>
+          <p:cNvPr id="12" name="Seta: para a Direita 11">
+            <a:extLst>
+              <a:ext uri="{FF2B5EF4-FFF2-40B4-BE49-F238E27FC236}">
+                <a16:creationId xmlns:a16="http://schemas.microsoft.com/office/drawing/2014/main" id="{B64B8BE9-082B-B7FF-A64D-A5A50560A86C}"/>
+              </a:ext>
+            </a:extLst>
+          </p:cNvPr>
+          <p:cNvSpPr/>
+          <p:nvPr/>
+        </p:nvSpPr>
+        <p:spPr bwMode="auto">
+          <a:xfrm>
+            <a:off x="719667" y="357595"/>
+            <a:ext cx="3054919" cy="1606550"/>
           </a:xfrm>
           <a:prstGeom prst="rightArrow">
             <a:avLst/>
@@ -15210,13 +15675,13 @@
               <a:t> com a classe </a:t>
             </a:r>
             <a:r>
-              <a:rPr lang="pt-BR" sz="2000" b="1" dirty="0">
+              <a:rPr lang="pt-BR" sz="2000" b="1" u="sng" dirty="0">
                 <a:solidFill>
                   <a:schemeClr val="tx1"/>
                 </a:solidFill>
                 <a:latin typeface="Arial" charset="0"/>
               </a:rPr>
-              <a:t>tela</a:t>
+              <a:t>exemplo4</a:t>
             </a:r>
           </a:p>
         </p:txBody>
@@ -15235,8 +15700,8 @@
         </p:nvSpPr>
         <p:spPr bwMode="auto">
           <a:xfrm>
-            <a:off x="8467062" y="2239006"/>
-            <a:ext cx="3289300" cy="1682750"/>
+            <a:off x="8467062" y="2065867"/>
+            <a:ext cx="3289300" cy="1855889"/>
           </a:xfrm>
           <a:prstGeom prst="roundRect">
             <a:avLst/>
@@ -15273,7 +15738,7 @@
           <a:p>
             <a:pPr algn="ctr"/>
             <a:r>
-              <a:rPr lang="pt-BR" sz="2000">
+              <a:rPr lang="pt-BR" sz="2000" dirty="0">
                 <a:solidFill>
                   <a:schemeClr val="tx1"/>
                 </a:solidFill>
@@ -15282,7 +15747,7 @@
               <a:t>Inclua este </a:t>
             </a:r>
             <a:r>
-              <a:rPr lang="pt-BR" sz="2000" b="1">
+              <a:rPr lang="pt-BR" sz="2000" b="1" dirty="0" err="1">
                 <a:solidFill>
                   <a:schemeClr val="tx1"/>
                 </a:solidFill>
@@ -15291,24 +15756,90 @@
               <a:t>div</a:t>
             </a:r>
             <a:r>
-              <a:rPr lang="pt-BR" sz="2000">
+              <a:rPr lang="pt-BR" sz="2000" dirty="0">
                 <a:solidFill>
                   <a:schemeClr val="tx1"/>
                 </a:solidFill>
                 <a:latin typeface="Arial" charset="0"/>
               </a:rPr>
-              <a:t> com a classe linha e os dois </a:t>
+              <a:t> com a classe </a:t>
             </a:r>
             <a:r>
-              <a:rPr lang="pt-BR" sz="2000" b="1">
+              <a:rPr lang="pt-BR" sz="2000" b="1" u="sng" dirty="0">
                 <a:solidFill>
                   <a:schemeClr val="tx1"/>
                 </a:solidFill>
                 <a:latin typeface="Arial" charset="0"/>
               </a:rPr>
-              <a:t>paragrafos</a:t>
+              <a:t>linha</a:t>
             </a:r>
-            <a:endParaRPr lang="pt-BR" sz="2000" b="1" dirty="0">
+            <a:r>
+              <a:rPr lang="pt-BR" sz="2000" dirty="0">
+                <a:solidFill>
+                  <a:schemeClr val="tx1"/>
+                </a:solidFill>
+                <a:latin typeface="Arial" charset="0"/>
+              </a:rPr>
+              <a:t> </a:t>
+            </a:r>
+          </a:p>
+          <a:p>
+            <a:pPr algn="ctr"/>
+            <a:endParaRPr lang="pt-BR" sz="2000" dirty="0">
+              <a:solidFill>
+                <a:schemeClr val="tx1"/>
+              </a:solidFill>
+              <a:latin typeface="Arial" charset="0"/>
+            </a:endParaRPr>
+          </a:p>
+          <a:p>
+            <a:pPr algn="ctr"/>
+            <a:r>
+              <a:rPr lang="pt-BR" sz="2000" dirty="0">
+                <a:solidFill>
+                  <a:schemeClr val="tx1"/>
+                </a:solidFill>
+                <a:latin typeface="Arial" charset="0"/>
+              </a:rPr>
+              <a:t>Inclua dentro de </a:t>
+            </a:r>
+            <a:r>
+              <a:rPr lang="pt-BR" sz="2000" dirty="0" err="1">
+                <a:solidFill>
+                  <a:schemeClr val="tx1"/>
+                </a:solidFill>
+                <a:latin typeface="Arial" charset="0"/>
+              </a:rPr>
+              <a:t>div</a:t>
+            </a:r>
+            <a:r>
+              <a:rPr lang="pt-BR" sz="2000" dirty="0">
+                <a:solidFill>
+                  <a:schemeClr val="tx1"/>
+                </a:solidFill>
+                <a:latin typeface="Arial" charset="0"/>
+              </a:rPr>
+              <a:t> dois </a:t>
+            </a:r>
+            <a:r>
+              <a:rPr lang="pt-BR" sz="2000" i="1" dirty="0">
+                <a:solidFill>
+                  <a:schemeClr val="tx1"/>
+                </a:solidFill>
+                <a:latin typeface="Arial" charset="0"/>
+              </a:rPr>
+              <a:t>parágrafos </a:t>
+            </a:r>
+            <a:r>
+              <a:rPr lang="pt-BR" sz="2000" dirty="0">
+                <a:solidFill>
+                  <a:schemeClr val="tx1"/>
+                </a:solidFill>
+                <a:latin typeface="Arial" charset="0"/>
+              </a:rPr>
+              <a:t>com nomes </a:t>
+            </a:r>
+            <a:endParaRPr lang="pt-BR" sz="2000" i="1" dirty="0">
               <a:solidFill>
                 <a:schemeClr val="tx1"/>
               </a:solidFill>
@@ -15395,66 +15926,6 @@
     <p:extLst>
       <p:ext uri="{BB962C8B-B14F-4D97-AF65-F5344CB8AC3E}">
         <p14:creationId xmlns:p14="http://schemas.microsoft.com/office/powerpoint/2010/main" val="1930836898"/>
-      </p:ext>
-    </p:extLst>
-  </p:cSld>
-  <p:clrMapOvr>
-    <a:masterClrMapping/>
-  </p:clrMapOvr>
-</p:sld>
-</file>
-
-<file path=ppt/slides/slide76.xml><?xml version="1.0" encoding="utf-8"?>
-<p:sld xmlns:a="http://schemas.openxmlformats.org/drawingml/2006/main" xmlns:r="http://schemas.openxmlformats.org/officeDocument/2006/relationships" xmlns:p="http://schemas.openxmlformats.org/presentationml/2006/main">
-  <p:cSld>
-    <p:spTree>
-      <p:nvGrpSpPr>
-        <p:cNvPr id="1" name=""/>
-        <p:cNvGrpSpPr/>
-        <p:nvPr/>
-      </p:nvGrpSpPr>
-      <p:grpSpPr>
-        <a:xfrm>
-          <a:off x="0" y="0"/>
-          <a:ext cx="0" cy="0"/>
-          <a:chOff x="0" y="0"/>
-          <a:chExt cx="0" cy="0"/>
-        </a:xfrm>
-      </p:grpSpPr>
-      <p:pic>
-        <p:nvPicPr>
-          <p:cNvPr id="7" name="Imagem 6">
-            <a:extLst>
-              <a:ext uri="{FF2B5EF4-FFF2-40B4-BE49-F238E27FC236}">
-                <a16:creationId xmlns:a16="http://schemas.microsoft.com/office/drawing/2014/main" id="{B8B01D7C-7E3B-24D2-A3C1-9D2AA2DE6C4C}"/>
-              </a:ext>
-            </a:extLst>
-          </p:cNvPr>
-          <p:cNvPicPr>
-            <a:picLocks noChangeAspect="1"/>
-          </p:cNvPicPr>
-          <p:nvPr/>
-        </p:nvPicPr>
-        <p:blipFill>
-          <a:blip r:embed="rId2"/>
-          <a:stretch>
-            <a:fillRect/>
-          </a:stretch>
-        </p:blipFill>
-        <p:spPr>
-          <a:xfrm>
-            <a:off x="2690812" y="933450"/>
-            <a:ext cx="6810375" cy="4991100"/>
-          </a:xfrm>
-          <a:prstGeom prst="rect">
-            <a:avLst/>
-          </a:prstGeom>
-        </p:spPr>
-      </p:pic>
-    </p:spTree>
-    <p:extLst>
-      <p:ext uri="{BB962C8B-B14F-4D97-AF65-F5344CB8AC3E}">
-        <p14:creationId xmlns:p14="http://schemas.microsoft.com/office/powerpoint/2010/main" val="2990494596"/>
       </p:ext>
     </p:extLst>
   </p:cSld>
@@ -15483,10 +15954,10 @@
       </p:grpSpPr>
       <p:pic>
         <p:nvPicPr>
-          <p:cNvPr id="5" name="Imagem 4">
-            <a:extLst>
-              <a:ext uri="{FF2B5EF4-FFF2-40B4-BE49-F238E27FC236}">
-                <a16:creationId xmlns:a16="http://schemas.microsoft.com/office/drawing/2014/main" id="{20727871-4E8C-8C52-4F29-D6833A2ADF3B}"/>
+          <p:cNvPr id="7" name="Imagem 6">
+            <a:extLst>
+              <a:ext uri="{FF2B5EF4-FFF2-40B4-BE49-F238E27FC236}">
+                <a16:creationId xmlns:a16="http://schemas.microsoft.com/office/drawing/2014/main" id="{B8B01D7C-7E3B-24D2-A3C1-9D2AA2DE6C4C}"/>
               </a:ext>
             </a:extLst>
           </p:cNvPr>
@@ -15503,145 +15974,18 @@
         </p:blipFill>
         <p:spPr>
           <a:xfrm>
-            <a:off x="3403477" y="899716"/>
-            <a:ext cx="7721844" cy="5414166"/>
+            <a:off x="2690812" y="933450"/>
+            <a:ext cx="6810375" cy="4991100"/>
           </a:xfrm>
           <a:prstGeom prst="rect">
             <a:avLst/>
           </a:prstGeom>
         </p:spPr>
       </p:pic>
-      <p:sp>
-        <p:nvSpPr>
-          <p:cNvPr id="6" name="Seta: para a Direita 5">
-            <a:extLst>
-              <a:ext uri="{FF2B5EF4-FFF2-40B4-BE49-F238E27FC236}">
-                <a16:creationId xmlns:a16="http://schemas.microsoft.com/office/drawing/2014/main" id="{A05C8016-B04C-85D8-0E61-C75A09D7A033}"/>
-              </a:ext>
-            </a:extLst>
-          </p:cNvPr>
-          <p:cNvSpPr/>
-          <p:nvPr/>
-        </p:nvSpPr>
-        <p:spPr bwMode="auto">
-          <a:xfrm>
-            <a:off x="1125220" y="1752600"/>
-            <a:ext cx="2346960" cy="1435100"/>
-          </a:xfrm>
-          <a:prstGeom prst="rightArrow">
-            <a:avLst/>
-          </a:prstGeom>
-          <a:solidFill>
-            <a:srgbClr val="FFFF00"/>
-          </a:solidFill>
-          <a:ln w="38100">
-            <a:solidFill>
-              <a:srgbClr val="FF0000"/>
-            </a:solidFill>
-            <a:headEnd type="none" w="med" len="med"/>
-            <a:tailEnd type="triangle" w="med" len="med"/>
-          </a:ln>
-        </p:spPr>
-        <p:style>
-          <a:lnRef idx="1">
-            <a:schemeClr val="accent3"/>
-          </a:lnRef>
-          <a:fillRef idx="2">
-            <a:schemeClr val="accent3"/>
-          </a:fillRef>
-          <a:effectRef idx="1">
-            <a:schemeClr val="accent3"/>
-          </a:effectRef>
-          <a:fontRef idx="minor">
-            <a:schemeClr val="dk1"/>
-          </a:fontRef>
-        </p:style>
-        <p:txBody>
-          <a:bodyPr vert="horz" wrap="square" lIns="90000" tIns="46800" rIns="90000" bIns="46800" numCol="1" rtlCol="0" anchor="ctr" anchorCtr="0" compatLnSpc="1">
-            <a:prstTxWarp prst="textNoShape">
-              <a:avLst/>
-            </a:prstTxWarp>
-          </a:bodyPr>
-          <a:lstStyle/>
-          <a:p>
-            <a:pPr algn="ctr"/>
-            <a:r>
-              <a:rPr lang="pt-BR" sz="2000" dirty="0">
-                <a:solidFill>
-                  <a:schemeClr val="tx1"/>
-                </a:solidFill>
-                <a:latin typeface="Arial" charset="0"/>
-              </a:rPr>
-              <a:t>Abra o arquivo estilos.css</a:t>
-            </a:r>
-          </a:p>
-        </p:txBody>
-      </p:sp>
-      <p:sp>
-        <p:nvSpPr>
-          <p:cNvPr id="7" name="Elipse 6">
-            <a:extLst>
-              <a:ext uri="{FF2B5EF4-FFF2-40B4-BE49-F238E27FC236}">
-                <a16:creationId xmlns:a16="http://schemas.microsoft.com/office/drawing/2014/main" id="{31B1C224-321A-C688-F650-15EB0AAB6288}"/>
-              </a:ext>
-            </a:extLst>
-          </p:cNvPr>
-          <p:cNvSpPr/>
-          <p:nvPr/>
-        </p:nvSpPr>
-        <p:spPr bwMode="auto">
-          <a:xfrm>
-            <a:off x="3581400" y="2006600"/>
-            <a:ext cx="1524000" cy="927100"/>
-          </a:xfrm>
-          <a:prstGeom prst="ellipse">
-            <a:avLst/>
-          </a:prstGeom>
-          <a:noFill/>
-          <a:ln w="38100">
-            <a:solidFill>
-              <a:srgbClr val="FF0000"/>
-            </a:solidFill>
-            <a:headEnd type="none" w="med" len="med"/>
-            <a:tailEnd type="triangle" w="med" len="med"/>
-          </a:ln>
-        </p:spPr>
-        <p:style>
-          <a:lnRef idx="1">
-            <a:schemeClr val="accent3"/>
-          </a:lnRef>
-          <a:fillRef idx="2">
-            <a:schemeClr val="accent3"/>
-          </a:fillRef>
-          <a:effectRef idx="1">
-            <a:schemeClr val="accent3"/>
-          </a:effectRef>
-          <a:fontRef idx="minor">
-            <a:schemeClr val="dk1"/>
-          </a:fontRef>
-        </p:style>
-        <p:txBody>
-          <a:bodyPr vert="horz" wrap="square" lIns="90000" tIns="46800" rIns="90000" bIns="46800" numCol="1" rtlCol="0" anchor="ctr" anchorCtr="0" compatLnSpc="1">
-            <a:prstTxWarp prst="textNoShape">
-              <a:avLst/>
-            </a:prstTxWarp>
-          </a:bodyPr>
-          <a:lstStyle/>
-          <a:p>
-            <a:pPr algn="ctr"/>
-            <a:endParaRPr lang="pt-BR" sz="2000" dirty="0">
-              <a:solidFill>
-                <a:schemeClr val="tx1"/>
-              </a:solidFill>
-              <a:latin typeface="Arial" charset="0"/>
-            </a:endParaRPr>
-          </a:p>
-        </p:txBody>
-      </p:sp>
     </p:spTree>
     <p:extLst>
       <p:ext uri="{BB962C8B-B14F-4D97-AF65-F5344CB8AC3E}">
-        <p14:creationId xmlns:p14="http://schemas.microsoft.com/office/powerpoint/2010/main" val="586049433"/>
+        <p14:creationId xmlns:p14="http://schemas.microsoft.com/office/powerpoint/2010/main" val="2990494596"/>
       </p:ext>
     </p:extLst>
   </p:cSld>
@@ -15673,7 +16017,7 @@
           <p:cNvPr id="5" name="Imagem 4">
             <a:extLst>
               <a:ext uri="{FF2B5EF4-FFF2-40B4-BE49-F238E27FC236}">
-                <a16:creationId xmlns:a16="http://schemas.microsoft.com/office/drawing/2014/main" id="{A7D61557-0A60-9646-DA83-B729BB93DD24}"/>
+                <a16:creationId xmlns:a16="http://schemas.microsoft.com/office/drawing/2014/main" id="{20727871-4E8C-8C52-4F29-D6833A2ADF3B}"/>
               </a:ext>
             </a:extLst>
           </p:cNvPr>
@@ -15690,8 +16034,8 @@
         </p:blipFill>
         <p:spPr>
           <a:xfrm>
-            <a:off x="814784" y="95548"/>
-            <a:ext cx="8759031" cy="6666904"/>
+            <a:off x="3403477" y="899716"/>
+            <a:ext cx="7721844" cy="5414166"/>
           </a:xfrm>
           <a:prstGeom prst="rect">
             <a:avLst/>
@@ -15700,10 +16044,10 @@
       </p:pic>
       <p:sp>
         <p:nvSpPr>
-          <p:cNvPr id="6" name="Retângulo 5">
-            <a:extLst>
-              <a:ext uri="{FF2B5EF4-FFF2-40B4-BE49-F238E27FC236}">
-                <a16:creationId xmlns:a16="http://schemas.microsoft.com/office/drawing/2014/main" id="{2B1B594C-F0F9-16F7-3BBF-3C1454607DEC}"/>
+          <p:cNvPr id="6" name="Seta: para a Direita 5">
+            <a:extLst>
+              <a:ext uri="{FF2B5EF4-FFF2-40B4-BE49-F238E27FC236}">
+                <a16:creationId xmlns:a16="http://schemas.microsoft.com/office/drawing/2014/main" id="{A05C8016-B04C-85D8-0E61-C75A09D7A033}"/>
               </a:ext>
             </a:extLst>
           </p:cNvPr>
@@ -15712,13 +16056,15 @@
         </p:nvSpPr>
         <p:spPr bwMode="auto">
           <a:xfrm>
-            <a:off x="5829300" y="2794000"/>
-            <a:ext cx="1879600" cy="3911600"/>
-          </a:xfrm>
-          <a:prstGeom prst="rect">
-            <a:avLst/>
-          </a:prstGeom>
-          <a:noFill/>
+            <a:off x="1125220" y="1752600"/>
+            <a:ext cx="2346960" cy="1435100"/>
+          </a:xfrm>
+          <a:prstGeom prst="rightArrow">
+            <a:avLst/>
+          </a:prstGeom>
+          <a:solidFill>
+            <a:srgbClr val="FFFF00"/>
+          </a:solidFill>
           <a:ln w="38100">
             <a:solidFill>
               <a:srgbClr val="FF0000"/>
@@ -15750,21 +16096,24 @@
           <a:lstStyle/>
           <a:p>
             <a:pPr algn="ctr"/>
-            <a:endParaRPr lang="pt-BR" sz="2000" dirty="0">
-              <a:solidFill>
-                <a:schemeClr val="tx1"/>
-              </a:solidFill>
-              <a:latin typeface="Arial" charset="0"/>
-            </a:endParaRPr>
+            <a:r>
+              <a:rPr lang="pt-BR" sz="2000" dirty="0">
+                <a:solidFill>
+                  <a:schemeClr val="tx1"/>
+                </a:solidFill>
+                <a:latin typeface="Arial" charset="0"/>
+              </a:rPr>
+              <a:t>Abra o arquivo estilos.css</a:t>
+            </a:r>
           </a:p>
         </p:txBody>
       </p:sp>
       <p:sp>
         <p:nvSpPr>
-          <p:cNvPr id="7" name="Seta: para a Esquerda 6">
-            <a:extLst>
-              <a:ext uri="{FF2B5EF4-FFF2-40B4-BE49-F238E27FC236}">
-                <a16:creationId xmlns:a16="http://schemas.microsoft.com/office/drawing/2014/main" id="{E472EB24-19A0-F8C0-3773-22A3C77811E9}"/>
+          <p:cNvPr id="7" name="Elipse 6">
+            <a:extLst>
+              <a:ext uri="{FF2B5EF4-FFF2-40B4-BE49-F238E27FC236}">
+                <a16:creationId xmlns:a16="http://schemas.microsoft.com/office/drawing/2014/main" id="{31B1C224-321A-C688-F650-15EB0AAB6288}"/>
               </a:ext>
             </a:extLst>
           </p:cNvPr>
@@ -15773,15 +16122,13 @@
         </p:nvSpPr>
         <p:spPr bwMode="auto">
           <a:xfrm>
-            <a:off x="7924800" y="3898900"/>
-            <a:ext cx="3086100" cy="1511300"/>
-          </a:xfrm>
-          <a:prstGeom prst="leftArrow">
-            <a:avLst/>
-          </a:prstGeom>
-          <a:solidFill>
-            <a:srgbClr val="FFFF00"/>
-          </a:solidFill>
+            <a:off x="3581400" y="2006600"/>
+            <a:ext cx="1524000" cy="927100"/>
+          </a:xfrm>
+          <a:prstGeom prst="ellipse">
+            <a:avLst/>
+          </a:prstGeom>
+          <a:noFill/>
           <a:ln w="38100">
             <a:solidFill>
               <a:srgbClr val="FF0000"/>
@@ -15813,22 +16160,19 @@
           <a:lstStyle/>
           <a:p>
             <a:pPr algn="ctr"/>
-            <a:r>
-              <a:rPr lang="pt-BR" sz="2000" dirty="0">
-                <a:solidFill>
-                  <a:schemeClr val="tx1"/>
-                </a:solidFill>
-                <a:latin typeface="Arial" charset="0"/>
-              </a:rPr>
-              <a:t>Crie estas classes</a:t>
-            </a:r>
+            <a:endParaRPr lang="pt-BR" sz="2000" dirty="0">
+              <a:solidFill>
+                <a:schemeClr val="tx1"/>
+              </a:solidFill>
+              <a:latin typeface="Arial" charset="0"/>
+            </a:endParaRPr>
           </a:p>
         </p:txBody>
       </p:sp>
     </p:spTree>
     <p:extLst>
       <p:ext uri="{BB962C8B-B14F-4D97-AF65-F5344CB8AC3E}">
-        <p14:creationId xmlns:p14="http://schemas.microsoft.com/office/powerpoint/2010/main" val="3130547498"/>
+        <p14:creationId xmlns:p14="http://schemas.microsoft.com/office/powerpoint/2010/main" val="586049433"/>
       </p:ext>
     </p:extLst>
   </p:cSld>
@@ -15860,7 +16204,7 @@
           <p:cNvPr id="5" name="Imagem 4">
             <a:extLst>
               <a:ext uri="{FF2B5EF4-FFF2-40B4-BE49-F238E27FC236}">
-                <a16:creationId xmlns:a16="http://schemas.microsoft.com/office/drawing/2014/main" id="{5C5C4956-B124-E1D3-0952-BCB41B298634}"/>
+                <a16:creationId xmlns:a16="http://schemas.microsoft.com/office/drawing/2014/main" id="{A7D61557-0A60-9646-DA83-B729BB93DD24}"/>
               </a:ext>
             </a:extLst>
           </p:cNvPr>
@@ -15869,16 +16213,15 @@
           </p:cNvPicPr>
           <p:nvPr/>
         </p:nvPicPr>
-        <p:blipFill>
+        <p:blipFill rotWithShape="1">
           <a:blip r:embed="rId2"/>
-          <a:stretch>
-            <a:fillRect/>
-          </a:stretch>
+          <a:srcRect l="49178" t="30062"/>
+          <a:stretch/>
         </p:blipFill>
         <p:spPr>
           <a:xfrm>
-            <a:off x="3756624" y="214735"/>
-            <a:ext cx="4678753" cy="6428529"/>
+            <a:off x="3412067" y="308308"/>
+            <a:ext cx="6161748" cy="6454143"/>
           </a:xfrm>
           <a:prstGeom prst="rect">
             <a:avLst/>
@@ -15890,7 +16233,7 @@
           <p:cNvPr id="6" name="Retângulo 5">
             <a:extLst>
               <a:ext uri="{FF2B5EF4-FFF2-40B4-BE49-F238E27FC236}">
-                <a16:creationId xmlns:a16="http://schemas.microsoft.com/office/drawing/2014/main" id="{D3EB0523-CA6C-A058-4FFD-EE9446B3E133}"/>
+                <a16:creationId xmlns:a16="http://schemas.microsoft.com/office/drawing/2014/main" id="{2B1B594C-F0F9-16F7-3BBF-3C1454607DEC}"/>
               </a:ext>
             </a:extLst>
           </p:cNvPr>
@@ -15899,8 +16242,8 @@
         </p:nvSpPr>
         <p:spPr bwMode="auto">
           <a:xfrm>
-            <a:off x="4368800" y="2298700"/>
-            <a:ext cx="3898900" cy="1955800"/>
+            <a:off x="4334934" y="1337733"/>
+            <a:ext cx="1955800" cy="5367867"/>
           </a:xfrm>
           <a:prstGeom prst="rect">
             <a:avLst/>
@@ -15946,10 +16289,259 @@
           </a:p>
         </p:txBody>
       </p:sp>
+      <p:sp>
+        <p:nvSpPr>
+          <p:cNvPr id="7" name="Seta: para a Esquerda 6">
+            <a:extLst>
+              <a:ext uri="{FF2B5EF4-FFF2-40B4-BE49-F238E27FC236}">
+                <a16:creationId xmlns:a16="http://schemas.microsoft.com/office/drawing/2014/main" id="{E472EB24-19A0-F8C0-3773-22A3C77811E9}"/>
+              </a:ext>
+            </a:extLst>
+          </p:cNvPr>
+          <p:cNvSpPr/>
+          <p:nvPr/>
+        </p:nvSpPr>
+        <p:spPr bwMode="auto">
+          <a:xfrm>
+            <a:off x="7044267" y="3111500"/>
+            <a:ext cx="3086100" cy="1511300"/>
+          </a:xfrm>
+          <a:prstGeom prst="leftArrow">
+            <a:avLst/>
+          </a:prstGeom>
+          <a:solidFill>
+            <a:srgbClr val="FFFF00"/>
+          </a:solidFill>
+          <a:ln w="38100">
+            <a:solidFill>
+              <a:srgbClr val="FF0000"/>
+            </a:solidFill>
+            <a:headEnd type="none" w="med" len="med"/>
+            <a:tailEnd type="triangle" w="med" len="med"/>
+          </a:ln>
+        </p:spPr>
+        <p:style>
+          <a:lnRef idx="1">
+            <a:schemeClr val="accent3"/>
+          </a:lnRef>
+          <a:fillRef idx="2">
+            <a:schemeClr val="accent3"/>
+          </a:fillRef>
+          <a:effectRef idx="1">
+            <a:schemeClr val="accent3"/>
+          </a:effectRef>
+          <a:fontRef idx="minor">
+            <a:schemeClr val="dk1"/>
+          </a:fontRef>
+        </p:style>
+        <p:txBody>
+          <a:bodyPr vert="horz" wrap="square" lIns="90000" tIns="46800" rIns="90000" bIns="46800" numCol="1" rtlCol="0" anchor="ctr" anchorCtr="0" compatLnSpc="1">
+            <a:prstTxWarp prst="textNoShape">
+              <a:avLst/>
+            </a:prstTxWarp>
+          </a:bodyPr>
+          <a:lstStyle/>
+          <a:p>
+            <a:pPr algn="ctr"/>
+            <a:r>
+              <a:rPr lang="pt-BR" sz="2000" dirty="0">
+                <a:solidFill>
+                  <a:schemeClr val="tx1"/>
+                </a:solidFill>
+                <a:latin typeface="Arial" charset="0"/>
+              </a:rPr>
+              <a:t>Crie estas 3 classes</a:t>
+            </a:r>
+          </a:p>
+        </p:txBody>
+      </p:sp>
+      <p:sp>
+        <p:nvSpPr>
+          <p:cNvPr id="4" name="Retângulo: Cantos Arredondados 3">
+            <a:extLst>
+              <a:ext uri="{FF2B5EF4-FFF2-40B4-BE49-F238E27FC236}">
+                <a16:creationId xmlns:a16="http://schemas.microsoft.com/office/drawing/2014/main" id="{952D8D94-176B-4FD7-A317-6D9C3D78EFC2}"/>
+              </a:ext>
+            </a:extLst>
+          </p:cNvPr>
+          <p:cNvSpPr/>
+          <p:nvPr/>
+        </p:nvSpPr>
+        <p:spPr bwMode="auto">
+          <a:xfrm>
+            <a:off x="7568353" y="5977467"/>
+            <a:ext cx="2812626" cy="728133"/>
+          </a:xfrm>
+          <a:prstGeom prst="roundRect">
+            <a:avLst/>
+          </a:prstGeom>
+          <a:solidFill>
+            <a:srgbClr val="FFFF00"/>
+          </a:solidFill>
+          <a:ln w="38100">
+            <a:solidFill>
+              <a:srgbClr val="FF0000"/>
+            </a:solidFill>
+            <a:headEnd type="none" w="med" len="med"/>
+            <a:tailEnd type="triangle" w="med" len="med"/>
+          </a:ln>
+        </p:spPr>
+        <p:style>
+          <a:lnRef idx="1">
+            <a:schemeClr val="accent3"/>
+          </a:lnRef>
+          <a:fillRef idx="2">
+            <a:schemeClr val="accent3"/>
+          </a:fillRef>
+          <a:effectRef idx="1">
+            <a:schemeClr val="accent3"/>
+          </a:effectRef>
+          <a:fontRef idx="minor">
+            <a:schemeClr val="dk1"/>
+          </a:fontRef>
+        </p:style>
+        <p:txBody>
+          <a:bodyPr vert="horz" wrap="square" lIns="90000" tIns="46800" rIns="90000" bIns="46800" numCol="1" rtlCol="0" anchor="ctr" anchorCtr="0" compatLnSpc="1">
+            <a:prstTxWarp prst="textNoShape">
+              <a:avLst/>
+            </a:prstTxWarp>
+          </a:bodyPr>
+          <a:lstStyle/>
+          <a:p>
+            <a:pPr algn="ctr"/>
+            <a:r>
+              <a:rPr lang="pt-BR" dirty="0">
+                <a:solidFill>
+                  <a:schemeClr val="tx1"/>
+                </a:solidFill>
+                <a:latin typeface="Arial" charset="0"/>
+              </a:rPr>
+              <a:t>Note que há um espaço entre </a:t>
+            </a:r>
+            <a:r>
+              <a:rPr lang="pt-BR" b="1" dirty="0">
+                <a:solidFill>
+                  <a:schemeClr val="tx1"/>
+                </a:solidFill>
+                <a:latin typeface="Arial" charset="0"/>
+              </a:rPr>
+              <a:t>linha</a:t>
+            </a:r>
+            <a:r>
+              <a:rPr lang="pt-BR" dirty="0">
+                <a:solidFill>
+                  <a:schemeClr val="tx1"/>
+                </a:solidFill>
+                <a:latin typeface="Arial" charset="0"/>
+              </a:rPr>
+              <a:t> e </a:t>
+            </a:r>
+            <a:r>
+              <a:rPr lang="pt-BR" b="1" dirty="0">
+                <a:solidFill>
+                  <a:schemeClr val="tx1"/>
+                </a:solidFill>
+                <a:latin typeface="Arial" charset="0"/>
+              </a:rPr>
+              <a:t>p</a:t>
+            </a:r>
+          </a:p>
+        </p:txBody>
+      </p:sp>
+      <p:sp>
+        <p:nvSpPr>
+          <p:cNvPr id="8" name="Forma Livre: Forma 7">
+            <a:extLst>
+              <a:ext uri="{FF2B5EF4-FFF2-40B4-BE49-F238E27FC236}">
+                <a16:creationId xmlns:a16="http://schemas.microsoft.com/office/drawing/2014/main" id="{0B673A7A-791D-4A95-9917-DEB231C3ED75}"/>
+              </a:ext>
+            </a:extLst>
+          </p:cNvPr>
+          <p:cNvSpPr/>
+          <p:nvPr/>
+        </p:nvSpPr>
+        <p:spPr bwMode="auto">
+          <a:xfrm>
+            <a:off x="5503333" y="5401733"/>
+            <a:ext cx="2082800" cy="939800"/>
+          </a:xfrm>
+          <a:custGeom>
+            <a:avLst/>
+            <a:gdLst>
+              <a:gd name="connsiteX0" fmla="*/ 2082800 w 2082800"/>
+              <a:gd name="connsiteY0" fmla="*/ 939800 h 939800"/>
+              <a:gd name="connsiteX1" fmla="*/ 347134 w 2082800"/>
+              <a:gd name="connsiteY1" fmla="*/ 685800 h 939800"/>
+              <a:gd name="connsiteX2" fmla="*/ 0 w 2082800"/>
+              <a:gd name="connsiteY2" fmla="*/ 0 h 939800"/>
+            </a:gdLst>
+            <a:ahLst/>
+            <a:cxnLst>
+              <a:cxn ang="0">
+                <a:pos x="connsiteX0" y="connsiteY0"/>
+              </a:cxn>
+              <a:cxn ang="0">
+                <a:pos x="connsiteX1" y="connsiteY1"/>
+              </a:cxn>
+              <a:cxn ang="0">
+                <a:pos x="connsiteX2" y="connsiteY2"/>
+              </a:cxn>
+            </a:cxnLst>
+            <a:rect l="l" t="t" r="r" b="b"/>
+            <a:pathLst>
+              <a:path w="2082800" h="939800">
+                <a:moveTo>
+                  <a:pt x="2082800" y="939800"/>
+                </a:moveTo>
+                <a:cubicBezTo>
+                  <a:pt x="1388533" y="891116"/>
+                  <a:pt x="694267" y="842433"/>
+                  <a:pt x="347134" y="685800"/>
+                </a:cubicBezTo>
+                <a:cubicBezTo>
+                  <a:pt x="1" y="529167"/>
+                  <a:pt x="0" y="264583"/>
+                  <a:pt x="0" y="0"/>
+                </a:cubicBezTo>
+              </a:path>
+            </a:pathLst>
+          </a:custGeom>
+          <a:noFill/>
+          <a:ln w="38100">
+            <a:solidFill>
+              <a:srgbClr val="FF0000"/>
+            </a:solidFill>
+            <a:headEnd type="none" w="med" len="med"/>
+            <a:tailEnd type="triangle" w="med" len="med"/>
+          </a:ln>
+        </p:spPr>
+        <p:style>
+          <a:lnRef idx="1">
+            <a:schemeClr val="accent3"/>
+          </a:lnRef>
+          <a:fillRef idx="2">
+            <a:schemeClr val="accent3"/>
+          </a:fillRef>
+          <a:effectRef idx="1">
+            <a:schemeClr val="accent3"/>
+          </a:effectRef>
+          <a:fontRef idx="minor">
+            <a:schemeClr val="dk1"/>
+          </a:fontRef>
+        </p:style>
+        <p:txBody>
+          <a:bodyPr rtlCol="0" anchor="ctr"/>
+          <a:lstStyle/>
+          <a:p>
+            <a:pPr algn="ctr"/>
+            <a:endParaRPr lang="pt-BR"/>
+          </a:p>
+        </p:txBody>
+      </p:sp>
     </p:spTree>
     <p:extLst>
       <p:ext uri="{BB962C8B-B14F-4D97-AF65-F5344CB8AC3E}">
-        <p14:creationId xmlns:p14="http://schemas.microsoft.com/office/powerpoint/2010/main" val="3061367427"/>
+        <p14:creationId xmlns:p14="http://schemas.microsoft.com/office/powerpoint/2010/main" val="3130547498"/>
       </p:ext>
     </p:extLst>
   </p:cSld>
@@ -16108,7 +16700,7 @@
           <p:cNvPr id="5" name="Imagem 4">
             <a:extLst>
               <a:ext uri="{FF2B5EF4-FFF2-40B4-BE49-F238E27FC236}">
-                <a16:creationId xmlns:a16="http://schemas.microsoft.com/office/drawing/2014/main" id="{465E15BD-81DF-0111-544F-636C33746389}"/>
+                <a16:creationId xmlns:a16="http://schemas.microsoft.com/office/drawing/2014/main" id="{5C5C4956-B124-E1D3-0952-BCB41B298634}"/>
               </a:ext>
             </a:extLst>
           </p:cNvPr>
@@ -16117,26 +16709,86 @@
           </p:cNvPicPr>
           <p:nvPr/>
         </p:nvPicPr>
-        <p:blipFill>
+        <p:blipFill rotWithShape="1">
           <a:blip r:embed="rId2"/>
-          <a:stretch>
-            <a:fillRect/>
-          </a:stretch>
+          <a:srcRect t="22408" b="26252"/>
+          <a:stretch/>
         </p:blipFill>
         <p:spPr>
           <a:xfrm>
-            <a:off x="2690812" y="933450"/>
-            <a:ext cx="6810375" cy="4991100"/>
+            <a:off x="3528024" y="876299"/>
+            <a:ext cx="6733576" cy="4749801"/>
           </a:xfrm>
           <a:prstGeom prst="rect">
             <a:avLst/>
           </a:prstGeom>
         </p:spPr>
       </p:pic>
+      <p:sp>
+        <p:nvSpPr>
+          <p:cNvPr id="6" name="Retângulo 5">
+            <a:extLst>
+              <a:ext uri="{FF2B5EF4-FFF2-40B4-BE49-F238E27FC236}">
+                <a16:creationId xmlns:a16="http://schemas.microsoft.com/office/drawing/2014/main" id="{D3EB0523-CA6C-A058-4FFD-EE9446B3E133}"/>
+              </a:ext>
+            </a:extLst>
+          </p:cNvPr>
+          <p:cNvSpPr/>
+          <p:nvPr/>
+        </p:nvSpPr>
+        <p:spPr bwMode="auto">
+          <a:xfrm>
+            <a:off x="5113867" y="2451100"/>
+            <a:ext cx="4724400" cy="1672167"/>
+          </a:xfrm>
+          <a:prstGeom prst="rect">
+            <a:avLst/>
+          </a:prstGeom>
+          <a:noFill/>
+          <a:ln w="38100">
+            <a:solidFill>
+              <a:srgbClr val="FF0000"/>
+            </a:solidFill>
+            <a:headEnd type="none" w="med" len="med"/>
+            <a:tailEnd type="triangle" w="med" len="med"/>
+          </a:ln>
+        </p:spPr>
+        <p:style>
+          <a:lnRef idx="1">
+            <a:schemeClr val="accent3"/>
+          </a:lnRef>
+          <a:fillRef idx="2">
+            <a:schemeClr val="accent3"/>
+          </a:fillRef>
+          <a:effectRef idx="1">
+            <a:schemeClr val="accent3"/>
+          </a:effectRef>
+          <a:fontRef idx="minor">
+            <a:schemeClr val="dk1"/>
+          </a:fontRef>
+        </p:style>
+        <p:txBody>
+          <a:bodyPr vert="horz" wrap="square" lIns="90000" tIns="46800" rIns="90000" bIns="46800" numCol="1" rtlCol="0" anchor="ctr" anchorCtr="0" compatLnSpc="1">
+            <a:prstTxWarp prst="textNoShape">
+              <a:avLst/>
+            </a:prstTxWarp>
+          </a:bodyPr>
+          <a:lstStyle/>
+          <a:p>
+            <a:pPr algn="ctr"/>
+            <a:endParaRPr lang="pt-BR" sz="2000" dirty="0">
+              <a:solidFill>
+                <a:schemeClr val="tx1"/>
+              </a:solidFill>
+              <a:latin typeface="Arial" charset="0"/>
+            </a:endParaRPr>
+          </a:p>
+        </p:txBody>
+      </p:sp>
     </p:spTree>
     <p:extLst>
       <p:ext uri="{BB962C8B-B14F-4D97-AF65-F5344CB8AC3E}">
-        <p14:creationId xmlns:p14="http://schemas.microsoft.com/office/powerpoint/2010/main" val="1251015514"/>
+        <p14:creationId xmlns:p14="http://schemas.microsoft.com/office/powerpoint/2010/main" val="3061367427"/>
       </p:ext>
     </p:extLst>
   </p:cSld>
@@ -16168,7 +16820,7 @@
           <p:cNvPr id="5" name="Imagem 4">
             <a:extLst>
               <a:ext uri="{FF2B5EF4-FFF2-40B4-BE49-F238E27FC236}">
-                <a16:creationId xmlns:a16="http://schemas.microsoft.com/office/drawing/2014/main" id="{2F6726B4-1359-4685-BFFF-5C56C29569D8}"/>
+                <a16:creationId xmlns:a16="http://schemas.microsoft.com/office/drawing/2014/main" id="{465E15BD-81DF-0111-544F-636C33746389}"/>
               </a:ext>
             </a:extLst>
           </p:cNvPr>
@@ -16185,79 +16837,121 @@
         </p:blipFill>
         <p:spPr>
           <a:xfrm>
-            <a:off x="3464993" y="309833"/>
-            <a:ext cx="5262012" cy="6238335"/>
+            <a:off x="398094" y="1000505"/>
+            <a:ext cx="6810375" cy="4991100"/>
           </a:xfrm>
           <a:prstGeom prst="rect">
             <a:avLst/>
           </a:prstGeom>
         </p:spPr>
       </p:pic>
-      <p:sp>
-        <p:nvSpPr>
-          <p:cNvPr id="6" name="Retângulo 5">
-            <a:extLst>
-              <a:ext uri="{FF2B5EF4-FFF2-40B4-BE49-F238E27FC236}">
-                <a16:creationId xmlns:a16="http://schemas.microsoft.com/office/drawing/2014/main" id="{F0A12C3C-70A5-6D1A-44C7-A32231FE4CEB}"/>
-              </a:ext>
-            </a:extLst>
-          </p:cNvPr>
-          <p:cNvSpPr/>
-          <p:nvPr/>
-        </p:nvSpPr>
+      <p:pic>
+        <p:nvPicPr>
+          <p:cNvPr id="3" name="Imagem 2">
+            <a:extLst>
+              <a:ext uri="{FF2B5EF4-FFF2-40B4-BE49-F238E27FC236}">
+                <a16:creationId xmlns:a16="http://schemas.microsoft.com/office/drawing/2014/main" id="{BDBE1F77-9B0D-4171-A7FC-70C72B6BAC3C}"/>
+              </a:ext>
+            </a:extLst>
+          </p:cNvPr>
+          <p:cNvPicPr>
+            <a:picLocks noChangeAspect="1"/>
+          </p:cNvPicPr>
+          <p:nvPr/>
+        </p:nvPicPr>
+        <p:blipFill rotWithShape="1">
+          <a:blip r:embed="rId3"/>
+          <a:srcRect l="14247" t="33413" r="5784" b="39498"/>
+          <a:stretch/>
+        </p:blipFill>
+        <p:spPr>
+          <a:xfrm>
+            <a:off x="7484999" y="2772276"/>
+            <a:ext cx="4475207" cy="2082800"/>
+          </a:xfrm>
+          <a:prstGeom prst="rect">
+            <a:avLst/>
+          </a:prstGeom>
+        </p:spPr>
+      </p:pic>
+      <p:cxnSp>
+        <p:nvCxnSpPr>
+          <p:cNvPr id="4" name="Conector de Seta Reta 3">
+            <a:extLst>
+              <a:ext uri="{FF2B5EF4-FFF2-40B4-BE49-F238E27FC236}">
+                <a16:creationId xmlns:a16="http://schemas.microsoft.com/office/drawing/2014/main" id="{B6365992-CED9-439D-B122-2E502C08E198}"/>
+              </a:ext>
+            </a:extLst>
+          </p:cNvPr>
+          <p:cNvCxnSpPr>
+            <a:stCxn id="3" idx="1"/>
+          </p:cNvCxnSpPr>
+          <p:nvPr/>
+        </p:nvCxnSpPr>
         <p:spPr bwMode="auto">
-          <a:xfrm>
-            <a:off x="4508500" y="4114800"/>
-            <a:ext cx="3530600" cy="876300"/>
-          </a:xfrm>
-          <a:prstGeom prst="rect">
-            <a:avLst/>
-          </a:prstGeom>
-          <a:noFill/>
-          <a:ln w="38100">
+          <a:xfrm flipH="1" flipV="1">
+            <a:off x="1492370" y="2225615"/>
+            <a:ext cx="5992629" cy="1588061"/>
+          </a:xfrm>
+          <a:prstGeom prst="straightConnector1">
+            <a:avLst/>
+          </a:prstGeom>
+          <a:solidFill>
+            <a:schemeClr val="accent1"/>
+          </a:solidFill>
+          <a:ln w="38100" cap="flat" cmpd="sng" algn="ctr">
             <a:solidFill>
               <a:srgbClr val="FF0000"/>
             </a:solidFill>
+            <a:prstDash val="solid"/>
+            <a:round/>
             <a:headEnd type="none" w="med" len="med"/>
-            <a:tailEnd type="triangle" w="med" len="med"/>
+            <a:tailEnd type="triangle"/>
           </a:ln>
-        </p:spPr>
-        <p:style>
-          <a:lnRef idx="1">
-            <a:schemeClr val="accent3"/>
-          </a:lnRef>
-          <a:fillRef idx="2">
-            <a:schemeClr val="accent3"/>
-          </a:fillRef>
-          <a:effectRef idx="1">
-            <a:schemeClr val="accent3"/>
-          </a:effectRef>
-          <a:fontRef idx="minor">
-            <a:schemeClr val="dk1"/>
-          </a:fontRef>
-        </p:style>
-        <p:txBody>
-          <a:bodyPr vert="horz" wrap="square" lIns="90000" tIns="46800" rIns="90000" bIns="46800" numCol="1" rtlCol="0" anchor="ctr" anchorCtr="0" compatLnSpc="1">
-            <a:prstTxWarp prst="textNoShape">
-              <a:avLst/>
-            </a:prstTxWarp>
-          </a:bodyPr>
-          <a:lstStyle/>
-          <a:p>
-            <a:pPr algn="ctr"/>
-            <a:endParaRPr lang="pt-BR" sz="2000" dirty="0">
-              <a:solidFill>
-                <a:schemeClr val="tx1"/>
-              </a:solidFill>
-              <a:latin typeface="Arial" charset="0"/>
-            </a:endParaRPr>
-          </a:p>
-        </p:txBody>
-      </p:sp>
+          <a:effectLst/>
+        </p:spPr>
+      </p:cxnSp>
+      <p:cxnSp>
+        <p:nvCxnSpPr>
+          <p:cNvPr id="7" name="Conector de Seta Reta 6">
+            <a:extLst>
+              <a:ext uri="{FF2B5EF4-FFF2-40B4-BE49-F238E27FC236}">
+                <a16:creationId xmlns:a16="http://schemas.microsoft.com/office/drawing/2014/main" id="{9334BA11-76C7-425A-B755-6D43FB925B81}"/>
+              </a:ext>
+            </a:extLst>
+          </p:cNvPr>
+          <p:cNvCxnSpPr>
+            <a:stCxn id="3" idx="1"/>
+          </p:cNvCxnSpPr>
+          <p:nvPr/>
+        </p:nvCxnSpPr>
+        <p:spPr bwMode="auto">
+          <a:xfrm flipH="1">
+            <a:off x="940279" y="3813676"/>
+            <a:ext cx="6544720" cy="1802120"/>
+          </a:xfrm>
+          <a:prstGeom prst="straightConnector1">
+            <a:avLst/>
+          </a:prstGeom>
+          <a:solidFill>
+            <a:schemeClr val="accent1"/>
+          </a:solidFill>
+          <a:ln w="38100" cap="flat" cmpd="sng" algn="ctr">
+            <a:solidFill>
+              <a:srgbClr val="FF0000"/>
+            </a:solidFill>
+            <a:prstDash val="solid"/>
+            <a:round/>
+            <a:headEnd type="none" w="med" len="med"/>
+            <a:tailEnd type="triangle"/>
+          </a:ln>
+          <a:effectLst/>
+        </p:spPr>
+      </p:cxnSp>
     </p:spTree>
     <p:extLst>
       <p:ext uri="{BB962C8B-B14F-4D97-AF65-F5344CB8AC3E}">
-        <p14:creationId xmlns:p14="http://schemas.microsoft.com/office/powerpoint/2010/main" val="2597034226"/>
+        <p14:creationId xmlns:p14="http://schemas.microsoft.com/office/powerpoint/2010/main" val="1251015514"/>
       </p:ext>
     </p:extLst>
   </p:cSld>
@@ -16286,10 +16980,10 @@
       </p:grpSpPr>
       <p:pic>
         <p:nvPicPr>
-          <p:cNvPr id="3" name="Imagem 2">
-            <a:extLst>
-              <a:ext uri="{FF2B5EF4-FFF2-40B4-BE49-F238E27FC236}">
-                <a16:creationId xmlns:a16="http://schemas.microsoft.com/office/drawing/2014/main" id="{D2401E20-43E7-3601-9353-BA9C4E3144AC}"/>
+          <p:cNvPr id="5" name="Imagem 4">
+            <a:extLst>
+              <a:ext uri="{FF2B5EF4-FFF2-40B4-BE49-F238E27FC236}">
+                <a16:creationId xmlns:a16="http://schemas.microsoft.com/office/drawing/2014/main" id="{2F6726B4-1359-4685-BFFF-5C56C29569D8}"/>
               </a:ext>
             </a:extLst>
           </p:cNvPr>
@@ -16298,26 +16992,86 @@
           </p:cNvPicPr>
           <p:nvPr/>
         </p:nvPicPr>
-        <p:blipFill>
+        <p:blipFill rotWithShape="1">
           <a:blip r:embed="rId2"/>
-          <a:stretch>
-            <a:fillRect/>
-          </a:stretch>
+          <a:srcRect t="23263" r="8970" b="11727"/>
+          <a:stretch/>
         </p:blipFill>
         <p:spPr>
           <a:xfrm>
-            <a:off x="1975722" y="409385"/>
-            <a:ext cx="8240554" cy="6039231"/>
+            <a:off x="1432993" y="491067"/>
+            <a:ext cx="7203007" cy="6098537"/>
           </a:xfrm>
           <a:prstGeom prst="rect">
             <a:avLst/>
           </a:prstGeom>
         </p:spPr>
       </p:pic>
+      <p:sp>
+        <p:nvSpPr>
+          <p:cNvPr id="6" name="Retângulo 5">
+            <a:extLst>
+              <a:ext uri="{FF2B5EF4-FFF2-40B4-BE49-F238E27FC236}">
+                <a16:creationId xmlns:a16="http://schemas.microsoft.com/office/drawing/2014/main" id="{F0A12C3C-70A5-6D1A-44C7-A32231FE4CEB}"/>
+              </a:ext>
+            </a:extLst>
+          </p:cNvPr>
+          <p:cNvSpPr/>
+          <p:nvPr/>
+        </p:nvSpPr>
+        <p:spPr bwMode="auto">
+          <a:xfrm>
+            <a:off x="2967566" y="4241799"/>
+            <a:ext cx="4881033" cy="905933"/>
+          </a:xfrm>
+          <a:prstGeom prst="rect">
+            <a:avLst/>
+          </a:prstGeom>
+          <a:noFill/>
+          <a:ln w="38100">
+            <a:solidFill>
+              <a:srgbClr val="FF0000"/>
+            </a:solidFill>
+            <a:headEnd type="none" w="med" len="med"/>
+            <a:tailEnd type="triangle" w="med" len="med"/>
+          </a:ln>
+        </p:spPr>
+        <p:style>
+          <a:lnRef idx="1">
+            <a:schemeClr val="accent3"/>
+          </a:lnRef>
+          <a:fillRef idx="2">
+            <a:schemeClr val="accent3"/>
+          </a:fillRef>
+          <a:effectRef idx="1">
+            <a:schemeClr val="accent3"/>
+          </a:effectRef>
+          <a:fontRef idx="minor">
+            <a:schemeClr val="dk1"/>
+          </a:fontRef>
+        </p:style>
+        <p:txBody>
+          <a:bodyPr vert="horz" wrap="square" lIns="90000" tIns="46800" rIns="90000" bIns="46800" numCol="1" rtlCol="0" anchor="ctr" anchorCtr="0" compatLnSpc="1">
+            <a:prstTxWarp prst="textNoShape">
+              <a:avLst/>
+            </a:prstTxWarp>
+          </a:bodyPr>
+          <a:lstStyle/>
+          <a:p>
+            <a:pPr algn="ctr"/>
+            <a:endParaRPr lang="pt-BR" sz="2000" dirty="0">
+              <a:solidFill>
+                <a:schemeClr val="tx1"/>
+              </a:solidFill>
+              <a:latin typeface="Arial" charset="0"/>
+            </a:endParaRPr>
+          </a:p>
+        </p:txBody>
+      </p:sp>
     </p:spTree>
     <p:extLst>
       <p:ext uri="{BB962C8B-B14F-4D97-AF65-F5344CB8AC3E}">
-        <p14:creationId xmlns:p14="http://schemas.microsoft.com/office/powerpoint/2010/main" val="1499805397"/>
+        <p14:creationId xmlns:p14="http://schemas.microsoft.com/office/powerpoint/2010/main" val="2597034226"/>
       </p:ext>
     </p:extLst>
   </p:cSld>
@@ -16349,7 +17103,7 @@
           <p:cNvPr id="3" name="Imagem 2">
             <a:extLst>
               <a:ext uri="{FF2B5EF4-FFF2-40B4-BE49-F238E27FC236}">
-                <a16:creationId xmlns:a16="http://schemas.microsoft.com/office/drawing/2014/main" id="{BBE35273-5824-4AA2-A3AE-0EB902F4BFAE}"/>
+                <a16:creationId xmlns:a16="http://schemas.microsoft.com/office/drawing/2014/main" id="{D2401E20-43E7-3601-9353-BA9C4E3144AC}"/>
               </a:ext>
             </a:extLst>
           </p:cNvPr>
@@ -16366,20 +17120,87 @@
         </p:blipFill>
         <p:spPr>
           <a:xfrm>
-            <a:off x="3541071" y="252773"/>
-            <a:ext cx="5109856" cy="6352452"/>
+            <a:off x="383992" y="409384"/>
+            <a:ext cx="8240554" cy="6039231"/>
           </a:xfrm>
           <a:prstGeom prst="rect">
             <a:avLst/>
           </a:prstGeom>
         </p:spPr>
       </p:pic>
+      <p:pic>
+        <p:nvPicPr>
+          <p:cNvPr id="4" name="Imagem 3">
+            <a:extLst>
+              <a:ext uri="{FF2B5EF4-FFF2-40B4-BE49-F238E27FC236}">
+                <a16:creationId xmlns:a16="http://schemas.microsoft.com/office/drawing/2014/main" id="{67F2DB1F-5E97-4E56-83A8-10CA78FA576D}"/>
+              </a:ext>
+            </a:extLst>
+          </p:cNvPr>
+          <p:cNvPicPr>
+            <a:picLocks noChangeAspect="1"/>
+          </p:cNvPicPr>
+          <p:nvPr/>
+        </p:nvPicPr>
+        <p:blipFill rotWithShape="1">
+          <a:blip r:embed="rId3"/>
+          <a:srcRect l="12385" t="55664" r="18814" b="24390"/>
+          <a:stretch/>
+        </p:blipFill>
+        <p:spPr>
+          <a:xfrm>
+            <a:off x="6548310" y="2963333"/>
+            <a:ext cx="5247000" cy="1803400"/>
+          </a:xfrm>
+          <a:prstGeom prst="rect">
+            <a:avLst/>
+          </a:prstGeom>
+        </p:spPr>
+      </p:pic>
+      <p:cxnSp>
+        <p:nvCxnSpPr>
+          <p:cNvPr id="5" name="Conector reto 4">
+            <a:extLst>
+              <a:ext uri="{FF2B5EF4-FFF2-40B4-BE49-F238E27FC236}">
+                <a16:creationId xmlns:a16="http://schemas.microsoft.com/office/drawing/2014/main" id="{2AED7CAF-CC01-4818-9B0B-BD06D438B20A}"/>
+              </a:ext>
+            </a:extLst>
+          </p:cNvPr>
+          <p:cNvCxnSpPr>
+            <a:cxnSpLocks/>
+            <a:stCxn id="4" idx="0"/>
+          </p:cNvCxnSpPr>
+          <p:nvPr/>
+        </p:nvCxnSpPr>
+        <p:spPr bwMode="auto">
+          <a:xfrm flipH="1" flipV="1">
+            <a:off x="7577668" y="2040467"/>
+            <a:ext cx="1594142" cy="922866"/>
+          </a:xfrm>
+          <a:prstGeom prst="line">
+            <a:avLst/>
+          </a:prstGeom>
+          <a:solidFill>
+            <a:schemeClr val="accent1"/>
+          </a:solidFill>
+          <a:ln w="38100" cap="flat" cmpd="sng" algn="ctr">
+            <a:solidFill>
+              <a:srgbClr val="FF0000"/>
+            </a:solidFill>
+            <a:prstDash val="solid"/>
+            <a:round/>
+            <a:headEnd type="none" w="med" len="med"/>
+            <a:tailEnd type="triangle"/>
+          </a:ln>
+          <a:effectLst/>
+        </p:spPr>
+      </p:cxnSp>
       <p:sp>
         <p:nvSpPr>
-          <p:cNvPr id="4" name="Retângulo 3">
-            <a:extLst>
-              <a:ext uri="{FF2B5EF4-FFF2-40B4-BE49-F238E27FC236}">
-                <a16:creationId xmlns:a16="http://schemas.microsoft.com/office/drawing/2014/main" id="{17878BF0-B9A5-12FA-DCC2-6B0AFF956CF8}"/>
+          <p:cNvPr id="6" name="Retângulo 5">
+            <a:extLst>
+              <a:ext uri="{FF2B5EF4-FFF2-40B4-BE49-F238E27FC236}">
+                <a16:creationId xmlns:a16="http://schemas.microsoft.com/office/drawing/2014/main" id="{FEBCF146-383F-4E6F-B7D0-F2E1F8A26261}"/>
               </a:ext>
             </a:extLst>
           </p:cNvPr>
@@ -16388,8 +17209,8 @@
         </p:nvSpPr>
         <p:spPr bwMode="auto">
           <a:xfrm>
-            <a:off x="4686300" y="5499100"/>
-            <a:ext cx="1854200" cy="850900"/>
+            <a:off x="220133" y="1430867"/>
+            <a:ext cx="8652934" cy="508000"/>
           </a:xfrm>
           <a:prstGeom prst="rect">
             <a:avLst/>
@@ -16435,10 +17256,109 @@
           </a:p>
         </p:txBody>
       </p:sp>
+      <p:sp>
+        <p:nvSpPr>
+          <p:cNvPr id="7" name="Retângulo 6">
+            <a:extLst>
+              <a:ext uri="{FF2B5EF4-FFF2-40B4-BE49-F238E27FC236}">
+                <a16:creationId xmlns:a16="http://schemas.microsoft.com/office/drawing/2014/main" id="{E2C5DA3E-D88A-4DDF-A221-3160A8CAA0EA}"/>
+              </a:ext>
+            </a:extLst>
+          </p:cNvPr>
+          <p:cNvSpPr/>
+          <p:nvPr/>
+        </p:nvSpPr>
+        <p:spPr bwMode="auto">
+          <a:xfrm>
+            <a:off x="101600" y="5932149"/>
+            <a:ext cx="8652934" cy="508000"/>
+          </a:xfrm>
+          <a:prstGeom prst="rect">
+            <a:avLst/>
+          </a:prstGeom>
+          <a:noFill/>
+          <a:ln w="38100">
+            <a:solidFill>
+              <a:srgbClr val="FF0000"/>
+            </a:solidFill>
+            <a:headEnd type="none" w="med" len="med"/>
+            <a:tailEnd type="triangle" w="med" len="med"/>
+          </a:ln>
+        </p:spPr>
+        <p:style>
+          <a:lnRef idx="1">
+            <a:schemeClr val="accent3"/>
+          </a:lnRef>
+          <a:fillRef idx="2">
+            <a:schemeClr val="accent3"/>
+          </a:fillRef>
+          <a:effectRef idx="1">
+            <a:schemeClr val="accent3"/>
+          </a:effectRef>
+          <a:fontRef idx="minor">
+            <a:schemeClr val="dk1"/>
+          </a:fontRef>
+        </p:style>
+        <p:txBody>
+          <a:bodyPr vert="horz" wrap="square" lIns="90000" tIns="46800" rIns="90000" bIns="46800" numCol="1" rtlCol="0" anchor="ctr" anchorCtr="0" compatLnSpc="1">
+            <a:prstTxWarp prst="textNoShape">
+              <a:avLst/>
+            </a:prstTxWarp>
+          </a:bodyPr>
+          <a:lstStyle/>
+          <a:p>
+            <a:pPr algn="ctr"/>
+            <a:endParaRPr lang="pt-BR" sz="2000" dirty="0">
+              <a:solidFill>
+                <a:schemeClr val="tx1"/>
+              </a:solidFill>
+              <a:latin typeface="Arial" charset="0"/>
+            </a:endParaRPr>
+          </a:p>
+        </p:txBody>
+      </p:sp>
+      <p:cxnSp>
+        <p:nvCxnSpPr>
+          <p:cNvPr id="9" name="Conector de Seta Reta 8">
+            <a:extLst>
+              <a:ext uri="{FF2B5EF4-FFF2-40B4-BE49-F238E27FC236}">
+                <a16:creationId xmlns:a16="http://schemas.microsoft.com/office/drawing/2014/main" id="{2F94A2B5-8226-48CB-8091-A1B3C1E6B78D}"/>
+              </a:ext>
+            </a:extLst>
+          </p:cNvPr>
+          <p:cNvCxnSpPr>
+            <a:cxnSpLocks/>
+            <a:stCxn id="4" idx="2"/>
+          </p:cNvCxnSpPr>
+          <p:nvPr/>
+        </p:nvCxnSpPr>
+        <p:spPr bwMode="auto">
+          <a:xfrm flipH="1">
+            <a:off x="7950202" y="4766733"/>
+            <a:ext cx="1221608" cy="1117600"/>
+          </a:xfrm>
+          <a:prstGeom prst="straightConnector1">
+            <a:avLst/>
+          </a:prstGeom>
+          <a:solidFill>
+            <a:schemeClr val="accent1"/>
+          </a:solidFill>
+          <a:ln w="38100" cap="flat" cmpd="sng" algn="ctr">
+            <a:solidFill>
+              <a:srgbClr val="FF0000"/>
+            </a:solidFill>
+            <a:prstDash val="solid"/>
+            <a:round/>
+            <a:headEnd type="none" w="med" len="med"/>
+            <a:tailEnd type="triangle"/>
+          </a:ln>
+          <a:effectLst/>
+        </p:spPr>
+      </p:cxnSp>
     </p:spTree>
     <p:extLst>
       <p:ext uri="{BB962C8B-B14F-4D97-AF65-F5344CB8AC3E}">
-        <p14:creationId xmlns:p14="http://schemas.microsoft.com/office/powerpoint/2010/main" val="3266175919"/>
+        <p14:creationId xmlns:p14="http://schemas.microsoft.com/office/powerpoint/2010/main" val="1499805397"/>
       </p:ext>
     </p:extLst>
   </p:cSld>
@@ -16467,10 +17387,10 @@
       </p:grpSpPr>
       <p:pic>
         <p:nvPicPr>
-          <p:cNvPr id="3" name="Imagem 2">
-            <a:extLst>
-              <a:ext uri="{FF2B5EF4-FFF2-40B4-BE49-F238E27FC236}">
-                <a16:creationId xmlns:a16="http://schemas.microsoft.com/office/drawing/2014/main" id="{29248A6D-0F06-5957-1661-CE314776E745}"/>
+          <p:cNvPr id="2" name="Imagem 1">
+            <a:extLst>
+              <a:ext uri="{FF2B5EF4-FFF2-40B4-BE49-F238E27FC236}">
+                <a16:creationId xmlns:a16="http://schemas.microsoft.com/office/drawing/2014/main" id="{D502EC74-C78A-41F7-B457-43B0C0938EFE}"/>
               </a:ext>
             </a:extLst>
           </p:cNvPr>
@@ -16487,7 +17407,554 @@
         </p:blipFill>
         <p:spPr>
           <a:xfrm>
-            <a:off x="2690812" y="933450"/>
+            <a:off x="383992" y="409384"/>
+            <a:ext cx="8240554" cy="6039231"/>
+          </a:xfrm>
+          <a:prstGeom prst="rect">
+            <a:avLst/>
+          </a:prstGeom>
+        </p:spPr>
+      </p:pic>
+      <p:sp>
+        <p:nvSpPr>
+          <p:cNvPr id="3" name="Retângulo: Cantos Arredondados 2">
+            <a:extLst>
+              <a:ext uri="{FF2B5EF4-FFF2-40B4-BE49-F238E27FC236}">
+                <a16:creationId xmlns:a16="http://schemas.microsoft.com/office/drawing/2014/main" id="{9FBB19F1-B8EB-498B-BE23-CEA75C4169F4}"/>
+              </a:ext>
+            </a:extLst>
+          </p:cNvPr>
+          <p:cNvSpPr/>
+          <p:nvPr/>
+        </p:nvSpPr>
+        <p:spPr bwMode="auto">
+          <a:xfrm>
+            <a:off x="9005542" y="2937932"/>
+            <a:ext cx="2802466" cy="1820333"/>
+          </a:xfrm>
+          <a:prstGeom prst="roundRect">
+            <a:avLst/>
+          </a:prstGeom>
+          <a:solidFill>
+            <a:srgbClr val="FFFF00"/>
+          </a:solidFill>
+          <a:ln w="38100">
+            <a:solidFill>
+              <a:srgbClr val="FF0000"/>
+            </a:solidFill>
+            <a:headEnd type="none" w="med" len="med"/>
+            <a:tailEnd type="triangle" w="med" len="med"/>
+          </a:ln>
+        </p:spPr>
+        <p:style>
+          <a:lnRef idx="1">
+            <a:schemeClr val="accent3"/>
+          </a:lnRef>
+          <a:fillRef idx="2">
+            <a:schemeClr val="accent3"/>
+          </a:fillRef>
+          <a:effectRef idx="1">
+            <a:schemeClr val="accent3"/>
+          </a:effectRef>
+          <a:fontRef idx="minor">
+            <a:schemeClr val="dk1"/>
+          </a:fontRef>
+        </p:style>
+        <p:txBody>
+          <a:bodyPr vert="horz" wrap="square" lIns="90000" tIns="46800" rIns="90000" bIns="46800" numCol="1" rtlCol="0" anchor="ctr" anchorCtr="0" compatLnSpc="1">
+            <a:prstTxWarp prst="textNoShape">
+              <a:avLst/>
+            </a:prstTxWarp>
+          </a:bodyPr>
+          <a:lstStyle/>
+          <a:p>
+            <a:pPr algn="ctr"/>
+            <a:r>
+              <a:rPr lang="pt-BR" sz="2000" dirty="0">
+                <a:solidFill>
+                  <a:schemeClr val="tx1"/>
+                </a:solidFill>
+                <a:latin typeface="Arial" charset="0"/>
+              </a:rPr>
+              <a:t>Observe que os nomes não estão encostados na </a:t>
+            </a:r>
+            <a:r>
+              <a:rPr lang="pt-BR" sz="2000" u="sng" dirty="0">
+                <a:solidFill>
+                  <a:schemeClr val="tx1"/>
+                </a:solidFill>
+                <a:latin typeface="Arial" charset="0"/>
+              </a:rPr>
+              <a:t>margem</a:t>
+            </a:r>
+            <a:r>
+              <a:rPr lang="pt-BR" sz="2000" dirty="0">
+                <a:solidFill>
+                  <a:schemeClr val="tx1"/>
+                </a:solidFill>
+                <a:latin typeface="Arial" charset="0"/>
+              </a:rPr>
+              <a:t> </a:t>
+            </a:r>
+            <a:r>
+              <a:rPr lang="pt-BR" sz="2000" u="sng" dirty="0">
+                <a:solidFill>
+                  <a:schemeClr val="tx1"/>
+                </a:solidFill>
+                <a:latin typeface="Arial" charset="0"/>
+              </a:rPr>
+              <a:t>superior</a:t>
+            </a:r>
+            <a:r>
+              <a:rPr lang="pt-BR" sz="2000" dirty="0">
+                <a:solidFill>
+                  <a:schemeClr val="tx1"/>
+                </a:solidFill>
+                <a:latin typeface="Arial" charset="0"/>
+              </a:rPr>
+              <a:t> e na </a:t>
+            </a:r>
+            <a:r>
+              <a:rPr lang="pt-BR" sz="2000" u="sng" dirty="0">
+                <a:solidFill>
+                  <a:schemeClr val="tx1"/>
+                </a:solidFill>
+                <a:latin typeface="Arial" charset="0"/>
+              </a:rPr>
+              <a:t>inferior</a:t>
+            </a:r>
+          </a:p>
+        </p:txBody>
+      </p:sp>
+      <p:sp>
+        <p:nvSpPr>
+          <p:cNvPr id="4" name="Forma Livre: Forma 3">
+            <a:extLst>
+              <a:ext uri="{FF2B5EF4-FFF2-40B4-BE49-F238E27FC236}">
+                <a16:creationId xmlns:a16="http://schemas.microsoft.com/office/drawing/2014/main" id="{339108AB-E501-49C7-BA85-9D5AE10BD990}"/>
+              </a:ext>
+            </a:extLst>
+          </p:cNvPr>
+          <p:cNvSpPr/>
+          <p:nvPr/>
+        </p:nvSpPr>
+        <p:spPr bwMode="auto">
+          <a:xfrm>
+            <a:off x="8669867" y="1507067"/>
+            <a:ext cx="1801205" cy="1430866"/>
+          </a:xfrm>
+          <a:custGeom>
+            <a:avLst/>
+            <a:gdLst>
+              <a:gd name="connsiteX0" fmla="*/ 1735666 w 1801205"/>
+              <a:gd name="connsiteY0" fmla="*/ 1430866 h 1430866"/>
+              <a:gd name="connsiteX1" fmla="*/ 1684866 w 1801205"/>
+              <a:gd name="connsiteY1" fmla="*/ 1176866 h 1430866"/>
+              <a:gd name="connsiteX2" fmla="*/ 1676400 w 1801205"/>
+              <a:gd name="connsiteY2" fmla="*/ 143933 h 1430866"/>
+              <a:gd name="connsiteX3" fmla="*/ 0 w 1801205"/>
+              <a:gd name="connsiteY3" fmla="*/ 0 h 1430866"/>
+            </a:gdLst>
+            <a:ahLst/>
+            <a:cxnLst>
+              <a:cxn ang="0">
+                <a:pos x="connsiteX0" y="connsiteY0"/>
+              </a:cxn>
+              <a:cxn ang="0">
+                <a:pos x="connsiteX1" y="connsiteY1"/>
+              </a:cxn>
+              <a:cxn ang="0">
+                <a:pos x="connsiteX2" y="connsiteY2"/>
+              </a:cxn>
+              <a:cxn ang="0">
+                <a:pos x="connsiteX3" y="connsiteY3"/>
+              </a:cxn>
+            </a:cxnLst>
+            <a:rect l="l" t="t" r="r" b="b"/>
+            <a:pathLst>
+              <a:path w="1801205" h="1430866">
+                <a:moveTo>
+                  <a:pt x="1735666" y="1430866"/>
+                </a:moveTo>
+                <a:cubicBezTo>
+                  <a:pt x="1715205" y="1411110"/>
+                  <a:pt x="1694744" y="1391355"/>
+                  <a:pt x="1684866" y="1176866"/>
+                </a:cubicBezTo>
+                <a:cubicBezTo>
+                  <a:pt x="1674988" y="962377"/>
+                  <a:pt x="1957211" y="340077"/>
+                  <a:pt x="1676400" y="143933"/>
+                </a:cubicBezTo>
+                <a:cubicBezTo>
+                  <a:pt x="1395589" y="-52211"/>
+                  <a:pt x="293511" y="35278"/>
+                  <a:pt x="0" y="0"/>
+                </a:cubicBezTo>
+              </a:path>
+            </a:pathLst>
+          </a:custGeom>
+          <a:noFill/>
+          <a:ln w="38100">
+            <a:solidFill>
+              <a:srgbClr val="FF0000"/>
+            </a:solidFill>
+            <a:headEnd type="none" w="med" len="med"/>
+            <a:tailEnd type="triangle" w="med" len="med"/>
+          </a:ln>
+        </p:spPr>
+        <p:style>
+          <a:lnRef idx="1">
+            <a:schemeClr val="accent3"/>
+          </a:lnRef>
+          <a:fillRef idx="2">
+            <a:schemeClr val="accent3"/>
+          </a:fillRef>
+          <a:effectRef idx="1">
+            <a:schemeClr val="accent3"/>
+          </a:effectRef>
+          <a:fontRef idx="minor">
+            <a:schemeClr val="dk1"/>
+          </a:fontRef>
+        </p:style>
+        <p:txBody>
+          <a:bodyPr rtlCol="0" anchor="ctr"/>
+          <a:lstStyle/>
+          <a:p>
+            <a:pPr algn="ctr"/>
+            <a:endParaRPr lang="pt-BR"/>
+          </a:p>
+        </p:txBody>
+      </p:sp>
+      <p:sp>
+        <p:nvSpPr>
+          <p:cNvPr id="6" name="Forma Livre: Forma 5">
+            <a:extLst>
+              <a:ext uri="{FF2B5EF4-FFF2-40B4-BE49-F238E27FC236}">
+                <a16:creationId xmlns:a16="http://schemas.microsoft.com/office/drawing/2014/main" id="{B5FB5497-F118-4C54-AF9C-0D360880F706}"/>
+              </a:ext>
+            </a:extLst>
+          </p:cNvPr>
+          <p:cNvSpPr/>
+          <p:nvPr/>
+        </p:nvSpPr>
+        <p:spPr bwMode="auto">
+          <a:xfrm>
+            <a:off x="8644467" y="4758267"/>
+            <a:ext cx="1975512" cy="1727912"/>
+          </a:xfrm>
+          <a:custGeom>
+            <a:avLst/>
+            <a:gdLst>
+              <a:gd name="connsiteX0" fmla="*/ 1778000 w 1975512"/>
+              <a:gd name="connsiteY0" fmla="*/ 0 h 1727912"/>
+              <a:gd name="connsiteX1" fmla="*/ 1811866 w 1975512"/>
+              <a:gd name="connsiteY1" fmla="*/ 1591733 h 1727912"/>
+              <a:gd name="connsiteX2" fmla="*/ 0 w 1975512"/>
+              <a:gd name="connsiteY2" fmla="*/ 1617133 h 1727912"/>
+            </a:gdLst>
+            <a:ahLst/>
+            <a:cxnLst>
+              <a:cxn ang="0">
+                <a:pos x="connsiteX0" y="connsiteY0"/>
+              </a:cxn>
+              <a:cxn ang="0">
+                <a:pos x="connsiteX1" y="connsiteY1"/>
+              </a:cxn>
+              <a:cxn ang="0">
+                <a:pos x="connsiteX2" y="connsiteY2"/>
+              </a:cxn>
+            </a:cxnLst>
+            <a:rect l="l" t="t" r="r" b="b"/>
+            <a:pathLst>
+              <a:path w="1975512" h="1727912">
+                <a:moveTo>
+                  <a:pt x="1778000" y="0"/>
+                </a:moveTo>
+                <a:cubicBezTo>
+                  <a:pt x="1943099" y="661105"/>
+                  <a:pt x="2108199" y="1322211"/>
+                  <a:pt x="1811866" y="1591733"/>
+                </a:cubicBezTo>
+                <a:cubicBezTo>
+                  <a:pt x="1515533" y="1861255"/>
+                  <a:pt x="251178" y="1653822"/>
+                  <a:pt x="0" y="1617133"/>
+                </a:cubicBezTo>
+              </a:path>
+            </a:pathLst>
+          </a:custGeom>
+          <a:noFill/>
+          <a:ln w="38100">
+            <a:solidFill>
+              <a:srgbClr val="FF0000"/>
+            </a:solidFill>
+            <a:headEnd type="none" w="med" len="med"/>
+            <a:tailEnd type="triangle" w="med" len="med"/>
+          </a:ln>
+        </p:spPr>
+        <p:style>
+          <a:lnRef idx="1">
+            <a:schemeClr val="accent3"/>
+          </a:lnRef>
+          <a:fillRef idx="2">
+            <a:schemeClr val="accent3"/>
+          </a:fillRef>
+          <a:effectRef idx="1">
+            <a:schemeClr val="accent3"/>
+          </a:effectRef>
+          <a:fontRef idx="minor">
+            <a:schemeClr val="dk1"/>
+          </a:fontRef>
+        </p:style>
+        <p:txBody>
+          <a:bodyPr rtlCol="0" anchor="ctr"/>
+          <a:lstStyle/>
+          <a:p>
+            <a:pPr algn="ctr"/>
+            <a:endParaRPr lang="pt-BR"/>
+          </a:p>
+        </p:txBody>
+      </p:sp>
+    </p:spTree>
+    <p:extLst>
+      <p:ext uri="{BB962C8B-B14F-4D97-AF65-F5344CB8AC3E}">
+        <p14:creationId xmlns:p14="http://schemas.microsoft.com/office/powerpoint/2010/main" val="819476295"/>
+      </p:ext>
+    </p:extLst>
+  </p:cSld>
+  <p:clrMapOvr>
+    <a:masterClrMapping/>
+  </p:clrMapOvr>
+</p:sld>
+</file>
+
+<file path=ppt/slides/slide85.xml><?xml version="1.0" encoding="utf-8"?>
+<p:sld xmlns:a="http://schemas.openxmlformats.org/drawingml/2006/main" xmlns:r="http://schemas.openxmlformats.org/officeDocument/2006/relationships" xmlns:p="http://schemas.openxmlformats.org/presentationml/2006/main">
+  <p:cSld>
+    <p:spTree>
+      <p:nvGrpSpPr>
+        <p:cNvPr id="1" name=""/>
+        <p:cNvGrpSpPr/>
+        <p:nvPr/>
+      </p:nvGrpSpPr>
+      <p:grpSpPr>
+        <a:xfrm>
+          <a:off x="0" y="0"/>
+          <a:ext cx="0" cy="0"/>
+          <a:chOff x="0" y="0"/>
+          <a:chExt cx="0" cy="0"/>
+        </a:xfrm>
+      </p:grpSpPr>
+      <p:pic>
+        <p:nvPicPr>
+          <p:cNvPr id="3" name="Imagem 2">
+            <a:extLst>
+              <a:ext uri="{FF2B5EF4-FFF2-40B4-BE49-F238E27FC236}">
+                <a16:creationId xmlns:a16="http://schemas.microsoft.com/office/drawing/2014/main" id="{BBE35273-5824-4AA2-A3AE-0EB902F4BFAE}"/>
+              </a:ext>
+            </a:extLst>
+          </p:cNvPr>
+          <p:cNvPicPr>
+            <a:picLocks noChangeAspect="1"/>
+          </p:cNvPicPr>
+          <p:nvPr/>
+        </p:nvPicPr>
+        <p:blipFill rotWithShape="1">
+          <a:blip r:embed="rId2"/>
+          <a:srcRect t="43069" r="11062"/>
+          <a:stretch/>
+        </p:blipFill>
+        <p:spPr>
+          <a:xfrm>
+            <a:off x="653937" y="508000"/>
+            <a:ext cx="7289581" cy="5800892"/>
+          </a:xfrm>
+          <a:prstGeom prst="rect">
+            <a:avLst/>
+          </a:prstGeom>
+        </p:spPr>
+      </p:pic>
+      <p:sp>
+        <p:nvSpPr>
+          <p:cNvPr id="4" name="Retângulo 3">
+            <a:extLst>
+              <a:ext uri="{FF2B5EF4-FFF2-40B4-BE49-F238E27FC236}">
+                <a16:creationId xmlns:a16="http://schemas.microsoft.com/office/drawing/2014/main" id="{17878BF0-B9A5-12FA-DCC2-6B0AFF956CF8}"/>
+              </a:ext>
+            </a:extLst>
+          </p:cNvPr>
+          <p:cNvSpPr/>
+          <p:nvPr/>
+        </p:nvSpPr>
+        <p:spPr bwMode="auto">
+          <a:xfrm>
+            <a:off x="2527299" y="4677833"/>
+            <a:ext cx="2087033" cy="994833"/>
+          </a:xfrm>
+          <a:prstGeom prst="rect">
+            <a:avLst/>
+          </a:prstGeom>
+          <a:noFill/>
+          <a:ln w="38100">
+            <a:solidFill>
+              <a:srgbClr val="FF0000"/>
+            </a:solidFill>
+            <a:headEnd type="none" w="med" len="med"/>
+            <a:tailEnd type="triangle" w="med" len="med"/>
+          </a:ln>
+        </p:spPr>
+        <p:style>
+          <a:lnRef idx="1">
+            <a:schemeClr val="accent3"/>
+          </a:lnRef>
+          <a:fillRef idx="2">
+            <a:schemeClr val="accent3"/>
+          </a:fillRef>
+          <a:effectRef idx="1">
+            <a:schemeClr val="accent3"/>
+          </a:effectRef>
+          <a:fontRef idx="minor">
+            <a:schemeClr val="dk1"/>
+          </a:fontRef>
+        </p:style>
+        <p:txBody>
+          <a:bodyPr vert="horz" wrap="square" lIns="90000" tIns="46800" rIns="90000" bIns="46800" numCol="1" rtlCol="0" anchor="ctr" anchorCtr="0" compatLnSpc="1">
+            <a:prstTxWarp prst="textNoShape">
+              <a:avLst/>
+            </a:prstTxWarp>
+          </a:bodyPr>
+          <a:lstStyle/>
+          <a:p>
+            <a:pPr algn="ctr"/>
+            <a:endParaRPr lang="pt-BR" sz="2000" dirty="0">
+              <a:solidFill>
+                <a:schemeClr val="tx1"/>
+              </a:solidFill>
+              <a:latin typeface="Arial" charset="0"/>
+            </a:endParaRPr>
+          </a:p>
+        </p:txBody>
+      </p:sp>
+      <p:sp>
+        <p:nvSpPr>
+          <p:cNvPr id="2" name="Seta: para a Esquerda 1">
+            <a:extLst>
+              <a:ext uri="{FF2B5EF4-FFF2-40B4-BE49-F238E27FC236}">
+                <a16:creationId xmlns:a16="http://schemas.microsoft.com/office/drawing/2014/main" id="{00055504-452A-4C5A-9ADC-9DB7CD4407C2}"/>
+              </a:ext>
+            </a:extLst>
+          </p:cNvPr>
+          <p:cNvSpPr/>
+          <p:nvPr/>
+        </p:nvSpPr>
+        <p:spPr bwMode="auto">
+          <a:xfrm>
+            <a:off x="4919133" y="4377267"/>
+            <a:ext cx="2421467" cy="1515533"/>
+          </a:xfrm>
+          <a:prstGeom prst="leftArrow">
+            <a:avLst/>
+          </a:prstGeom>
+          <a:solidFill>
+            <a:srgbClr val="FFFF00"/>
+          </a:solidFill>
+          <a:ln w="38100">
+            <a:solidFill>
+              <a:srgbClr val="FF0000"/>
+            </a:solidFill>
+            <a:headEnd type="none" w="med" len="med"/>
+            <a:tailEnd type="triangle" w="med" len="med"/>
+          </a:ln>
+        </p:spPr>
+        <p:style>
+          <a:lnRef idx="1">
+            <a:schemeClr val="accent3"/>
+          </a:lnRef>
+          <a:fillRef idx="2">
+            <a:schemeClr val="accent3"/>
+          </a:fillRef>
+          <a:effectRef idx="1">
+            <a:schemeClr val="accent3"/>
+          </a:effectRef>
+          <a:fontRef idx="minor">
+            <a:schemeClr val="dk1"/>
+          </a:fontRef>
+        </p:style>
+        <p:txBody>
+          <a:bodyPr vert="horz" wrap="square" lIns="90000" tIns="46800" rIns="90000" bIns="46800" numCol="1" rtlCol="0" anchor="ctr" anchorCtr="0" compatLnSpc="1">
+            <a:prstTxWarp prst="textNoShape">
+              <a:avLst/>
+            </a:prstTxWarp>
+          </a:bodyPr>
+          <a:lstStyle/>
+          <a:p>
+            <a:pPr algn="ctr"/>
+            <a:r>
+              <a:rPr lang="pt-BR" sz="2000" dirty="0">
+                <a:solidFill>
+                  <a:schemeClr val="tx1"/>
+                </a:solidFill>
+                <a:latin typeface="Arial" charset="0"/>
+              </a:rPr>
+              <a:t>Digite este código</a:t>
+            </a:r>
+          </a:p>
+        </p:txBody>
+      </p:sp>
+    </p:spTree>
+    <p:extLst>
+      <p:ext uri="{BB962C8B-B14F-4D97-AF65-F5344CB8AC3E}">
+        <p14:creationId xmlns:p14="http://schemas.microsoft.com/office/powerpoint/2010/main" val="3266175919"/>
+      </p:ext>
+    </p:extLst>
+  </p:cSld>
+  <p:clrMapOvr>
+    <a:masterClrMapping/>
+  </p:clrMapOvr>
+</p:sld>
+</file>
+
+<file path=ppt/slides/slide86.xml><?xml version="1.0" encoding="utf-8"?>
+<p:sld xmlns:a="http://schemas.openxmlformats.org/drawingml/2006/main" xmlns:r="http://schemas.openxmlformats.org/officeDocument/2006/relationships" xmlns:p="http://schemas.openxmlformats.org/presentationml/2006/main">
+  <p:cSld>
+    <p:spTree>
+      <p:nvGrpSpPr>
+        <p:cNvPr id="1" name=""/>
+        <p:cNvGrpSpPr/>
+        <p:nvPr/>
+      </p:nvGrpSpPr>
+      <p:grpSpPr>
+        <a:xfrm>
+          <a:off x="0" y="0"/>
+          <a:ext cx="0" cy="0"/>
+          <a:chOff x="0" y="0"/>
+          <a:chExt cx="0" cy="0"/>
+        </a:xfrm>
+      </p:grpSpPr>
+      <p:pic>
+        <p:nvPicPr>
+          <p:cNvPr id="3" name="Imagem 2">
+            <a:extLst>
+              <a:ext uri="{FF2B5EF4-FFF2-40B4-BE49-F238E27FC236}">
+                <a16:creationId xmlns:a16="http://schemas.microsoft.com/office/drawing/2014/main" id="{29248A6D-0F06-5957-1661-CE314776E745}"/>
+              </a:ext>
+            </a:extLst>
+          </p:cNvPr>
+          <p:cNvPicPr>
+            <a:picLocks noChangeAspect="1"/>
+          </p:cNvPicPr>
+          <p:nvPr/>
+        </p:nvPicPr>
+        <p:blipFill>
+          <a:blip r:embed="rId2"/>
+          <a:stretch>
+            <a:fillRect/>
+          </a:stretch>
+        </p:blipFill>
+        <p:spPr>
+          <a:xfrm>
+            <a:off x="658812" y="933450"/>
             <a:ext cx="6810375" cy="4991100"/>
           </a:xfrm>
           <a:prstGeom prst="rect">
@@ -16495,10 +17962,740 @@
           </a:prstGeom>
         </p:spPr>
       </p:pic>
+      <p:sp>
+        <p:nvSpPr>
+          <p:cNvPr id="2" name="Elipse 1">
+            <a:extLst>
+              <a:ext uri="{FF2B5EF4-FFF2-40B4-BE49-F238E27FC236}">
+                <a16:creationId xmlns:a16="http://schemas.microsoft.com/office/drawing/2014/main" id="{1D35F195-CBE8-4BE4-8952-2D01EEF84C55}"/>
+              </a:ext>
+            </a:extLst>
+          </p:cNvPr>
+          <p:cNvSpPr/>
+          <p:nvPr/>
+        </p:nvSpPr>
+        <p:spPr bwMode="auto">
+          <a:xfrm>
+            <a:off x="8652933" y="3293533"/>
+            <a:ext cx="2336800" cy="1278467"/>
+          </a:xfrm>
+          <a:prstGeom prst="ellipse">
+            <a:avLst/>
+          </a:prstGeom>
+          <a:solidFill>
+            <a:srgbClr val="FFFF00"/>
+          </a:solidFill>
+          <a:ln w="38100">
+            <a:solidFill>
+              <a:srgbClr val="FF0000"/>
+            </a:solidFill>
+            <a:headEnd type="none" w="med" len="med"/>
+            <a:tailEnd type="triangle" w="med" len="med"/>
+          </a:ln>
+        </p:spPr>
+        <p:style>
+          <a:lnRef idx="1">
+            <a:schemeClr val="accent3"/>
+          </a:lnRef>
+          <a:fillRef idx="2">
+            <a:schemeClr val="accent3"/>
+          </a:fillRef>
+          <a:effectRef idx="1">
+            <a:schemeClr val="accent3"/>
+          </a:effectRef>
+          <a:fontRef idx="minor">
+            <a:schemeClr val="dk1"/>
+          </a:fontRef>
+        </p:style>
+        <p:txBody>
+          <a:bodyPr vert="horz" wrap="square" lIns="90000" tIns="46800" rIns="90000" bIns="46800" numCol="1" rtlCol="0" anchor="ctr" anchorCtr="0" compatLnSpc="1">
+            <a:prstTxWarp prst="textNoShape">
+              <a:avLst/>
+            </a:prstTxWarp>
+          </a:bodyPr>
+          <a:lstStyle/>
+          <a:p>
+            <a:pPr algn="ctr"/>
+            <a:r>
+              <a:rPr lang="pt-BR" sz="2000" dirty="0">
+                <a:solidFill>
+                  <a:schemeClr val="tx1"/>
+                </a:solidFill>
+                <a:latin typeface="Arial" charset="0"/>
+              </a:rPr>
+              <a:t>Resultado</a:t>
+            </a:r>
+          </a:p>
+        </p:txBody>
+      </p:sp>
+      <p:cxnSp>
+        <p:nvCxnSpPr>
+          <p:cNvPr id="5" name="Conector de Seta Reta 4">
+            <a:extLst>
+              <a:ext uri="{FF2B5EF4-FFF2-40B4-BE49-F238E27FC236}">
+                <a16:creationId xmlns:a16="http://schemas.microsoft.com/office/drawing/2014/main" id="{E1AD7F7D-1F3B-4E08-B0A6-9A5BABF37451}"/>
+              </a:ext>
+            </a:extLst>
+          </p:cNvPr>
+          <p:cNvCxnSpPr>
+            <a:stCxn id="2" idx="0"/>
+          </p:cNvCxnSpPr>
+          <p:nvPr/>
+        </p:nvCxnSpPr>
+        <p:spPr bwMode="auto">
+          <a:xfrm flipH="1" flipV="1">
+            <a:off x="7552267" y="1905000"/>
+            <a:ext cx="2269066" cy="1388533"/>
+          </a:xfrm>
+          <a:prstGeom prst="straightConnector1">
+            <a:avLst/>
+          </a:prstGeom>
+          <a:solidFill>
+            <a:schemeClr val="accent1"/>
+          </a:solidFill>
+          <a:ln w="38100" cap="flat" cmpd="sng" algn="ctr">
+            <a:solidFill>
+              <a:srgbClr val="FF0000"/>
+            </a:solidFill>
+            <a:prstDash val="solid"/>
+            <a:round/>
+            <a:headEnd type="none" w="med" len="med"/>
+            <a:tailEnd type="triangle"/>
+          </a:ln>
+          <a:effectLst/>
+        </p:spPr>
+      </p:cxnSp>
+      <p:cxnSp>
+        <p:nvCxnSpPr>
+          <p:cNvPr id="7" name="Conector de Seta Reta 6">
+            <a:extLst>
+              <a:ext uri="{FF2B5EF4-FFF2-40B4-BE49-F238E27FC236}">
+                <a16:creationId xmlns:a16="http://schemas.microsoft.com/office/drawing/2014/main" id="{1D8ACF2B-1494-4B1A-9019-3A37A7E415EA}"/>
+              </a:ext>
+            </a:extLst>
+          </p:cNvPr>
+          <p:cNvCxnSpPr>
+            <a:stCxn id="2" idx="4"/>
+          </p:cNvCxnSpPr>
+          <p:nvPr/>
+        </p:nvCxnSpPr>
+        <p:spPr bwMode="auto">
+          <a:xfrm flipH="1">
+            <a:off x="7552267" y="4572000"/>
+            <a:ext cx="2269066" cy="1270000"/>
+          </a:xfrm>
+          <a:prstGeom prst="straightConnector1">
+            <a:avLst/>
+          </a:prstGeom>
+          <a:solidFill>
+            <a:schemeClr val="accent1"/>
+          </a:solidFill>
+          <a:ln w="38100" cap="flat" cmpd="sng" algn="ctr">
+            <a:solidFill>
+              <a:srgbClr val="FF0000"/>
+            </a:solidFill>
+            <a:prstDash val="solid"/>
+            <a:round/>
+            <a:headEnd type="none" w="med" len="med"/>
+            <a:tailEnd type="triangle"/>
+          </a:ln>
+          <a:effectLst/>
+        </p:spPr>
+      </p:cxnSp>
     </p:spTree>
     <p:extLst>
       <p:ext uri="{BB962C8B-B14F-4D97-AF65-F5344CB8AC3E}">
         <p14:creationId xmlns:p14="http://schemas.microsoft.com/office/powerpoint/2010/main" val="77320128"/>
+      </p:ext>
+    </p:extLst>
+  </p:cSld>
+  <p:clrMapOvr>
+    <a:masterClrMapping/>
+  </p:clrMapOvr>
+</p:sld>
+</file>
+
+<file path=ppt/slides/slide87.xml><?xml version="1.0" encoding="utf-8"?>
+<p:sld xmlns:a="http://schemas.openxmlformats.org/drawingml/2006/main" xmlns:r="http://schemas.openxmlformats.org/officeDocument/2006/relationships" xmlns:p="http://schemas.openxmlformats.org/presentationml/2006/main">
+  <p:cSld>
+    <p:spTree>
+      <p:nvGrpSpPr>
+        <p:cNvPr id="1" name=""/>
+        <p:cNvGrpSpPr/>
+        <p:nvPr/>
+      </p:nvGrpSpPr>
+      <p:grpSpPr>
+        <a:xfrm>
+          <a:off x="0" y="0"/>
+          <a:ext cx="0" cy="0"/>
+          <a:chOff x="0" y="0"/>
+          <a:chExt cx="0" cy="0"/>
+        </a:xfrm>
+      </p:grpSpPr>
+      <p:sp>
+        <p:nvSpPr>
+          <p:cNvPr id="2" name="Título 1">
+            <a:extLst>
+              <a:ext uri="{FF2B5EF4-FFF2-40B4-BE49-F238E27FC236}">
+                <a16:creationId xmlns:a16="http://schemas.microsoft.com/office/drawing/2014/main" id="{37A429F3-F75A-4FD5-AC45-604CCEA8488D}"/>
+              </a:ext>
+            </a:extLst>
+          </p:cNvPr>
+          <p:cNvSpPr>
+            <a:spLocks noGrp="1"/>
+          </p:cNvSpPr>
+          <p:nvPr>
+            <p:ph type="ctrTitle"/>
+          </p:nvPr>
+        </p:nvSpPr>
+        <p:spPr/>
+        <p:txBody>
+          <a:bodyPr/>
+          <a:lstStyle/>
+          <a:p>
+            <a:r>
+              <a:rPr lang="pt-BR" dirty="0"/>
+              <a:t>Entendendo do Flex</a:t>
+            </a:r>
+          </a:p>
+        </p:txBody>
+      </p:sp>
+      <p:sp>
+        <p:nvSpPr>
+          <p:cNvPr id="3" name="Subtítulo 2">
+            <a:extLst>
+              <a:ext uri="{FF2B5EF4-FFF2-40B4-BE49-F238E27FC236}">
+                <a16:creationId xmlns:a16="http://schemas.microsoft.com/office/drawing/2014/main" id="{A12E3672-132E-44F7-9669-B19573C8AFF4}"/>
+              </a:ext>
+            </a:extLst>
+          </p:cNvPr>
+          <p:cNvSpPr>
+            <a:spLocks noGrp="1"/>
+          </p:cNvSpPr>
+          <p:nvPr>
+            <p:ph type="subTitle" idx="1"/>
+          </p:nvPr>
+        </p:nvSpPr>
+        <p:spPr/>
+        <p:txBody>
+          <a:bodyPr/>
+          <a:lstStyle/>
+          <a:p>
+            <a:endParaRPr lang="pt-BR"/>
+          </a:p>
+        </p:txBody>
+      </p:sp>
+    </p:spTree>
+    <p:extLst>
+      <p:ext uri="{BB962C8B-B14F-4D97-AF65-F5344CB8AC3E}">
+        <p14:creationId xmlns:p14="http://schemas.microsoft.com/office/powerpoint/2010/main" val="138866021"/>
+      </p:ext>
+    </p:extLst>
+  </p:cSld>
+  <p:clrMapOvr>
+    <a:masterClrMapping/>
+  </p:clrMapOvr>
+</p:sld>
+</file>
+
+<file path=ppt/slides/slide88.xml><?xml version="1.0" encoding="utf-8"?>
+<p:sld xmlns:a="http://schemas.openxmlformats.org/drawingml/2006/main" xmlns:r="http://schemas.openxmlformats.org/officeDocument/2006/relationships" xmlns:p="http://schemas.openxmlformats.org/presentationml/2006/main">
+  <p:cSld>
+    <p:spTree>
+      <p:nvGrpSpPr>
+        <p:cNvPr id="1" name=""/>
+        <p:cNvGrpSpPr/>
+        <p:nvPr/>
+      </p:nvGrpSpPr>
+      <p:grpSpPr>
+        <a:xfrm>
+          <a:off x="0" y="0"/>
+          <a:ext cx="0" cy="0"/>
+          <a:chOff x="0" y="0"/>
+          <a:chExt cx="0" cy="0"/>
+        </a:xfrm>
+      </p:grpSpPr>
+      <p:pic>
+        <p:nvPicPr>
+          <p:cNvPr id="2" name="Imagem 1">
+            <a:extLst>
+              <a:ext uri="{FF2B5EF4-FFF2-40B4-BE49-F238E27FC236}">
+                <a16:creationId xmlns:a16="http://schemas.microsoft.com/office/drawing/2014/main" id="{5C7AC4C2-5A66-4D3F-8BCA-39E25BF0656D}"/>
+              </a:ext>
+            </a:extLst>
+          </p:cNvPr>
+          <p:cNvPicPr>
+            <a:picLocks noChangeAspect="1"/>
+          </p:cNvPicPr>
+          <p:nvPr/>
+        </p:nvPicPr>
+        <p:blipFill>
+          <a:blip r:embed="rId2"/>
+          <a:stretch>
+            <a:fillRect/>
+          </a:stretch>
+        </p:blipFill>
+        <p:spPr>
+          <a:xfrm>
+            <a:off x="423333" y="248311"/>
+            <a:ext cx="3987882" cy="4067412"/>
+          </a:xfrm>
+          <a:prstGeom prst="rect">
+            <a:avLst/>
+          </a:prstGeom>
+        </p:spPr>
+      </p:pic>
+      <p:pic>
+        <p:nvPicPr>
+          <p:cNvPr id="3" name="Imagem 2">
+            <a:extLst>
+              <a:ext uri="{FF2B5EF4-FFF2-40B4-BE49-F238E27FC236}">
+                <a16:creationId xmlns:a16="http://schemas.microsoft.com/office/drawing/2014/main" id="{15938A6C-95C6-431D-B649-406B0B315493}"/>
+              </a:ext>
+            </a:extLst>
+          </p:cNvPr>
+          <p:cNvPicPr>
+            <a:picLocks noChangeAspect="1"/>
+          </p:cNvPicPr>
+          <p:nvPr/>
+        </p:nvPicPr>
+        <p:blipFill>
+          <a:blip r:embed="rId3"/>
+          <a:stretch>
+            <a:fillRect/>
+          </a:stretch>
+        </p:blipFill>
+        <p:spPr>
+          <a:xfrm>
+            <a:off x="5571067" y="2262849"/>
+            <a:ext cx="6197600" cy="4188222"/>
+          </a:xfrm>
+          <a:prstGeom prst="rect">
+            <a:avLst/>
+          </a:prstGeom>
+        </p:spPr>
+      </p:pic>
+      <p:sp>
+        <p:nvSpPr>
+          <p:cNvPr id="4" name="Retângulo 3">
+            <a:extLst>
+              <a:ext uri="{FF2B5EF4-FFF2-40B4-BE49-F238E27FC236}">
+                <a16:creationId xmlns:a16="http://schemas.microsoft.com/office/drawing/2014/main" id="{2625D981-B7BC-4C67-9986-B54C41911F74}"/>
+              </a:ext>
+            </a:extLst>
+          </p:cNvPr>
+          <p:cNvSpPr/>
+          <p:nvPr/>
+        </p:nvSpPr>
+        <p:spPr bwMode="auto">
+          <a:xfrm>
+            <a:off x="829733" y="3090333"/>
+            <a:ext cx="3268134" cy="838200"/>
+          </a:xfrm>
+          <a:prstGeom prst="rect">
+            <a:avLst/>
+          </a:prstGeom>
+          <a:noFill/>
+          <a:ln w="38100">
+            <a:solidFill>
+              <a:srgbClr val="FF0000"/>
+            </a:solidFill>
+            <a:headEnd type="none" w="med" len="med"/>
+            <a:tailEnd type="triangle" w="med" len="med"/>
+          </a:ln>
+        </p:spPr>
+        <p:style>
+          <a:lnRef idx="1">
+            <a:schemeClr val="accent3"/>
+          </a:lnRef>
+          <a:fillRef idx="2">
+            <a:schemeClr val="accent3"/>
+          </a:fillRef>
+          <a:effectRef idx="1">
+            <a:schemeClr val="accent3"/>
+          </a:effectRef>
+          <a:fontRef idx="minor">
+            <a:schemeClr val="dk1"/>
+          </a:fontRef>
+        </p:style>
+        <p:txBody>
+          <a:bodyPr vert="horz" wrap="square" lIns="90000" tIns="46800" rIns="90000" bIns="46800" numCol="1" rtlCol="0" anchor="ctr" anchorCtr="0" compatLnSpc="1">
+            <a:prstTxWarp prst="textNoShape">
+              <a:avLst/>
+            </a:prstTxWarp>
+          </a:bodyPr>
+          <a:lstStyle/>
+          <a:p>
+            <a:pPr algn="ctr"/>
+            <a:endParaRPr lang="pt-BR" sz="2000" dirty="0">
+              <a:solidFill>
+                <a:schemeClr val="tx1"/>
+              </a:solidFill>
+              <a:latin typeface="Arial" charset="0"/>
+            </a:endParaRPr>
+          </a:p>
+        </p:txBody>
+      </p:sp>
+      <p:cxnSp>
+        <p:nvCxnSpPr>
+          <p:cNvPr id="6" name="Conector de Seta Reta 5">
+            <a:extLst>
+              <a:ext uri="{FF2B5EF4-FFF2-40B4-BE49-F238E27FC236}">
+                <a16:creationId xmlns:a16="http://schemas.microsoft.com/office/drawing/2014/main" id="{B5157B46-E0B3-4E7D-892E-E6B3A0C64529}"/>
+              </a:ext>
+            </a:extLst>
+          </p:cNvPr>
+          <p:cNvCxnSpPr/>
+          <p:nvPr/>
+        </p:nvCxnSpPr>
+        <p:spPr bwMode="auto">
+          <a:xfrm flipV="1">
+            <a:off x="4199467" y="3090333"/>
+            <a:ext cx="1371600" cy="397934"/>
+          </a:xfrm>
+          <a:prstGeom prst="straightConnector1">
+            <a:avLst/>
+          </a:prstGeom>
+          <a:solidFill>
+            <a:schemeClr val="accent1"/>
+          </a:solidFill>
+          <a:ln w="38100" cap="flat" cmpd="sng" algn="ctr">
+            <a:solidFill>
+              <a:srgbClr val="FF0000"/>
+            </a:solidFill>
+            <a:prstDash val="solid"/>
+            <a:round/>
+            <a:headEnd type="none" w="med" len="med"/>
+            <a:tailEnd type="triangle"/>
+          </a:ln>
+          <a:effectLst/>
+        </p:spPr>
+      </p:cxnSp>
+      <p:cxnSp>
+        <p:nvCxnSpPr>
+          <p:cNvPr id="8" name="Conector de Seta Reta 7">
+            <a:extLst>
+              <a:ext uri="{FF2B5EF4-FFF2-40B4-BE49-F238E27FC236}">
+                <a16:creationId xmlns:a16="http://schemas.microsoft.com/office/drawing/2014/main" id="{2A0D5025-634A-46B9-95C2-E62ADAA1F8E8}"/>
+              </a:ext>
+            </a:extLst>
+          </p:cNvPr>
+          <p:cNvCxnSpPr/>
+          <p:nvPr/>
+        </p:nvCxnSpPr>
+        <p:spPr bwMode="auto">
+          <a:xfrm>
+            <a:off x="4199467" y="3488267"/>
+            <a:ext cx="1473200" cy="2692400"/>
+          </a:xfrm>
+          <a:prstGeom prst="straightConnector1">
+            <a:avLst/>
+          </a:prstGeom>
+          <a:solidFill>
+            <a:schemeClr val="accent1"/>
+          </a:solidFill>
+          <a:ln w="38100" cap="flat" cmpd="sng" algn="ctr">
+            <a:solidFill>
+              <a:srgbClr val="FF0000"/>
+            </a:solidFill>
+            <a:prstDash val="solid"/>
+            <a:round/>
+            <a:headEnd type="none" w="med" len="med"/>
+            <a:tailEnd type="triangle"/>
+          </a:ln>
+          <a:effectLst/>
+        </p:spPr>
+      </p:cxnSp>
+      <p:cxnSp>
+        <p:nvCxnSpPr>
+          <p:cNvPr id="10" name="Conector de Seta Reta 9">
+            <a:extLst>
+              <a:ext uri="{FF2B5EF4-FFF2-40B4-BE49-F238E27FC236}">
+                <a16:creationId xmlns:a16="http://schemas.microsoft.com/office/drawing/2014/main" id="{BC574149-4B1D-4B1A-AE19-842F171D533A}"/>
+              </a:ext>
+            </a:extLst>
+          </p:cNvPr>
+          <p:cNvCxnSpPr/>
+          <p:nvPr/>
+        </p:nvCxnSpPr>
+        <p:spPr bwMode="auto">
+          <a:xfrm>
+            <a:off x="4199467" y="3488267"/>
+            <a:ext cx="7162800" cy="2842022"/>
+          </a:xfrm>
+          <a:prstGeom prst="straightConnector1">
+            <a:avLst/>
+          </a:prstGeom>
+          <a:solidFill>
+            <a:schemeClr val="accent1"/>
+          </a:solidFill>
+          <a:ln w="38100" cap="flat" cmpd="sng" algn="ctr">
+            <a:solidFill>
+              <a:srgbClr val="FF0000"/>
+            </a:solidFill>
+            <a:prstDash val="solid"/>
+            <a:round/>
+            <a:headEnd type="none" w="med" len="med"/>
+            <a:tailEnd type="triangle"/>
+          </a:ln>
+          <a:effectLst/>
+        </p:spPr>
+      </p:cxnSp>
+      <p:sp>
+        <p:nvSpPr>
+          <p:cNvPr id="12" name="Forma Livre: Forma 11">
+            <a:extLst>
+              <a:ext uri="{FF2B5EF4-FFF2-40B4-BE49-F238E27FC236}">
+                <a16:creationId xmlns:a16="http://schemas.microsoft.com/office/drawing/2014/main" id="{2E639F86-0DC8-4D7A-AD56-6EE52FE4B6EF}"/>
+              </a:ext>
+            </a:extLst>
+          </p:cNvPr>
+          <p:cNvSpPr/>
+          <p:nvPr/>
+        </p:nvSpPr>
+        <p:spPr bwMode="auto">
+          <a:xfrm>
+            <a:off x="4224867" y="854047"/>
+            <a:ext cx="7281333" cy="2659620"/>
+          </a:xfrm>
+          <a:custGeom>
+            <a:avLst/>
+            <a:gdLst>
+              <a:gd name="connsiteX0" fmla="*/ 0 w 7281333"/>
+              <a:gd name="connsiteY0" fmla="*/ 2659620 h 2659620"/>
+              <a:gd name="connsiteX1" fmla="*/ 1557866 w 7281333"/>
+              <a:gd name="connsiteY1" fmla="*/ 432886 h 2659620"/>
+              <a:gd name="connsiteX2" fmla="*/ 5664200 w 7281333"/>
+              <a:gd name="connsiteY2" fmla="*/ 136553 h 2659620"/>
+              <a:gd name="connsiteX3" fmla="*/ 7281333 w 7281333"/>
+              <a:gd name="connsiteY3" fmla="*/ 2050020 h 2659620"/>
+            </a:gdLst>
+            <a:ahLst/>
+            <a:cxnLst>
+              <a:cxn ang="0">
+                <a:pos x="connsiteX0" y="connsiteY0"/>
+              </a:cxn>
+              <a:cxn ang="0">
+                <a:pos x="connsiteX1" y="connsiteY1"/>
+              </a:cxn>
+              <a:cxn ang="0">
+                <a:pos x="connsiteX2" y="connsiteY2"/>
+              </a:cxn>
+              <a:cxn ang="0">
+                <a:pos x="connsiteX3" y="connsiteY3"/>
+              </a:cxn>
+            </a:cxnLst>
+            <a:rect l="l" t="t" r="r" b="b"/>
+            <a:pathLst>
+              <a:path w="7281333" h="2659620">
+                <a:moveTo>
+                  <a:pt x="0" y="2659620"/>
+                </a:moveTo>
+                <a:cubicBezTo>
+                  <a:pt x="306916" y="1756508"/>
+                  <a:pt x="613833" y="853397"/>
+                  <a:pt x="1557866" y="432886"/>
+                </a:cubicBezTo>
+                <a:cubicBezTo>
+                  <a:pt x="2501899" y="12375"/>
+                  <a:pt x="4710289" y="-132969"/>
+                  <a:pt x="5664200" y="136553"/>
+                </a:cubicBezTo>
+                <a:cubicBezTo>
+                  <a:pt x="6618111" y="406075"/>
+                  <a:pt x="6949722" y="1228047"/>
+                  <a:pt x="7281333" y="2050020"/>
+                </a:cubicBezTo>
+              </a:path>
+            </a:pathLst>
+          </a:custGeom>
+          <a:noFill/>
+          <a:ln w="38100">
+            <a:solidFill>
+              <a:srgbClr val="FF0000"/>
+            </a:solidFill>
+            <a:headEnd type="none" w="med" len="med"/>
+            <a:tailEnd type="triangle" w="med" len="med"/>
+          </a:ln>
+        </p:spPr>
+        <p:style>
+          <a:lnRef idx="1">
+            <a:schemeClr val="accent3"/>
+          </a:lnRef>
+          <a:fillRef idx="2">
+            <a:schemeClr val="accent3"/>
+          </a:fillRef>
+          <a:effectRef idx="1">
+            <a:schemeClr val="accent3"/>
+          </a:effectRef>
+          <a:fontRef idx="minor">
+            <a:schemeClr val="dk1"/>
+          </a:fontRef>
+        </p:style>
+        <p:txBody>
+          <a:bodyPr rtlCol="0" anchor="ctr"/>
+          <a:lstStyle/>
+          <a:p>
+            <a:pPr algn="ctr"/>
+            <a:endParaRPr lang="pt-BR"/>
+          </a:p>
+        </p:txBody>
+      </p:sp>
+    </p:spTree>
+    <p:extLst>
+      <p:ext uri="{BB962C8B-B14F-4D97-AF65-F5344CB8AC3E}">
+        <p14:creationId xmlns:p14="http://schemas.microsoft.com/office/powerpoint/2010/main" val="4079773"/>
+      </p:ext>
+    </p:extLst>
+  </p:cSld>
+  <p:clrMapOvr>
+    <a:masterClrMapping/>
+  </p:clrMapOvr>
+</p:sld>
+</file>
+
+<file path=ppt/slides/slide89.xml><?xml version="1.0" encoding="utf-8"?>
+<p:sld xmlns:a="http://schemas.openxmlformats.org/drawingml/2006/main" xmlns:r="http://schemas.openxmlformats.org/officeDocument/2006/relationships" xmlns:p="http://schemas.openxmlformats.org/presentationml/2006/main">
+  <p:cSld>
+    <p:spTree>
+      <p:nvGrpSpPr>
+        <p:cNvPr id="1" name=""/>
+        <p:cNvGrpSpPr/>
+        <p:nvPr/>
+      </p:nvGrpSpPr>
+      <p:grpSpPr>
+        <a:xfrm>
+          <a:off x="0" y="0"/>
+          <a:ext cx="0" cy="0"/>
+          <a:chOff x="0" y="0"/>
+          <a:chExt cx="0" cy="0"/>
+        </a:xfrm>
+      </p:grpSpPr>
+      <p:pic>
+        <p:nvPicPr>
+          <p:cNvPr id="2" name="Imagem 1">
+            <a:extLst>
+              <a:ext uri="{FF2B5EF4-FFF2-40B4-BE49-F238E27FC236}">
+                <a16:creationId xmlns:a16="http://schemas.microsoft.com/office/drawing/2014/main" id="{2B6F4EC7-D7B5-48DC-964C-846C8977D0F6}"/>
+              </a:ext>
+            </a:extLst>
+          </p:cNvPr>
+          <p:cNvPicPr>
+            <a:picLocks noChangeAspect="1"/>
+          </p:cNvPicPr>
+          <p:nvPr/>
+        </p:nvPicPr>
+        <p:blipFill>
+          <a:blip r:embed="rId2"/>
+          <a:stretch>
+            <a:fillRect/>
+          </a:stretch>
+        </p:blipFill>
+        <p:spPr>
+          <a:xfrm>
+            <a:off x="470720" y="605674"/>
+            <a:ext cx="4184354" cy="3915526"/>
+          </a:xfrm>
+          <a:prstGeom prst="rect">
+            <a:avLst/>
+          </a:prstGeom>
+        </p:spPr>
+      </p:pic>
+      <p:pic>
+        <p:nvPicPr>
+          <p:cNvPr id="3" name="Imagem 2">
+            <a:extLst>
+              <a:ext uri="{FF2B5EF4-FFF2-40B4-BE49-F238E27FC236}">
+                <a16:creationId xmlns:a16="http://schemas.microsoft.com/office/drawing/2014/main" id="{9C6D5456-056C-49ED-BFAF-ADFAD63C66B9}"/>
+              </a:ext>
+            </a:extLst>
+          </p:cNvPr>
+          <p:cNvPicPr>
+            <a:picLocks noChangeAspect="1"/>
+          </p:cNvPicPr>
+          <p:nvPr/>
+        </p:nvPicPr>
+        <p:blipFill>
+          <a:blip r:embed="rId3"/>
+          <a:stretch>
+            <a:fillRect/>
+          </a:stretch>
+        </p:blipFill>
+        <p:spPr>
+          <a:xfrm>
+            <a:off x="5357478" y="1939396"/>
+            <a:ext cx="6363802" cy="4300538"/>
+          </a:xfrm>
+          <a:prstGeom prst="rect">
+            <a:avLst/>
+          </a:prstGeom>
+        </p:spPr>
+      </p:pic>
+      <p:sp>
+        <p:nvSpPr>
+          <p:cNvPr id="4" name="Retângulo 3">
+            <a:extLst>
+              <a:ext uri="{FF2B5EF4-FFF2-40B4-BE49-F238E27FC236}">
+                <a16:creationId xmlns:a16="http://schemas.microsoft.com/office/drawing/2014/main" id="{F8661E6C-CB6E-466D-B503-5333A77C76B7}"/>
+              </a:ext>
+            </a:extLst>
+          </p:cNvPr>
+          <p:cNvSpPr/>
+          <p:nvPr/>
+        </p:nvSpPr>
+        <p:spPr bwMode="auto">
+          <a:xfrm>
+            <a:off x="855133" y="3505200"/>
+            <a:ext cx="1989667" cy="702733"/>
+          </a:xfrm>
+          <a:prstGeom prst="rect">
+            <a:avLst/>
+          </a:prstGeom>
+          <a:noFill/>
+          <a:ln w="38100">
+            <a:solidFill>
+              <a:srgbClr val="FF0000"/>
+            </a:solidFill>
+            <a:headEnd type="none" w="med" len="med"/>
+            <a:tailEnd type="triangle" w="med" len="med"/>
+          </a:ln>
+        </p:spPr>
+        <p:style>
+          <a:lnRef idx="1">
+            <a:schemeClr val="accent3"/>
+          </a:lnRef>
+          <a:fillRef idx="2">
+            <a:schemeClr val="accent3"/>
+          </a:fillRef>
+          <a:effectRef idx="1">
+            <a:schemeClr val="accent3"/>
+          </a:effectRef>
+          <a:fontRef idx="minor">
+            <a:schemeClr val="dk1"/>
+          </a:fontRef>
+        </p:style>
+        <p:txBody>
+          <a:bodyPr vert="horz" wrap="square" lIns="90000" tIns="46800" rIns="90000" bIns="46800" numCol="1" rtlCol="0" anchor="ctr" anchorCtr="0" compatLnSpc="1">
+            <a:prstTxWarp prst="textNoShape">
+              <a:avLst/>
+            </a:prstTxWarp>
+          </a:bodyPr>
+          <a:lstStyle/>
+          <a:p>
+            <a:pPr algn="ctr"/>
+            <a:endParaRPr lang="pt-BR" sz="2000" dirty="0">
+              <a:solidFill>
+                <a:schemeClr val="tx1"/>
+              </a:solidFill>
+              <a:latin typeface="Arial" charset="0"/>
+            </a:endParaRPr>
+          </a:p>
+        </p:txBody>
+      </p:sp>
+    </p:spTree>
+    <p:extLst>
+      <p:ext uri="{BB962C8B-B14F-4D97-AF65-F5344CB8AC3E}">
+        <p14:creationId xmlns:p14="http://schemas.microsoft.com/office/powerpoint/2010/main" val="504164780"/>
       </p:ext>
     </p:extLst>
   </p:cSld>
@@ -16867,6 +19064,462 @@
     <p:extLst>
       <p:ext uri="{BB962C8B-B14F-4D97-AF65-F5344CB8AC3E}">
         <p14:creationId xmlns:p14="http://schemas.microsoft.com/office/powerpoint/2010/main" val="2789058284"/>
+      </p:ext>
+    </p:extLst>
+  </p:cSld>
+  <p:clrMapOvr>
+    <a:masterClrMapping/>
+  </p:clrMapOvr>
+</p:sld>
+</file>
+
+<file path=ppt/slides/slide90.xml><?xml version="1.0" encoding="utf-8"?>
+<p:sld xmlns:a="http://schemas.openxmlformats.org/drawingml/2006/main" xmlns:r="http://schemas.openxmlformats.org/officeDocument/2006/relationships" xmlns:p="http://schemas.openxmlformats.org/presentationml/2006/main">
+  <p:cSld>
+    <p:spTree>
+      <p:nvGrpSpPr>
+        <p:cNvPr id="1" name=""/>
+        <p:cNvGrpSpPr/>
+        <p:nvPr/>
+      </p:nvGrpSpPr>
+      <p:grpSpPr>
+        <a:xfrm>
+          <a:off x="0" y="0"/>
+          <a:ext cx="0" cy="0"/>
+          <a:chOff x="0" y="0"/>
+          <a:chExt cx="0" cy="0"/>
+        </a:xfrm>
+      </p:grpSpPr>
+      <p:pic>
+        <p:nvPicPr>
+          <p:cNvPr id="2" name="Imagem 1">
+            <a:extLst>
+              <a:ext uri="{FF2B5EF4-FFF2-40B4-BE49-F238E27FC236}">
+                <a16:creationId xmlns:a16="http://schemas.microsoft.com/office/drawing/2014/main" id="{D57A332C-C183-4172-B1F1-4528B7D143DD}"/>
+              </a:ext>
+            </a:extLst>
+          </p:cNvPr>
+          <p:cNvPicPr>
+            <a:picLocks noChangeAspect="1"/>
+          </p:cNvPicPr>
+          <p:nvPr/>
+        </p:nvPicPr>
+        <p:blipFill>
+          <a:blip r:embed="rId2"/>
+          <a:stretch>
+            <a:fillRect/>
+          </a:stretch>
+        </p:blipFill>
+        <p:spPr>
+          <a:xfrm>
+            <a:off x="2072640" y="710088"/>
+            <a:ext cx="8046720" cy="5437823"/>
+          </a:xfrm>
+          <a:prstGeom prst="rect">
+            <a:avLst/>
+          </a:prstGeom>
+        </p:spPr>
+      </p:pic>
+      <p:sp>
+        <p:nvSpPr>
+          <p:cNvPr id="3" name="Retângulo: Cantos Arredondados 2">
+            <a:extLst>
+              <a:ext uri="{FF2B5EF4-FFF2-40B4-BE49-F238E27FC236}">
+                <a16:creationId xmlns:a16="http://schemas.microsoft.com/office/drawing/2014/main" id="{4FDD1D02-1E73-42ED-AB9D-31337F2D8C47}"/>
+              </a:ext>
+            </a:extLst>
+          </p:cNvPr>
+          <p:cNvSpPr/>
+          <p:nvPr/>
+        </p:nvSpPr>
+        <p:spPr bwMode="auto">
+          <a:xfrm>
+            <a:off x="4368800" y="3056466"/>
+            <a:ext cx="3454400" cy="1684867"/>
+          </a:xfrm>
+          <a:prstGeom prst="roundRect">
+            <a:avLst>
+              <a:gd name="adj" fmla="val 32747"/>
+            </a:avLst>
+          </a:prstGeom>
+          <a:solidFill>
+            <a:srgbClr val="FFFF00"/>
+          </a:solidFill>
+          <a:ln w="38100">
+            <a:solidFill>
+              <a:srgbClr val="FF0000"/>
+            </a:solidFill>
+            <a:headEnd type="none" w="med" len="med"/>
+            <a:tailEnd type="triangle" w="med" len="med"/>
+          </a:ln>
+        </p:spPr>
+        <p:style>
+          <a:lnRef idx="1">
+            <a:schemeClr val="accent3"/>
+          </a:lnRef>
+          <a:fillRef idx="2">
+            <a:schemeClr val="accent3"/>
+          </a:fillRef>
+          <a:effectRef idx="1">
+            <a:schemeClr val="accent3"/>
+          </a:effectRef>
+          <a:fontRef idx="minor">
+            <a:schemeClr val="dk1"/>
+          </a:fontRef>
+        </p:style>
+        <p:txBody>
+          <a:bodyPr vert="horz" wrap="square" lIns="90000" tIns="46800" rIns="90000" bIns="46800" numCol="1" rtlCol="0" anchor="ctr" anchorCtr="0" compatLnSpc="1">
+            <a:prstTxWarp prst="textNoShape">
+              <a:avLst/>
+            </a:prstTxWarp>
+          </a:bodyPr>
+          <a:lstStyle/>
+          <a:p>
+            <a:pPr algn="ctr"/>
+            <a:r>
+              <a:rPr lang="pt-BR" sz="2000" dirty="0">
+                <a:solidFill>
+                  <a:schemeClr val="tx1"/>
+                </a:solidFill>
+                <a:latin typeface="Arial" charset="0"/>
+              </a:rPr>
+              <a:t>Como deixar os nomes centralizados e no meio ?</a:t>
+            </a:r>
+          </a:p>
+        </p:txBody>
+      </p:sp>
+      <p:cxnSp>
+        <p:nvCxnSpPr>
+          <p:cNvPr id="5" name="Conector de Seta Reta 4">
+            <a:extLst>
+              <a:ext uri="{FF2B5EF4-FFF2-40B4-BE49-F238E27FC236}">
+                <a16:creationId xmlns:a16="http://schemas.microsoft.com/office/drawing/2014/main" id="{FB9185E3-B5D5-4A58-9A9F-489992A7284A}"/>
+              </a:ext>
+            </a:extLst>
+          </p:cNvPr>
+          <p:cNvCxnSpPr/>
+          <p:nvPr/>
+        </p:nvCxnSpPr>
+        <p:spPr bwMode="auto">
+          <a:xfrm flipH="1" flipV="1">
+            <a:off x="3191933" y="2184400"/>
+            <a:ext cx="1346200" cy="1041400"/>
+          </a:xfrm>
+          <a:prstGeom prst="straightConnector1">
+            <a:avLst/>
+          </a:prstGeom>
+          <a:solidFill>
+            <a:schemeClr val="accent1"/>
+          </a:solidFill>
+          <a:ln w="38100" cap="flat" cmpd="sng" algn="ctr">
+            <a:solidFill>
+              <a:srgbClr val="FF0000"/>
+            </a:solidFill>
+            <a:prstDash val="solid"/>
+            <a:round/>
+            <a:headEnd type="none" w="med" len="med"/>
+            <a:tailEnd type="triangle"/>
+          </a:ln>
+          <a:effectLst/>
+        </p:spPr>
+      </p:cxnSp>
+      <p:cxnSp>
+        <p:nvCxnSpPr>
+          <p:cNvPr id="7" name="Conector de Seta Reta 6">
+            <a:extLst>
+              <a:ext uri="{FF2B5EF4-FFF2-40B4-BE49-F238E27FC236}">
+                <a16:creationId xmlns:a16="http://schemas.microsoft.com/office/drawing/2014/main" id="{EF0BCD97-C019-403F-8133-4335A14A5204}"/>
+              </a:ext>
+            </a:extLst>
+          </p:cNvPr>
+          <p:cNvCxnSpPr/>
+          <p:nvPr/>
+        </p:nvCxnSpPr>
+        <p:spPr bwMode="auto">
+          <a:xfrm flipH="1">
+            <a:off x="3158067" y="4605867"/>
+            <a:ext cx="1388533" cy="990600"/>
+          </a:xfrm>
+          <a:prstGeom prst="straightConnector1">
+            <a:avLst/>
+          </a:prstGeom>
+          <a:solidFill>
+            <a:schemeClr val="accent1"/>
+          </a:solidFill>
+          <a:ln w="38100" cap="flat" cmpd="sng" algn="ctr">
+            <a:solidFill>
+              <a:srgbClr val="FF0000"/>
+            </a:solidFill>
+            <a:prstDash val="solid"/>
+            <a:round/>
+            <a:headEnd type="none" w="med" len="med"/>
+            <a:tailEnd type="triangle"/>
+          </a:ln>
+          <a:effectLst/>
+        </p:spPr>
+      </p:cxnSp>
+      <p:cxnSp>
+        <p:nvCxnSpPr>
+          <p:cNvPr id="9" name="Conector de Seta Reta 8">
+            <a:extLst>
+              <a:ext uri="{FF2B5EF4-FFF2-40B4-BE49-F238E27FC236}">
+                <a16:creationId xmlns:a16="http://schemas.microsoft.com/office/drawing/2014/main" id="{1F8B3847-A4CE-41D8-8DC6-A239AF51FCB8}"/>
+              </a:ext>
+            </a:extLst>
+          </p:cNvPr>
+          <p:cNvCxnSpPr/>
+          <p:nvPr/>
+        </p:nvCxnSpPr>
+        <p:spPr bwMode="auto">
+          <a:xfrm flipV="1">
+            <a:off x="7713133" y="2184400"/>
+            <a:ext cx="1286934" cy="1041400"/>
+          </a:xfrm>
+          <a:prstGeom prst="straightConnector1">
+            <a:avLst/>
+          </a:prstGeom>
+          <a:solidFill>
+            <a:schemeClr val="accent1"/>
+          </a:solidFill>
+          <a:ln w="38100" cap="flat" cmpd="sng" algn="ctr">
+            <a:solidFill>
+              <a:srgbClr val="FF0000"/>
+            </a:solidFill>
+            <a:prstDash val="solid"/>
+            <a:round/>
+            <a:headEnd type="none" w="med" len="med"/>
+            <a:tailEnd type="triangle"/>
+          </a:ln>
+          <a:effectLst/>
+        </p:spPr>
+      </p:cxnSp>
+      <p:cxnSp>
+        <p:nvCxnSpPr>
+          <p:cNvPr id="11" name="Conector de Seta Reta 10">
+            <a:extLst>
+              <a:ext uri="{FF2B5EF4-FFF2-40B4-BE49-F238E27FC236}">
+                <a16:creationId xmlns:a16="http://schemas.microsoft.com/office/drawing/2014/main" id="{DE6F05B4-EE78-40F8-A966-9B80CDB95D09}"/>
+              </a:ext>
+            </a:extLst>
+          </p:cNvPr>
+          <p:cNvCxnSpPr/>
+          <p:nvPr/>
+        </p:nvCxnSpPr>
+        <p:spPr bwMode="auto">
+          <a:xfrm>
+            <a:off x="7738533" y="4504267"/>
+            <a:ext cx="1261534" cy="1092200"/>
+          </a:xfrm>
+          <a:prstGeom prst="straightConnector1">
+            <a:avLst/>
+          </a:prstGeom>
+          <a:solidFill>
+            <a:schemeClr val="accent1"/>
+          </a:solidFill>
+          <a:ln w="38100" cap="flat" cmpd="sng" algn="ctr">
+            <a:solidFill>
+              <a:srgbClr val="FF0000"/>
+            </a:solidFill>
+            <a:prstDash val="solid"/>
+            <a:round/>
+            <a:headEnd type="none" w="med" len="med"/>
+            <a:tailEnd type="triangle"/>
+          </a:ln>
+          <a:effectLst/>
+        </p:spPr>
+      </p:cxnSp>
+    </p:spTree>
+    <p:extLst>
+      <p:ext uri="{BB962C8B-B14F-4D97-AF65-F5344CB8AC3E}">
+        <p14:creationId xmlns:p14="http://schemas.microsoft.com/office/powerpoint/2010/main" val="2477609288"/>
+      </p:ext>
+    </p:extLst>
+  </p:cSld>
+  <p:clrMapOvr>
+    <a:masterClrMapping/>
+  </p:clrMapOvr>
+</p:sld>
+</file>
+
+<file path=ppt/slides/slide91.xml><?xml version="1.0" encoding="utf-8"?>
+<p:sld xmlns:a="http://schemas.openxmlformats.org/drawingml/2006/main" xmlns:r="http://schemas.openxmlformats.org/officeDocument/2006/relationships" xmlns:p="http://schemas.openxmlformats.org/presentationml/2006/main">
+  <p:cSld>
+    <p:spTree>
+      <p:nvGrpSpPr>
+        <p:cNvPr id="1" name=""/>
+        <p:cNvGrpSpPr/>
+        <p:nvPr/>
+      </p:nvGrpSpPr>
+      <p:grpSpPr>
+        <a:xfrm>
+          <a:off x="0" y="0"/>
+          <a:ext cx="0" cy="0"/>
+          <a:chOff x="0" y="0"/>
+          <a:chExt cx="0" cy="0"/>
+        </a:xfrm>
+      </p:grpSpPr>
+      <p:pic>
+        <p:nvPicPr>
+          <p:cNvPr id="2" name="Imagem 1">
+            <a:extLst>
+              <a:ext uri="{FF2B5EF4-FFF2-40B4-BE49-F238E27FC236}">
+                <a16:creationId xmlns:a16="http://schemas.microsoft.com/office/drawing/2014/main" id="{A103EF29-3DB6-4B65-B544-E07AFCBEDA0C}"/>
+              </a:ext>
+            </a:extLst>
+          </p:cNvPr>
+          <p:cNvPicPr>
+            <a:picLocks noChangeAspect="1"/>
+          </p:cNvPicPr>
+          <p:nvPr/>
+        </p:nvPicPr>
+        <p:blipFill>
+          <a:blip r:embed="rId2"/>
+          <a:stretch>
+            <a:fillRect/>
+          </a:stretch>
+        </p:blipFill>
+        <p:spPr>
+          <a:xfrm>
+            <a:off x="619584" y="652820"/>
+            <a:ext cx="10952833" cy="5552360"/>
+          </a:xfrm>
+          <a:prstGeom prst="rect">
+            <a:avLst/>
+          </a:prstGeom>
+        </p:spPr>
+      </p:pic>
+      <p:sp>
+        <p:nvSpPr>
+          <p:cNvPr id="3" name="Retângulo 2">
+            <a:extLst>
+              <a:ext uri="{FF2B5EF4-FFF2-40B4-BE49-F238E27FC236}">
+                <a16:creationId xmlns:a16="http://schemas.microsoft.com/office/drawing/2014/main" id="{7EF2D33C-D190-4B33-817C-520E2D523FF2}"/>
+              </a:ext>
+            </a:extLst>
+          </p:cNvPr>
+          <p:cNvSpPr/>
+          <p:nvPr/>
+        </p:nvSpPr>
+        <p:spPr bwMode="auto">
+          <a:xfrm>
+            <a:off x="2548467" y="2032001"/>
+            <a:ext cx="4055533" cy="448732"/>
+          </a:xfrm>
+          <a:prstGeom prst="rect">
+            <a:avLst/>
+          </a:prstGeom>
+          <a:noFill/>
+          <a:ln w="38100">
+            <a:solidFill>
+              <a:srgbClr val="FF0000"/>
+            </a:solidFill>
+            <a:headEnd type="none" w="med" len="med"/>
+            <a:tailEnd type="triangle" w="med" len="med"/>
+          </a:ln>
+        </p:spPr>
+        <p:style>
+          <a:lnRef idx="1">
+            <a:schemeClr val="accent3"/>
+          </a:lnRef>
+          <a:fillRef idx="2">
+            <a:schemeClr val="accent3"/>
+          </a:fillRef>
+          <a:effectRef idx="1">
+            <a:schemeClr val="accent3"/>
+          </a:effectRef>
+          <a:fontRef idx="minor">
+            <a:schemeClr val="dk1"/>
+          </a:fontRef>
+        </p:style>
+        <p:txBody>
+          <a:bodyPr vert="horz" wrap="square" lIns="90000" tIns="46800" rIns="90000" bIns="46800" numCol="1" rtlCol="0" anchor="ctr" anchorCtr="0" compatLnSpc="1">
+            <a:prstTxWarp prst="textNoShape">
+              <a:avLst/>
+            </a:prstTxWarp>
+          </a:bodyPr>
+          <a:lstStyle/>
+          <a:p>
+            <a:pPr algn="ctr"/>
+            <a:endParaRPr lang="pt-BR" sz="2000" dirty="0">
+              <a:solidFill>
+                <a:schemeClr val="tx1"/>
+              </a:solidFill>
+              <a:latin typeface="Arial" charset="0"/>
+            </a:endParaRPr>
+          </a:p>
+        </p:txBody>
+      </p:sp>
+      <p:cxnSp>
+        <p:nvCxnSpPr>
+          <p:cNvPr id="5" name="Conector de Seta Reta 4">
+            <a:extLst>
+              <a:ext uri="{FF2B5EF4-FFF2-40B4-BE49-F238E27FC236}">
+                <a16:creationId xmlns:a16="http://schemas.microsoft.com/office/drawing/2014/main" id="{43862EFF-45E6-4D39-BC6C-A6CF18B2F091}"/>
+              </a:ext>
+            </a:extLst>
+          </p:cNvPr>
+          <p:cNvCxnSpPr>
+            <a:stCxn id="3" idx="2"/>
+          </p:cNvCxnSpPr>
+          <p:nvPr/>
+        </p:nvCxnSpPr>
+        <p:spPr bwMode="auto">
+          <a:xfrm>
+            <a:off x="4576234" y="2480733"/>
+            <a:ext cx="1367366" cy="1921934"/>
+          </a:xfrm>
+          <a:prstGeom prst="straightConnector1">
+            <a:avLst/>
+          </a:prstGeom>
+          <a:solidFill>
+            <a:schemeClr val="accent1"/>
+          </a:solidFill>
+          <a:ln w="38100" cap="flat" cmpd="sng" algn="ctr">
+            <a:solidFill>
+              <a:srgbClr val="FF0000"/>
+            </a:solidFill>
+            <a:prstDash val="solid"/>
+            <a:round/>
+            <a:headEnd type="none" w="med" len="med"/>
+            <a:tailEnd type="triangle"/>
+          </a:ln>
+          <a:effectLst/>
+        </p:spPr>
+      </p:cxnSp>
+    </p:spTree>
+    <p:extLst>
+      <p:ext uri="{BB962C8B-B14F-4D97-AF65-F5344CB8AC3E}">
+        <p14:creationId xmlns:p14="http://schemas.microsoft.com/office/powerpoint/2010/main" val="1912692570"/>
+      </p:ext>
+    </p:extLst>
+  </p:cSld>
+  <p:clrMapOvr>
+    <a:masterClrMapping/>
+  </p:clrMapOvr>
+</p:sld>
+</file>
+
+<file path=ppt/slides/slide92.xml><?xml version="1.0" encoding="utf-8"?>
+<p:sld xmlns:a="http://schemas.openxmlformats.org/drawingml/2006/main" xmlns:r="http://schemas.openxmlformats.org/officeDocument/2006/relationships" xmlns:p="http://schemas.openxmlformats.org/presentationml/2006/main">
+  <p:cSld>
+    <p:spTree>
+      <p:nvGrpSpPr>
+        <p:cNvPr id="1" name=""/>
+        <p:cNvGrpSpPr/>
+        <p:nvPr/>
+      </p:nvGrpSpPr>
+      <p:grpSpPr>
+        <a:xfrm>
+          <a:off x="0" y="0"/>
+          <a:ext cx="0" cy="0"/>
+          <a:chOff x="0" y="0"/>
+          <a:chExt cx="0" cy="0"/>
+        </a:xfrm>
+      </p:grpSpPr>
+    </p:spTree>
+    <p:extLst>
+      <p:ext uri="{BB962C8B-B14F-4D97-AF65-F5344CB8AC3E}">
+        <p14:creationId xmlns:p14="http://schemas.microsoft.com/office/powerpoint/2010/main" val="2304983919"/>
       </p:ext>
     </p:extLst>
   </p:cSld>

--- a/Aula 02 - Passo a Passo.pptx
+++ b/Aula 02 - Passo a Passo.pptx
@@ -5,10 +5,10 @@
     <p:sldMasterId id="2147483670" r:id="rId1"/>
   </p:sldMasterIdLst>
   <p:notesMasterIdLst>
-    <p:notesMasterId r:id="rId94"/>
+    <p:notesMasterId r:id="rId114"/>
   </p:notesMasterIdLst>
   <p:handoutMasterIdLst>
-    <p:handoutMasterId r:id="rId95"/>
+    <p:handoutMasterId r:id="rId115"/>
   </p:handoutMasterIdLst>
   <p:sldIdLst>
     <p:sldId id="256" r:id="rId2"/>
@@ -102,7 +102,27 @@
     <p:sldId id="344" r:id="rId90"/>
     <p:sldId id="346" r:id="rId91"/>
     <p:sldId id="347" r:id="rId92"/>
-    <p:sldId id="345" r:id="rId93"/>
+    <p:sldId id="348" r:id="rId93"/>
+    <p:sldId id="345" r:id="rId94"/>
+    <p:sldId id="349" r:id="rId95"/>
+    <p:sldId id="350" r:id="rId96"/>
+    <p:sldId id="351" r:id="rId97"/>
+    <p:sldId id="352" r:id="rId98"/>
+    <p:sldId id="353" r:id="rId99"/>
+    <p:sldId id="354" r:id="rId100"/>
+    <p:sldId id="355" r:id="rId101"/>
+    <p:sldId id="356" r:id="rId102"/>
+    <p:sldId id="357" r:id="rId103"/>
+    <p:sldId id="358" r:id="rId104"/>
+    <p:sldId id="359" r:id="rId105"/>
+    <p:sldId id="360" r:id="rId106"/>
+    <p:sldId id="361" r:id="rId107"/>
+    <p:sldId id="362" r:id="rId108"/>
+    <p:sldId id="363" r:id="rId109"/>
+    <p:sldId id="364" r:id="rId110"/>
+    <p:sldId id="365" r:id="rId111"/>
+    <p:sldId id="366" r:id="rId112"/>
+    <p:sldId id="367" r:id="rId113"/>
   </p:sldIdLst>
   <p:sldSz cx="12192000" cy="6858000"/>
   <p:notesSz cx="6858000" cy="9144000"/>
@@ -3946,6 +3966,1180 @@
 </p:sld>
 </file>
 
+<file path=ppt/slides/slide100.xml><?xml version="1.0" encoding="utf-8"?>
+<p:sld xmlns:a="http://schemas.openxmlformats.org/drawingml/2006/main" xmlns:r="http://schemas.openxmlformats.org/officeDocument/2006/relationships" xmlns:p="http://schemas.openxmlformats.org/presentationml/2006/main">
+  <p:cSld>
+    <p:spTree>
+      <p:nvGrpSpPr>
+        <p:cNvPr id="1" name=""/>
+        <p:cNvGrpSpPr/>
+        <p:nvPr/>
+      </p:nvGrpSpPr>
+      <p:grpSpPr>
+        <a:xfrm>
+          <a:off x="0" y="0"/>
+          <a:ext cx="0" cy="0"/>
+          <a:chOff x="0" y="0"/>
+          <a:chExt cx="0" cy="0"/>
+        </a:xfrm>
+      </p:grpSpPr>
+      <p:sp>
+        <p:nvSpPr>
+          <p:cNvPr id="2" name="Título 1">
+            <a:extLst>
+              <a:ext uri="{FF2B5EF4-FFF2-40B4-BE49-F238E27FC236}">
+                <a16:creationId xmlns:a16="http://schemas.microsoft.com/office/drawing/2014/main" id="{B52182FA-C00E-4286-885F-7982013B7941}"/>
+              </a:ext>
+            </a:extLst>
+          </p:cNvPr>
+          <p:cNvSpPr>
+            <a:spLocks noGrp="1"/>
+          </p:cNvSpPr>
+          <p:nvPr>
+            <p:ph type="ctrTitle"/>
+          </p:nvPr>
+        </p:nvSpPr>
+        <p:spPr/>
+        <p:txBody>
+          <a:bodyPr/>
+          <a:lstStyle/>
+          <a:p>
+            <a:r>
+              <a:rPr lang="pt-BR" dirty="0"/>
+              <a:t>Exemplo5 </a:t>
+            </a:r>
+          </a:p>
+        </p:txBody>
+      </p:sp>
+      <p:sp>
+        <p:nvSpPr>
+          <p:cNvPr id="3" name="Subtítulo 2">
+            <a:extLst>
+              <a:ext uri="{FF2B5EF4-FFF2-40B4-BE49-F238E27FC236}">
+                <a16:creationId xmlns:a16="http://schemas.microsoft.com/office/drawing/2014/main" id="{0B0F2E60-5221-42C7-8CC5-3491C9455DF0}"/>
+              </a:ext>
+            </a:extLst>
+          </p:cNvPr>
+          <p:cNvSpPr>
+            <a:spLocks noGrp="1"/>
+          </p:cNvSpPr>
+          <p:nvPr>
+            <p:ph type="subTitle" idx="1"/>
+          </p:nvPr>
+        </p:nvSpPr>
+        <p:spPr/>
+        <p:txBody>
+          <a:bodyPr/>
+          <a:lstStyle/>
+          <a:p>
+            <a:endParaRPr lang="pt-BR"/>
+          </a:p>
+        </p:txBody>
+      </p:sp>
+    </p:spTree>
+    <p:extLst>
+      <p:ext uri="{BB962C8B-B14F-4D97-AF65-F5344CB8AC3E}">
+        <p14:creationId xmlns:p14="http://schemas.microsoft.com/office/powerpoint/2010/main" val="3209746722"/>
+      </p:ext>
+    </p:extLst>
+  </p:cSld>
+  <p:clrMapOvr>
+    <a:masterClrMapping/>
+  </p:clrMapOvr>
+</p:sld>
+</file>
+
+<file path=ppt/slides/slide101.xml><?xml version="1.0" encoding="utf-8"?>
+<p:sld xmlns:a="http://schemas.openxmlformats.org/drawingml/2006/main" xmlns:r="http://schemas.openxmlformats.org/officeDocument/2006/relationships" xmlns:p="http://schemas.openxmlformats.org/presentationml/2006/main">
+  <p:cSld>
+    <p:spTree>
+      <p:nvGrpSpPr>
+        <p:cNvPr id="1" name=""/>
+        <p:cNvGrpSpPr/>
+        <p:nvPr/>
+      </p:nvGrpSpPr>
+      <p:grpSpPr>
+        <a:xfrm>
+          <a:off x="0" y="0"/>
+          <a:ext cx="0" cy="0"/>
+          <a:chOff x="0" y="0"/>
+          <a:chExt cx="0" cy="0"/>
+        </a:xfrm>
+      </p:grpSpPr>
+      <p:pic>
+        <p:nvPicPr>
+          <p:cNvPr id="2" name="Imagem 1">
+            <a:extLst>
+              <a:ext uri="{FF2B5EF4-FFF2-40B4-BE49-F238E27FC236}">
+                <a16:creationId xmlns:a16="http://schemas.microsoft.com/office/drawing/2014/main" id="{16306FC5-9525-465D-9AAF-43CF8CB52AE9}"/>
+              </a:ext>
+            </a:extLst>
+          </p:cNvPr>
+          <p:cNvPicPr>
+            <a:picLocks noChangeAspect="1"/>
+          </p:cNvPicPr>
+          <p:nvPr/>
+        </p:nvPicPr>
+        <p:blipFill>
+          <a:blip r:embed="rId2"/>
+          <a:stretch>
+            <a:fillRect/>
+          </a:stretch>
+        </p:blipFill>
+        <p:spPr>
+          <a:xfrm>
+            <a:off x="1734415" y="595116"/>
+            <a:ext cx="8723169" cy="5667768"/>
+          </a:xfrm>
+          <a:prstGeom prst="rect">
+            <a:avLst/>
+          </a:prstGeom>
+        </p:spPr>
+      </p:pic>
+      <p:cxnSp>
+        <p:nvCxnSpPr>
+          <p:cNvPr id="4" name="Conector de Seta Reta 3">
+            <a:extLst>
+              <a:ext uri="{FF2B5EF4-FFF2-40B4-BE49-F238E27FC236}">
+                <a16:creationId xmlns:a16="http://schemas.microsoft.com/office/drawing/2014/main" id="{2A39B75A-5838-4F52-8003-8182EA09A54E}"/>
+              </a:ext>
+            </a:extLst>
+          </p:cNvPr>
+          <p:cNvCxnSpPr/>
+          <p:nvPr/>
+        </p:nvCxnSpPr>
+        <p:spPr bwMode="auto">
+          <a:xfrm>
+            <a:off x="1075267" y="4207933"/>
+            <a:ext cx="1413933" cy="956734"/>
+          </a:xfrm>
+          <a:prstGeom prst="straightConnector1">
+            <a:avLst/>
+          </a:prstGeom>
+          <a:solidFill>
+            <a:schemeClr val="accent1"/>
+          </a:solidFill>
+          <a:ln w="38100" cap="flat" cmpd="sng" algn="ctr">
+            <a:solidFill>
+              <a:srgbClr val="FF0000"/>
+            </a:solidFill>
+            <a:prstDash val="solid"/>
+            <a:round/>
+            <a:headEnd type="none" w="med" len="med"/>
+            <a:tailEnd type="triangle"/>
+          </a:ln>
+          <a:effectLst/>
+        </p:spPr>
+      </p:cxnSp>
+      <p:sp>
+        <p:nvSpPr>
+          <p:cNvPr id="5" name="Elipse 4">
+            <a:extLst>
+              <a:ext uri="{FF2B5EF4-FFF2-40B4-BE49-F238E27FC236}">
+                <a16:creationId xmlns:a16="http://schemas.microsoft.com/office/drawing/2014/main" id="{75FF8AFB-AB4A-4E01-890A-615A3A6886AE}"/>
+              </a:ext>
+            </a:extLst>
+          </p:cNvPr>
+          <p:cNvSpPr/>
+          <p:nvPr/>
+        </p:nvSpPr>
+        <p:spPr bwMode="auto">
+          <a:xfrm>
+            <a:off x="262467" y="3733800"/>
+            <a:ext cx="2209800" cy="1126067"/>
+          </a:xfrm>
+          <a:prstGeom prst="ellipse">
+            <a:avLst/>
+          </a:prstGeom>
+          <a:solidFill>
+            <a:srgbClr val="FFFF00"/>
+          </a:solidFill>
+          <a:ln w="38100">
+            <a:solidFill>
+              <a:srgbClr val="FF0000"/>
+            </a:solidFill>
+            <a:headEnd type="none" w="med" len="med"/>
+            <a:tailEnd type="triangle" w="med" len="med"/>
+          </a:ln>
+        </p:spPr>
+        <p:style>
+          <a:lnRef idx="1">
+            <a:schemeClr val="accent3"/>
+          </a:lnRef>
+          <a:fillRef idx="2">
+            <a:schemeClr val="accent3"/>
+          </a:fillRef>
+          <a:effectRef idx="1">
+            <a:schemeClr val="accent3"/>
+          </a:effectRef>
+          <a:fontRef idx="minor">
+            <a:schemeClr val="dk1"/>
+          </a:fontRef>
+        </p:style>
+        <p:txBody>
+          <a:bodyPr vert="horz" wrap="square" lIns="90000" tIns="46800" rIns="90000" bIns="46800" numCol="1" rtlCol="0" anchor="ctr" anchorCtr="0" compatLnSpc="1">
+            <a:prstTxWarp prst="textNoShape">
+              <a:avLst/>
+            </a:prstTxWarp>
+          </a:bodyPr>
+          <a:lstStyle/>
+          <a:p>
+            <a:pPr algn="ctr"/>
+            <a:r>
+              <a:rPr lang="pt-BR" sz="2000" dirty="0">
+                <a:solidFill>
+                  <a:schemeClr val="tx1"/>
+                </a:solidFill>
+                <a:latin typeface="Arial" charset="0"/>
+              </a:rPr>
+              <a:t>Arrasta para dentro de aula02</a:t>
+            </a:r>
+          </a:p>
+        </p:txBody>
+      </p:sp>
+    </p:spTree>
+    <p:extLst>
+      <p:ext uri="{BB962C8B-B14F-4D97-AF65-F5344CB8AC3E}">
+        <p14:creationId xmlns:p14="http://schemas.microsoft.com/office/powerpoint/2010/main" val="2842661959"/>
+      </p:ext>
+    </p:extLst>
+  </p:cSld>
+  <p:clrMapOvr>
+    <a:masterClrMapping/>
+  </p:clrMapOvr>
+</p:sld>
+</file>
+
+<file path=ppt/slides/slide102.xml><?xml version="1.0" encoding="utf-8"?>
+<p:sld xmlns:a="http://schemas.openxmlformats.org/drawingml/2006/main" xmlns:r="http://schemas.openxmlformats.org/officeDocument/2006/relationships" xmlns:p="http://schemas.openxmlformats.org/presentationml/2006/main">
+  <p:cSld>
+    <p:spTree>
+      <p:nvGrpSpPr>
+        <p:cNvPr id="1" name=""/>
+        <p:cNvGrpSpPr/>
+        <p:nvPr/>
+      </p:nvGrpSpPr>
+      <p:grpSpPr>
+        <a:xfrm>
+          <a:off x="0" y="0"/>
+          <a:ext cx="0" cy="0"/>
+          <a:chOff x="0" y="0"/>
+          <a:chExt cx="0" cy="0"/>
+        </a:xfrm>
+      </p:grpSpPr>
+      <p:pic>
+        <p:nvPicPr>
+          <p:cNvPr id="2" name="Imagem 1">
+            <a:extLst>
+              <a:ext uri="{FF2B5EF4-FFF2-40B4-BE49-F238E27FC236}">
+                <a16:creationId xmlns:a16="http://schemas.microsoft.com/office/drawing/2014/main" id="{24326325-353C-4ED4-A44E-6D149F1E0FDD}"/>
+              </a:ext>
+            </a:extLst>
+          </p:cNvPr>
+          <p:cNvPicPr>
+            <a:picLocks noChangeAspect="1"/>
+          </p:cNvPicPr>
+          <p:nvPr/>
+        </p:nvPicPr>
+        <p:blipFill>
+          <a:blip r:embed="rId2"/>
+          <a:stretch>
+            <a:fillRect/>
+          </a:stretch>
+        </p:blipFill>
+        <p:spPr>
+          <a:xfrm>
+            <a:off x="505111" y="365803"/>
+            <a:ext cx="3753622" cy="5882388"/>
+          </a:xfrm>
+          <a:prstGeom prst="rect">
+            <a:avLst/>
+          </a:prstGeom>
+        </p:spPr>
+      </p:pic>
+      <p:sp>
+        <p:nvSpPr>
+          <p:cNvPr id="3" name="Seta: para a Esquerda 2">
+            <a:extLst>
+              <a:ext uri="{FF2B5EF4-FFF2-40B4-BE49-F238E27FC236}">
+                <a16:creationId xmlns:a16="http://schemas.microsoft.com/office/drawing/2014/main" id="{6ADE9E61-933D-47FB-824A-9E5ECBE7955F}"/>
+              </a:ext>
+            </a:extLst>
+          </p:cNvPr>
+          <p:cNvSpPr/>
+          <p:nvPr/>
+        </p:nvSpPr>
+        <p:spPr bwMode="auto">
+          <a:xfrm>
+            <a:off x="2760133" y="2328333"/>
+            <a:ext cx="5300133" cy="1651000"/>
+          </a:xfrm>
+          <a:prstGeom prst="leftArrow">
+            <a:avLst/>
+          </a:prstGeom>
+          <a:solidFill>
+            <a:srgbClr val="FFFF00"/>
+          </a:solidFill>
+          <a:ln w="38100">
+            <a:solidFill>
+              <a:srgbClr val="FF0000"/>
+            </a:solidFill>
+            <a:headEnd type="none" w="med" len="med"/>
+            <a:tailEnd type="triangle" w="med" len="med"/>
+          </a:ln>
+        </p:spPr>
+        <p:style>
+          <a:lnRef idx="1">
+            <a:schemeClr val="accent3"/>
+          </a:lnRef>
+          <a:fillRef idx="2">
+            <a:schemeClr val="accent3"/>
+          </a:fillRef>
+          <a:effectRef idx="1">
+            <a:schemeClr val="accent3"/>
+          </a:effectRef>
+          <a:fontRef idx="minor">
+            <a:schemeClr val="dk1"/>
+          </a:fontRef>
+        </p:style>
+        <p:txBody>
+          <a:bodyPr vert="horz" wrap="square" lIns="90000" tIns="46800" rIns="90000" bIns="46800" numCol="1" rtlCol="0" anchor="ctr" anchorCtr="0" compatLnSpc="1">
+            <a:prstTxWarp prst="textNoShape">
+              <a:avLst/>
+            </a:prstTxWarp>
+          </a:bodyPr>
+          <a:lstStyle/>
+          <a:p>
+            <a:pPr algn="ctr"/>
+            <a:r>
+              <a:rPr lang="pt-BR" sz="2000" dirty="0">
+                <a:solidFill>
+                  <a:schemeClr val="tx1"/>
+                </a:solidFill>
+                <a:latin typeface="Arial" charset="0"/>
+              </a:rPr>
+              <a:t>Criar o arquivo </a:t>
+            </a:r>
+            <a:r>
+              <a:rPr lang="pt-BR" sz="2000" b="1" dirty="0">
+                <a:solidFill>
+                  <a:schemeClr val="tx1"/>
+                </a:solidFill>
+                <a:latin typeface="Arial" charset="0"/>
+              </a:rPr>
+              <a:t>exemplo5.html</a:t>
+            </a:r>
+          </a:p>
+        </p:txBody>
+      </p:sp>
+    </p:spTree>
+    <p:extLst>
+      <p:ext uri="{BB962C8B-B14F-4D97-AF65-F5344CB8AC3E}">
+        <p14:creationId xmlns:p14="http://schemas.microsoft.com/office/powerpoint/2010/main" val="1041297158"/>
+      </p:ext>
+    </p:extLst>
+  </p:cSld>
+  <p:clrMapOvr>
+    <a:masterClrMapping/>
+  </p:clrMapOvr>
+</p:sld>
+</file>
+
+<file path=ppt/slides/slide103.xml><?xml version="1.0" encoding="utf-8"?>
+<p:sld xmlns:a="http://schemas.openxmlformats.org/drawingml/2006/main" xmlns:r="http://schemas.openxmlformats.org/officeDocument/2006/relationships" xmlns:p="http://schemas.openxmlformats.org/presentationml/2006/main">
+  <p:cSld>
+    <p:spTree>
+      <p:nvGrpSpPr>
+        <p:cNvPr id="1" name=""/>
+        <p:cNvGrpSpPr/>
+        <p:nvPr/>
+      </p:nvGrpSpPr>
+      <p:grpSpPr>
+        <a:xfrm>
+          <a:off x="0" y="0"/>
+          <a:ext cx="0" cy="0"/>
+          <a:chOff x="0" y="0"/>
+          <a:chExt cx="0" cy="0"/>
+        </a:xfrm>
+      </p:grpSpPr>
+      <p:pic>
+        <p:nvPicPr>
+          <p:cNvPr id="2" name="Imagem 1">
+            <a:extLst>
+              <a:ext uri="{FF2B5EF4-FFF2-40B4-BE49-F238E27FC236}">
+                <a16:creationId xmlns:a16="http://schemas.microsoft.com/office/drawing/2014/main" id="{EB2D47B6-9BD8-480F-8F1B-F27045CF34AA}"/>
+              </a:ext>
+            </a:extLst>
+          </p:cNvPr>
+          <p:cNvPicPr>
+            <a:picLocks noChangeAspect="1"/>
+          </p:cNvPicPr>
+          <p:nvPr/>
+        </p:nvPicPr>
+        <p:blipFill>
+          <a:blip r:embed="rId2"/>
+          <a:stretch>
+            <a:fillRect/>
+          </a:stretch>
+        </p:blipFill>
+        <p:spPr>
+          <a:xfrm>
+            <a:off x="1087055" y="1008360"/>
+            <a:ext cx="10017888" cy="4841280"/>
+          </a:xfrm>
+          <a:prstGeom prst="rect">
+            <a:avLst/>
+          </a:prstGeom>
+        </p:spPr>
+      </p:pic>
+      <p:sp>
+        <p:nvSpPr>
+          <p:cNvPr id="3" name="Retângulo 2">
+            <a:extLst>
+              <a:ext uri="{FF2B5EF4-FFF2-40B4-BE49-F238E27FC236}">
+                <a16:creationId xmlns:a16="http://schemas.microsoft.com/office/drawing/2014/main" id="{2981249F-2C86-47DB-8758-4AD9427D60CB}"/>
+              </a:ext>
+            </a:extLst>
+          </p:cNvPr>
+          <p:cNvSpPr/>
+          <p:nvPr/>
+        </p:nvSpPr>
+        <p:spPr bwMode="auto">
+          <a:xfrm>
+            <a:off x="2387600" y="3683000"/>
+            <a:ext cx="5384800" cy="601133"/>
+          </a:xfrm>
+          <a:prstGeom prst="rect">
+            <a:avLst/>
+          </a:prstGeom>
+          <a:noFill/>
+          <a:ln w="38100">
+            <a:solidFill>
+              <a:srgbClr val="FF0000"/>
+            </a:solidFill>
+            <a:headEnd type="none" w="med" len="med"/>
+            <a:tailEnd type="triangle" w="med" len="med"/>
+          </a:ln>
+        </p:spPr>
+        <p:style>
+          <a:lnRef idx="1">
+            <a:schemeClr val="accent3"/>
+          </a:lnRef>
+          <a:fillRef idx="2">
+            <a:schemeClr val="accent3"/>
+          </a:fillRef>
+          <a:effectRef idx="1">
+            <a:schemeClr val="accent3"/>
+          </a:effectRef>
+          <a:fontRef idx="minor">
+            <a:schemeClr val="dk1"/>
+          </a:fontRef>
+        </p:style>
+        <p:txBody>
+          <a:bodyPr vert="horz" wrap="square" lIns="90000" tIns="46800" rIns="90000" bIns="46800" numCol="1" rtlCol="0" anchor="ctr" anchorCtr="0" compatLnSpc="1">
+            <a:prstTxWarp prst="textNoShape">
+              <a:avLst/>
+            </a:prstTxWarp>
+          </a:bodyPr>
+          <a:lstStyle/>
+          <a:p>
+            <a:pPr algn="ctr"/>
+            <a:endParaRPr lang="pt-BR" sz="2000" dirty="0">
+              <a:solidFill>
+                <a:schemeClr val="tx1"/>
+              </a:solidFill>
+              <a:latin typeface="Arial" charset="0"/>
+            </a:endParaRPr>
+          </a:p>
+        </p:txBody>
+      </p:sp>
+      <p:cxnSp>
+        <p:nvCxnSpPr>
+          <p:cNvPr id="5" name="Conector de Seta Reta 4">
+            <a:extLst>
+              <a:ext uri="{FF2B5EF4-FFF2-40B4-BE49-F238E27FC236}">
+                <a16:creationId xmlns:a16="http://schemas.microsoft.com/office/drawing/2014/main" id="{38E4757A-00B4-4040-BEF8-020558A4BC5F}"/>
+              </a:ext>
+            </a:extLst>
+          </p:cNvPr>
+          <p:cNvCxnSpPr/>
+          <p:nvPr/>
+        </p:nvCxnSpPr>
+        <p:spPr bwMode="auto">
+          <a:xfrm flipH="1" flipV="1">
+            <a:off x="6807200" y="4123267"/>
+            <a:ext cx="702733" cy="1075266"/>
+          </a:xfrm>
+          <a:prstGeom prst="straightConnector1">
+            <a:avLst/>
+          </a:prstGeom>
+          <a:solidFill>
+            <a:schemeClr val="accent1"/>
+          </a:solidFill>
+          <a:ln w="38100" cap="flat" cmpd="sng" algn="ctr">
+            <a:solidFill>
+              <a:srgbClr val="FF0000"/>
+            </a:solidFill>
+            <a:prstDash val="solid"/>
+            <a:round/>
+            <a:headEnd type="none" w="med" len="med"/>
+            <a:tailEnd type="triangle"/>
+          </a:ln>
+          <a:effectLst/>
+        </p:spPr>
+      </p:cxnSp>
+    </p:spTree>
+    <p:extLst>
+      <p:ext uri="{BB962C8B-B14F-4D97-AF65-F5344CB8AC3E}">
+        <p14:creationId xmlns:p14="http://schemas.microsoft.com/office/powerpoint/2010/main" val="1903533868"/>
+      </p:ext>
+    </p:extLst>
+  </p:cSld>
+  <p:clrMapOvr>
+    <a:masterClrMapping/>
+  </p:clrMapOvr>
+</p:sld>
+</file>
+
+<file path=ppt/slides/slide104.xml><?xml version="1.0" encoding="utf-8"?>
+<p:sld xmlns:a="http://schemas.openxmlformats.org/drawingml/2006/main" xmlns:r="http://schemas.openxmlformats.org/officeDocument/2006/relationships" xmlns:p="http://schemas.openxmlformats.org/presentationml/2006/main">
+  <p:cSld>
+    <p:spTree>
+      <p:nvGrpSpPr>
+        <p:cNvPr id="1" name=""/>
+        <p:cNvGrpSpPr/>
+        <p:nvPr/>
+      </p:nvGrpSpPr>
+      <p:grpSpPr>
+        <a:xfrm>
+          <a:off x="0" y="0"/>
+          <a:ext cx="0" cy="0"/>
+          <a:chOff x="0" y="0"/>
+          <a:chExt cx="0" cy="0"/>
+        </a:xfrm>
+      </p:grpSpPr>
+      <p:pic>
+        <p:nvPicPr>
+          <p:cNvPr id="2" name="Imagem 1">
+            <a:extLst>
+              <a:ext uri="{FF2B5EF4-FFF2-40B4-BE49-F238E27FC236}">
+                <a16:creationId xmlns:a16="http://schemas.microsoft.com/office/drawing/2014/main" id="{8B9F1834-0146-4F07-82CE-F549D56AA9D0}"/>
+              </a:ext>
+            </a:extLst>
+          </p:cNvPr>
+          <p:cNvPicPr>
+            <a:picLocks noChangeAspect="1"/>
+          </p:cNvPicPr>
+          <p:nvPr/>
+        </p:nvPicPr>
+        <p:blipFill>
+          <a:blip r:embed="rId2"/>
+          <a:stretch>
+            <a:fillRect/>
+          </a:stretch>
+        </p:blipFill>
+        <p:spPr>
+          <a:xfrm>
+            <a:off x="679733" y="867111"/>
+            <a:ext cx="5766918" cy="4492289"/>
+          </a:xfrm>
+          <a:prstGeom prst="rect">
+            <a:avLst/>
+          </a:prstGeom>
+        </p:spPr>
+      </p:pic>
+      <p:sp>
+        <p:nvSpPr>
+          <p:cNvPr id="3" name="Seta: para a Esquerda 2">
+            <a:extLst>
+              <a:ext uri="{FF2B5EF4-FFF2-40B4-BE49-F238E27FC236}">
+                <a16:creationId xmlns:a16="http://schemas.microsoft.com/office/drawing/2014/main" id="{E3070475-8DB5-4B71-87A8-A75E52EB109A}"/>
+              </a:ext>
+            </a:extLst>
+          </p:cNvPr>
+          <p:cNvSpPr/>
+          <p:nvPr/>
+        </p:nvSpPr>
+        <p:spPr bwMode="auto">
+          <a:xfrm>
+            <a:off x="3488267" y="2032000"/>
+            <a:ext cx="4826000" cy="1684867"/>
+          </a:xfrm>
+          <a:prstGeom prst="leftArrow">
+            <a:avLst/>
+          </a:prstGeom>
+          <a:solidFill>
+            <a:srgbClr val="FFFF00"/>
+          </a:solidFill>
+          <a:ln w="38100">
+            <a:solidFill>
+              <a:srgbClr val="FF0000"/>
+            </a:solidFill>
+            <a:headEnd type="none" w="med" len="med"/>
+            <a:tailEnd type="triangle" w="med" len="med"/>
+          </a:ln>
+        </p:spPr>
+        <p:style>
+          <a:lnRef idx="1">
+            <a:schemeClr val="accent3"/>
+          </a:lnRef>
+          <a:fillRef idx="2">
+            <a:schemeClr val="accent3"/>
+          </a:fillRef>
+          <a:effectRef idx="1">
+            <a:schemeClr val="accent3"/>
+          </a:effectRef>
+          <a:fontRef idx="minor">
+            <a:schemeClr val="dk1"/>
+          </a:fontRef>
+        </p:style>
+        <p:txBody>
+          <a:bodyPr vert="horz" wrap="square" lIns="90000" tIns="46800" rIns="90000" bIns="46800" numCol="1" rtlCol="0" anchor="ctr" anchorCtr="0" compatLnSpc="1">
+            <a:prstTxWarp prst="textNoShape">
+              <a:avLst/>
+            </a:prstTxWarp>
+          </a:bodyPr>
+          <a:lstStyle/>
+          <a:p>
+            <a:pPr algn="ctr"/>
+            <a:r>
+              <a:rPr lang="pt-BR" sz="2000" dirty="0">
+                <a:solidFill>
+                  <a:schemeClr val="tx1"/>
+                </a:solidFill>
+                <a:latin typeface="Arial" charset="0"/>
+              </a:rPr>
+              <a:t>Clique para abrir</a:t>
+            </a:r>
+          </a:p>
+        </p:txBody>
+      </p:sp>
+    </p:spTree>
+    <p:extLst>
+      <p:ext uri="{BB962C8B-B14F-4D97-AF65-F5344CB8AC3E}">
+        <p14:creationId xmlns:p14="http://schemas.microsoft.com/office/powerpoint/2010/main" val="1520624108"/>
+      </p:ext>
+    </p:extLst>
+  </p:cSld>
+  <p:clrMapOvr>
+    <a:masterClrMapping/>
+  </p:clrMapOvr>
+</p:sld>
+</file>
+
+<file path=ppt/slides/slide105.xml><?xml version="1.0" encoding="utf-8"?>
+<p:sld xmlns:a="http://schemas.openxmlformats.org/drawingml/2006/main" xmlns:r="http://schemas.openxmlformats.org/officeDocument/2006/relationships" xmlns:p="http://schemas.openxmlformats.org/presentationml/2006/main">
+  <p:cSld>
+    <p:spTree>
+      <p:nvGrpSpPr>
+        <p:cNvPr id="1" name=""/>
+        <p:cNvGrpSpPr/>
+        <p:nvPr/>
+      </p:nvGrpSpPr>
+      <p:grpSpPr>
+        <a:xfrm>
+          <a:off x="0" y="0"/>
+          <a:ext cx="0" cy="0"/>
+          <a:chOff x="0" y="0"/>
+          <a:chExt cx="0" cy="0"/>
+        </a:xfrm>
+      </p:grpSpPr>
+      <p:pic>
+        <p:nvPicPr>
+          <p:cNvPr id="2" name="Imagem 1">
+            <a:extLst>
+              <a:ext uri="{FF2B5EF4-FFF2-40B4-BE49-F238E27FC236}">
+                <a16:creationId xmlns:a16="http://schemas.microsoft.com/office/drawing/2014/main" id="{AEB54721-E555-4248-9ED1-621F8D9EFE7F}"/>
+              </a:ext>
+            </a:extLst>
+          </p:cNvPr>
+          <p:cNvPicPr>
+            <a:picLocks noChangeAspect="1"/>
+          </p:cNvPicPr>
+          <p:nvPr/>
+        </p:nvPicPr>
+        <p:blipFill>
+          <a:blip r:embed="rId2"/>
+          <a:stretch>
+            <a:fillRect/>
+          </a:stretch>
+        </p:blipFill>
+        <p:spPr>
+          <a:xfrm>
+            <a:off x="1172801" y="371059"/>
+            <a:ext cx="5172797" cy="5963482"/>
+          </a:xfrm>
+          <a:prstGeom prst="rect">
+            <a:avLst/>
+          </a:prstGeom>
+        </p:spPr>
+      </p:pic>
+      <p:sp>
+        <p:nvSpPr>
+          <p:cNvPr id="3" name="Retângulo 2">
+            <a:extLst>
+              <a:ext uri="{FF2B5EF4-FFF2-40B4-BE49-F238E27FC236}">
+                <a16:creationId xmlns:a16="http://schemas.microsoft.com/office/drawing/2014/main" id="{465F77E1-C512-4E51-907B-88A070E692D4}"/>
+              </a:ext>
+            </a:extLst>
+          </p:cNvPr>
+          <p:cNvSpPr/>
+          <p:nvPr/>
+        </p:nvSpPr>
+        <p:spPr bwMode="auto">
+          <a:xfrm>
+            <a:off x="1845733" y="3488267"/>
+            <a:ext cx="3860800" cy="2658533"/>
+          </a:xfrm>
+          <a:prstGeom prst="rect">
+            <a:avLst/>
+          </a:prstGeom>
+          <a:noFill/>
+          <a:ln w="38100">
+            <a:solidFill>
+              <a:srgbClr val="FF0000"/>
+            </a:solidFill>
+            <a:headEnd type="none" w="med" len="med"/>
+            <a:tailEnd type="triangle" w="med" len="med"/>
+          </a:ln>
+        </p:spPr>
+        <p:style>
+          <a:lnRef idx="1">
+            <a:schemeClr val="accent3"/>
+          </a:lnRef>
+          <a:fillRef idx="2">
+            <a:schemeClr val="accent3"/>
+          </a:fillRef>
+          <a:effectRef idx="1">
+            <a:schemeClr val="accent3"/>
+          </a:effectRef>
+          <a:fontRef idx="minor">
+            <a:schemeClr val="dk1"/>
+          </a:fontRef>
+        </p:style>
+        <p:txBody>
+          <a:bodyPr vert="horz" wrap="square" lIns="90000" tIns="46800" rIns="90000" bIns="46800" numCol="1" rtlCol="0" anchor="ctr" anchorCtr="0" compatLnSpc="1">
+            <a:prstTxWarp prst="textNoShape">
+              <a:avLst/>
+            </a:prstTxWarp>
+          </a:bodyPr>
+          <a:lstStyle/>
+          <a:p>
+            <a:pPr algn="ctr"/>
+            <a:endParaRPr lang="pt-BR" sz="2000" dirty="0">
+              <a:solidFill>
+                <a:schemeClr val="tx1"/>
+              </a:solidFill>
+              <a:latin typeface="Arial" charset="0"/>
+            </a:endParaRPr>
+          </a:p>
+        </p:txBody>
+      </p:sp>
+    </p:spTree>
+    <p:extLst>
+      <p:ext uri="{BB962C8B-B14F-4D97-AF65-F5344CB8AC3E}">
+        <p14:creationId xmlns:p14="http://schemas.microsoft.com/office/powerpoint/2010/main" val="2774503177"/>
+      </p:ext>
+    </p:extLst>
+  </p:cSld>
+  <p:clrMapOvr>
+    <a:masterClrMapping/>
+  </p:clrMapOvr>
+</p:sld>
+</file>
+
+<file path=ppt/slides/slide106.xml><?xml version="1.0" encoding="utf-8"?>
+<p:sld xmlns:a="http://schemas.openxmlformats.org/drawingml/2006/main" xmlns:r="http://schemas.openxmlformats.org/officeDocument/2006/relationships" xmlns:p="http://schemas.openxmlformats.org/presentationml/2006/main">
+  <p:cSld>
+    <p:spTree>
+      <p:nvGrpSpPr>
+        <p:cNvPr id="1" name=""/>
+        <p:cNvGrpSpPr/>
+        <p:nvPr/>
+      </p:nvGrpSpPr>
+      <p:grpSpPr>
+        <a:xfrm>
+          <a:off x="0" y="0"/>
+          <a:ext cx="0" cy="0"/>
+          <a:chOff x="0" y="0"/>
+          <a:chExt cx="0" cy="0"/>
+        </a:xfrm>
+      </p:grpSpPr>
+      <p:pic>
+        <p:nvPicPr>
+          <p:cNvPr id="2" name="Imagem 1">
+            <a:extLst>
+              <a:ext uri="{FF2B5EF4-FFF2-40B4-BE49-F238E27FC236}">
+                <a16:creationId xmlns:a16="http://schemas.microsoft.com/office/drawing/2014/main" id="{9EA94074-35AE-40DE-B42F-3E0AA3D160E7}"/>
+              </a:ext>
+            </a:extLst>
+          </p:cNvPr>
+          <p:cNvPicPr>
+            <a:picLocks noChangeAspect="1"/>
+          </p:cNvPicPr>
+          <p:nvPr/>
+        </p:nvPicPr>
+        <p:blipFill>
+          <a:blip r:embed="rId2"/>
+          <a:stretch>
+            <a:fillRect/>
+          </a:stretch>
+        </p:blipFill>
+        <p:spPr>
+          <a:xfrm>
+            <a:off x="730771" y="395339"/>
+            <a:ext cx="10730457" cy="6067320"/>
+          </a:xfrm>
+          <a:prstGeom prst="rect">
+            <a:avLst/>
+          </a:prstGeom>
+        </p:spPr>
+      </p:pic>
+      <p:sp>
+        <p:nvSpPr>
+          <p:cNvPr id="3" name="Retângulo 2">
+            <a:extLst>
+              <a:ext uri="{FF2B5EF4-FFF2-40B4-BE49-F238E27FC236}">
+                <a16:creationId xmlns:a16="http://schemas.microsoft.com/office/drawing/2014/main" id="{18CADF91-153A-4223-8467-10834DDDA4F5}"/>
+              </a:ext>
+            </a:extLst>
+          </p:cNvPr>
+          <p:cNvSpPr/>
+          <p:nvPr/>
+        </p:nvSpPr>
+        <p:spPr bwMode="auto">
+          <a:xfrm>
+            <a:off x="1854200" y="2887133"/>
+            <a:ext cx="2683933" cy="1591734"/>
+          </a:xfrm>
+          <a:prstGeom prst="rect">
+            <a:avLst/>
+          </a:prstGeom>
+          <a:noFill/>
+          <a:ln w="38100">
+            <a:solidFill>
+              <a:srgbClr val="FF0000"/>
+            </a:solidFill>
+            <a:headEnd type="none" w="med" len="med"/>
+            <a:tailEnd type="triangle" w="med" len="med"/>
+          </a:ln>
+        </p:spPr>
+        <p:style>
+          <a:lnRef idx="1">
+            <a:schemeClr val="accent3"/>
+          </a:lnRef>
+          <a:fillRef idx="2">
+            <a:schemeClr val="accent3"/>
+          </a:fillRef>
+          <a:effectRef idx="1">
+            <a:schemeClr val="accent3"/>
+          </a:effectRef>
+          <a:fontRef idx="minor">
+            <a:schemeClr val="dk1"/>
+          </a:fontRef>
+        </p:style>
+        <p:txBody>
+          <a:bodyPr vert="horz" wrap="square" lIns="90000" tIns="46800" rIns="90000" bIns="46800" numCol="1" rtlCol="0" anchor="ctr" anchorCtr="0" compatLnSpc="1">
+            <a:prstTxWarp prst="textNoShape">
+              <a:avLst/>
+            </a:prstTxWarp>
+          </a:bodyPr>
+          <a:lstStyle/>
+          <a:p>
+            <a:pPr algn="ctr"/>
+            <a:endParaRPr lang="pt-BR" sz="2000" dirty="0">
+              <a:solidFill>
+                <a:schemeClr val="tx1"/>
+              </a:solidFill>
+              <a:latin typeface="Arial" charset="0"/>
+            </a:endParaRPr>
+          </a:p>
+        </p:txBody>
+      </p:sp>
+    </p:spTree>
+    <p:extLst>
+      <p:ext uri="{BB962C8B-B14F-4D97-AF65-F5344CB8AC3E}">
+        <p14:creationId xmlns:p14="http://schemas.microsoft.com/office/powerpoint/2010/main" val="4275532063"/>
+      </p:ext>
+    </p:extLst>
+  </p:cSld>
+  <p:clrMapOvr>
+    <a:masterClrMapping/>
+  </p:clrMapOvr>
+</p:sld>
+</file>
+
+<file path=ppt/slides/slide107.xml><?xml version="1.0" encoding="utf-8"?>
+<p:sld xmlns:a="http://schemas.openxmlformats.org/drawingml/2006/main" xmlns:r="http://schemas.openxmlformats.org/officeDocument/2006/relationships" xmlns:p="http://schemas.openxmlformats.org/presentationml/2006/main">
+  <p:cSld>
+    <p:spTree>
+      <p:nvGrpSpPr>
+        <p:cNvPr id="1" name=""/>
+        <p:cNvGrpSpPr/>
+        <p:nvPr/>
+      </p:nvGrpSpPr>
+      <p:grpSpPr>
+        <a:xfrm>
+          <a:off x="0" y="0"/>
+          <a:ext cx="0" cy="0"/>
+          <a:chOff x="0" y="0"/>
+          <a:chExt cx="0" cy="0"/>
+        </a:xfrm>
+      </p:grpSpPr>
+      <p:pic>
+        <p:nvPicPr>
+          <p:cNvPr id="2" name="Imagem 1">
+            <a:extLst>
+              <a:ext uri="{FF2B5EF4-FFF2-40B4-BE49-F238E27FC236}">
+                <a16:creationId xmlns:a16="http://schemas.microsoft.com/office/drawing/2014/main" id="{3F34269B-748F-4B96-A804-E029F5EAAEC4}"/>
+              </a:ext>
+            </a:extLst>
+          </p:cNvPr>
+          <p:cNvPicPr>
+            <a:picLocks noChangeAspect="1"/>
+          </p:cNvPicPr>
+          <p:nvPr/>
+        </p:nvPicPr>
+        <p:blipFill>
+          <a:blip r:embed="rId2"/>
+          <a:stretch>
+            <a:fillRect/>
+          </a:stretch>
+        </p:blipFill>
+        <p:spPr>
+          <a:xfrm>
+            <a:off x="2438400" y="957262"/>
+            <a:ext cx="7315200" cy="4943475"/>
+          </a:xfrm>
+          <a:prstGeom prst="rect">
+            <a:avLst/>
+          </a:prstGeom>
+        </p:spPr>
+      </p:pic>
+    </p:spTree>
+    <p:extLst>
+      <p:ext uri="{BB962C8B-B14F-4D97-AF65-F5344CB8AC3E}">
+        <p14:creationId xmlns:p14="http://schemas.microsoft.com/office/powerpoint/2010/main" val="2736918470"/>
+      </p:ext>
+    </p:extLst>
+  </p:cSld>
+  <p:clrMapOvr>
+    <a:masterClrMapping/>
+  </p:clrMapOvr>
+</p:sld>
+</file>
+
+<file path=ppt/slides/slide108.xml><?xml version="1.0" encoding="utf-8"?>
+<p:sld xmlns:a="http://schemas.openxmlformats.org/drawingml/2006/main" xmlns:r="http://schemas.openxmlformats.org/officeDocument/2006/relationships" xmlns:p="http://schemas.openxmlformats.org/presentationml/2006/main">
+  <p:cSld>
+    <p:spTree>
+      <p:nvGrpSpPr>
+        <p:cNvPr id="1" name=""/>
+        <p:cNvGrpSpPr/>
+        <p:nvPr/>
+      </p:nvGrpSpPr>
+      <p:grpSpPr>
+        <a:xfrm>
+          <a:off x="0" y="0"/>
+          <a:ext cx="0" cy="0"/>
+          <a:chOff x="0" y="0"/>
+          <a:chExt cx="0" cy="0"/>
+        </a:xfrm>
+      </p:grpSpPr>
+      <p:pic>
+        <p:nvPicPr>
+          <p:cNvPr id="2" name="Imagem 1">
+            <a:extLst>
+              <a:ext uri="{FF2B5EF4-FFF2-40B4-BE49-F238E27FC236}">
+                <a16:creationId xmlns:a16="http://schemas.microsoft.com/office/drawing/2014/main" id="{679C3FA9-9582-41A2-8C48-FB8107310558}"/>
+              </a:ext>
+            </a:extLst>
+          </p:cNvPr>
+          <p:cNvPicPr>
+            <a:picLocks noChangeAspect="1"/>
+          </p:cNvPicPr>
+          <p:nvPr/>
+        </p:nvPicPr>
+        <p:blipFill>
+          <a:blip r:embed="rId2"/>
+          <a:stretch>
+            <a:fillRect/>
+          </a:stretch>
+        </p:blipFill>
+        <p:spPr>
+          <a:xfrm>
+            <a:off x="725576" y="318707"/>
+            <a:ext cx="6541378" cy="6220585"/>
+          </a:xfrm>
+          <a:prstGeom prst="rect">
+            <a:avLst/>
+          </a:prstGeom>
+        </p:spPr>
+      </p:pic>
+      <p:sp>
+        <p:nvSpPr>
+          <p:cNvPr id="3" name="Retângulo 2">
+            <a:extLst>
+              <a:ext uri="{FF2B5EF4-FFF2-40B4-BE49-F238E27FC236}">
+                <a16:creationId xmlns:a16="http://schemas.microsoft.com/office/drawing/2014/main" id="{22DCA13F-6D73-4EBF-986B-BE8BDB6FB61E}"/>
+              </a:ext>
+            </a:extLst>
+          </p:cNvPr>
+          <p:cNvSpPr/>
+          <p:nvPr/>
+        </p:nvSpPr>
+        <p:spPr bwMode="auto">
+          <a:xfrm>
+            <a:off x="1439333" y="1075267"/>
+            <a:ext cx="5190067" cy="4072466"/>
+          </a:xfrm>
+          <a:prstGeom prst="rect">
+            <a:avLst/>
+          </a:prstGeom>
+          <a:noFill/>
+          <a:ln w="38100">
+            <a:solidFill>
+              <a:srgbClr val="FF0000"/>
+            </a:solidFill>
+            <a:headEnd type="none" w="med" len="med"/>
+            <a:tailEnd type="triangle" w="med" len="med"/>
+          </a:ln>
+        </p:spPr>
+        <p:style>
+          <a:lnRef idx="1">
+            <a:schemeClr val="accent3"/>
+          </a:lnRef>
+          <a:fillRef idx="2">
+            <a:schemeClr val="accent3"/>
+          </a:fillRef>
+          <a:effectRef idx="1">
+            <a:schemeClr val="accent3"/>
+          </a:effectRef>
+          <a:fontRef idx="minor">
+            <a:schemeClr val="dk1"/>
+          </a:fontRef>
+        </p:style>
+        <p:txBody>
+          <a:bodyPr vert="horz" wrap="square" lIns="90000" tIns="46800" rIns="90000" bIns="46800" numCol="1" rtlCol="0" anchor="ctr" anchorCtr="0" compatLnSpc="1">
+            <a:prstTxWarp prst="textNoShape">
+              <a:avLst/>
+            </a:prstTxWarp>
+          </a:bodyPr>
+          <a:lstStyle/>
+          <a:p>
+            <a:pPr algn="ctr"/>
+            <a:endParaRPr lang="pt-BR" sz="2000" dirty="0">
+              <a:solidFill>
+                <a:schemeClr val="tx1"/>
+              </a:solidFill>
+              <a:latin typeface="Arial" charset="0"/>
+            </a:endParaRPr>
+          </a:p>
+        </p:txBody>
+      </p:sp>
+    </p:spTree>
+    <p:extLst>
+      <p:ext uri="{BB962C8B-B14F-4D97-AF65-F5344CB8AC3E}">
+        <p14:creationId xmlns:p14="http://schemas.microsoft.com/office/powerpoint/2010/main" val="2695829624"/>
+      </p:ext>
+    </p:extLst>
+  </p:cSld>
+  <p:clrMapOvr>
+    <a:masterClrMapping/>
+  </p:clrMapOvr>
+</p:sld>
+</file>
+
+<file path=ppt/slides/slide109.xml><?xml version="1.0" encoding="utf-8"?>
+<p:sld xmlns:a="http://schemas.openxmlformats.org/drawingml/2006/main" xmlns:r="http://schemas.openxmlformats.org/officeDocument/2006/relationships" xmlns:p="http://schemas.openxmlformats.org/presentationml/2006/main">
+  <p:cSld>
+    <p:spTree>
+      <p:nvGrpSpPr>
+        <p:cNvPr id="1" name=""/>
+        <p:cNvGrpSpPr/>
+        <p:nvPr/>
+      </p:nvGrpSpPr>
+      <p:grpSpPr>
+        <a:xfrm>
+          <a:off x="0" y="0"/>
+          <a:ext cx="0" cy="0"/>
+          <a:chOff x="0" y="0"/>
+          <a:chExt cx="0" cy="0"/>
+        </a:xfrm>
+      </p:grpSpPr>
+      <p:pic>
+        <p:nvPicPr>
+          <p:cNvPr id="4" name="Imagem 3">
+            <a:extLst>
+              <a:ext uri="{FF2B5EF4-FFF2-40B4-BE49-F238E27FC236}">
+                <a16:creationId xmlns:a16="http://schemas.microsoft.com/office/drawing/2014/main" id="{AB2EF940-B38F-4151-AE1A-8A69E0C9132F}"/>
+              </a:ext>
+            </a:extLst>
+          </p:cNvPr>
+          <p:cNvPicPr>
+            <a:picLocks noChangeAspect="1"/>
+          </p:cNvPicPr>
+          <p:nvPr/>
+        </p:nvPicPr>
+        <p:blipFill>
+          <a:blip r:embed="rId2"/>
+          <a:stretch>
+            <a:fillRect/>
+          </a:stretch>
+        </p:blipFill>
+        <p:spPr>
+          <a:xfrm>
+            <a:off x="1109133" y="508528"/>
+            <a:ext cx="7315200" cy="4943475"/>
+          </a:xfrm>
+          <a:prstGeom prst="rect">
+            <a:avLst/>
+          </a:prstGeom>
+        </p:spPr>
+      </p:pic>
+      <p:pic>
+        <p:nvPicPr>
+          <p:cNvPr id="5" name="Imagem 4">
+            <a:extLst>
+              <a:ext uri="{FF2B5EF4-FFF2-40B4-BE49-F238E27FC236}">
+                <a16:creationId xmlns:a16="http://schemas.microsoft.com/office/drawing/2014/main" id="{092213DB-4C3E-446B-8FB2-A5352120AC87}"/>
+              </a:ext>
+            </a:extLst>
+          </p:cNvPr>
+          <p:cNvPicPr>
+            <a:picLocks noChangeAspect="1"/>
+          </p:cNvPicPr>
+          <p:nvPr/>
+        </p:nvPicPr>
+        <p:blipFill>
+          <a:blip r:embed="rId3"/>
+          <a:stretch>
+            <a:fillRect/>
+          </a:stretch>
+        </p:blipFill>
+        <p:spPr>
+          <a:xfrm>
+            <a:off x="4038600" y="2625195"/>
+            <a:ext cx="7315200" cy="4943475"/>
+          </a:xfrm>
+          <a:prstGeom prst="rect">
+            <a:avLst/>
+          </a:prstGeom>
+        </p:spPr>
+      </p:pic>
+    </p:spTree>
+    <p:extLst>
+      <p:ext uri="{BB962C8B-B14F-4D97-AF65-F5344CB8AC3E}">
+        <p14:creationId xmlns:p14="http://schemas.microsoft.com/office/powerpoint/2010/main" val="3307507966"/>
+      </p:ext>
+    </p:extLst>
+  </p:cSld>
+  <p:clrMapOvr>
+    <a:masterClrMapping/>
+  </p:clrMapOvr>
+</p:sld>
+</file>
+
 <file path=ppt/slides/slide11.xml><?xml version="1.0" encoding="utf-8"?>
 <p:sld xmlns:a="http://schemas.openxmlformats.org/drawingml/2006/main" xmlns:r="http://schemas.openxmlformats.org/officeDocument/2006/relationships" xmlns:p="http://schemas.openxmlformats.org/presentationml/2006/main">
   <p:cSld>
@@ -4032,6 +5226,369 @@
     <p:extLst>
       <p:ext uri="{BB962C8B-B14F-4D97-AF65-F5344CB8AC3E}">
         <p14:creationId xmlns:p14="http://schemas.microsoft.com/office/powerpoint/2010/main" val="3987530572"/>
+      </p:ext>
+    </p:extLst>
+  </p:cSld>
+  <p:clrMapOvr>
+    <a:masterClrMapping/>
+  </p:clrMapOvr>
+</p:sld>
+</file>
+
+<file path=ppt/slides/slide110.xml><?xml version="1.0" encoding="utf-8"?>
+<p:sld xmlns:a="http://schemas.openxmlformats.org/drawingml/2006/main" xmlns:r="http://schemas.openxmlformats.org/officeDocument/2006/relationships" xmlns:p="http://schemas.openxmlformats.org/presentationml/2006/main">
+  <p:cSld>
+    <p:spTree>
+      <p:nvGrpSpPr>
+        <p:cNvPr id="1" name=""/>
+        <p:cNvGrpSpPr/>
+        <p:nvPr/>
+      </p:nvGrpSpPr>
+      <p:grpSpPr>
+        <a:xfrm>
+          <a:off x="0" y="0"/>
+          <a:ext cx="0" cy="0"/>
+          <a:chOff x="0" y="0"/>
+          <a:chExt cx="0" cy="0"/>
+        </a:xfrm>
+      </p:grpSpPr>
+      <p:pic>
+        <p:nvPicPr>
+          <p:cNvPr id="2" name="Imagem 1">
+            <a:extLst>
+              <a:ext uri="{FF2B5EF4-FFF2-40B4-BE49-F238E27FC236}">
+                <a16:creationId xmlns:a16="http://schemas.microsoft.com/office/drawing/2014/main" id="{67AB56E8-500D-4554-B7C8-8A643510B398}"/>
+              </a:ext>
+            </a:extLst>
+          </p:cNvPr>
+          <p:cNvPicPr>
+            <a:picLocks noChangeAspect="1"/>
+          </p:cNvPicPr>
+          <p:nvPr/>
+        </p:nvPicPr>
+        <p:blipFill>
+          <a:blip r:embed="rId2"/>
+          <a:stretch>
+            <a:fillRect/>
+          </a:stretch>
+        </p:blipFill>
+        <p:spPr>
+          <a:xfrm>
+            <a:off x="682869" y="537426"/>
+            <a:ext cx="4086795" cy="2972215"/>
+          </a:xfrm>
+          <a:prstGeom prst="rect">
+            <a:avLst/>
+          </a:prstGeom>
+        </p:spPr>
+      </p:pic>
+      <p:pic>
+        <p:nvPicPr>
+          <p:cNvPr id="3" name="Imagem 2">
+            <a:extLst>
+              <a:ext uri="{FF2B5EF4-FFF2-40B4-BE49-F238E27FC236}">
+                <a16:creationId xmlns:a16="http://schemas.microsoft.com/office/drawing/2014/main" id="{B12A2AA2-178C-4A5F-94CF-98ECB990260E}"/>
+              </a:ext>
+            </a:extLst>
+          </p:cNvPr>
+          <p:cNvPicPr>
+            <a:picLocks noChangeAspect="1"/>
+          </p:cNvPicPr>
+          <p:nvPr/>
+        </p:nvPicPr>
+        <p:blipFill>
+          <a:blip r:embed="rId3"/>
+          <a:stretch>
+            <a:fillRect/>
+          </a:stretch>
+        </p:blipFill>
+        <p:spPr>
+          <a:xfrm>
+            <a:off x="5681132" y="2393982"/>
+            <a:ext cx="6053667" cy="4090955"/>
+          </a:xfrm>
+          <a:prstGeom prst="rect">
+            <a:avLst/>
+          </a:prstGeom>
+        </p:spPr>
+      </p:pic>
+    </p:spTree>
+    <p:extLst>
+      <p:ext uri="{BB962C8B-B14F-4D97-AF65-F5344CB8AC3E}">
+        <p14:creationId xmlns:p14="http://schemas.microsoft.com/office/powerpoint/2010/main" val="3994679761"/>
+      </p:ext>
+    </p:extLst>
+  </p:cSld>
+  <p:clrMapOvr>
+    <a:masterClrMapping/>
+  </p:clrMapOvr>
+</p:sld>
+</file>
+
+<file path=ppt/slides/slide111.xml><?xml version="1.0" encoding="utf-8"?>
+<p:sld xmlns:a="http://schemas.openxmlformats.org/drawingml/2006/main" xmlns:r="http://schemas.openxmlformats.org/officeDocument/2006/relationships" xmlns:p="http://schemas.openxmlformats.org/presentationml/2006/main">
+  <p:cSld>
+    <p:spTree>
+      <p:nvGrpSpPr>
+        <p:cNvPr id="1" name=""/>
+        <p:cNvGrpSpPr/>
+        <p:nvPr/>
+      </p:nvGrpSpPr>
+      <p:grpSpPr>
+        <a:xfrm>
+          <a:off x="0" y="0"/>
+          <a:ext cx="0" cy="0"/>
+          <a:chOff x="0" y="0"/>
+          <a:chExt cx="0" cy="0"/>
+        </a:xfrm>
+      </p:grpSpPr>
+      <p:pic>
+        <p:nvPicPr>
+          <p:cNvPr id="2" name="Imagem 1">
+            <a:extLst>
+              <a:ext uri="{FF2B5EF4-FFF2-40B4-BE49-F238E27FC236}">
+                <a16:creationId xmlns:a16="http://schemas.microsoft.com/office/drawing/2014/main" id="{D0DACBBC-30C9-4A87-A64B-84F6B9CCF946}"/>
+              </a:ext>
+            </a:extLst>
+          </p:cNvPr>
+          <p:cNvPicPr>
+            <a:picLocks noChangeAspect="1"/>
+          </p:cNvPicPr>
+          <p:nvPr/>
+        </p:nvPicPr>
+        <p:blipFill>
+          <a:blip r:embed="rId2"/>
+          <a:stretch>
+            <a:fillRect/>
+          </a:stretch>
+        </p:blipFill>
+        <p:spPr>
+          <a:xfrm>
+            <a:off x="369078" y="1174449"/>
+            <a:ext cx="4020111" cy="4305901"/>
+          </a:xfrm>
+          <a:prstGeom prst="rect">
+            <a:avLst/>
+          </a:prstGeom>
+        </p:spPr>
+      </p:pic>
+      <p:pic>
+        <p:nvPicPr>
+          <p:cNvPr id="3" name="Imagem 2">
+            <a:extLst>
+              <a:ext uri="{FF2B5EF4-FFF2-40B4-BE49-F238E27FC236}">
+                <a16:creationId xmlns:a16="http://schemas.microsoft.com/office/drawing/2014/main" id="{E26ECC22-B62A-4033-B14D-D847707576CB}"/>
+              </a:ext>
+            </a:extLst>
+          </p:cNvPr>
+          <p:cNvPicPr>
+            <a:picLocks noChangeAspect="1"/>
+          </p:cNvPicPr>
+          <p:nvPr/>
+        </p:nvPicPr>
+        <p:blipFill>
+          <a:blip r:embed="rId3"/>
+          <a:stretch>
+            <a:fillRect/>
+          </a:stretch>
+        </p:blipFill>
+        <p:spPr>
+          <a:xfrm>
+            <a:off x="4656667" y="957262"/>
+            <a:ext cx="7315200" cy="4943475"/>
+          </a:xfrm>
+          <a:prstGeom prst="rect">
+            <a:avLst/>
+          </a:prstGeom>
+        </p:spPr>
+      </p:pic>
+      <p:sp>
+        <p:nvSpPr>
+          <p:cNvPr id="4" name="Retângulo 3">
+            <a:extLst>
+              <a:ext uri="{FF2B5EF4-FFF2-40B4-BE49-F238E27FC236}">
+                <a16:creationId xmlns:a16="http://schemas.microsoft.com/office/drawing/2014/main" id="{B263182A-3439-43F5-B5FE-2BCC527E79C1}"/>
+              </a:ext>
+            </a:extLst>
+          </p:cNvPr>
+          <p:cNvSpPr/>
+          <p:nvPr/>
+        </p:nvSpPr>
+        <p:spPr bwMode="auto">
+          <a:xfrm>
+            <a:off x="369078" y="4318000"/>
+            <a:ext cx="2365655" cy="1162350"/>
+          </a:xfrm>
+          <a:prstGeom prst="rect">
+            <a:avLst/>
+          </a:prstGeom>
+          <a:noFill/>
+          <a:ln w="38100">
+            <a:solidFill>
+              <a:srgbClr val="FF0000"/>
+            </a:solidFill>
+            <a:headEnd type="none" w="med" len="med"/>
+            <a:tailEnd type="triangle" w="med" len="med"/>
+          </a:ln>
+        </p:spPr>
+        <p:style>
+          <a:lnRef idx="1">
+            <a:schemeClr val="accent3"/>
+          </a:lnRef>
+          <a:fillRef idx="2">
+            <a:schemeClr val="accent3"/>
+          </a:fillRef>
+          <a:effectRef idx="1">
+            <a:schemeClr val="accent3"/>
+          </a:effectRef>
+          <a:fontRef idx="minor">
+            <a:schemeClr val="dk1"/>
+          </a:fontRef>
+        </p:style>
+        <p:txBody>
+          <a:bodyPr vert="horz" wrap="square" lIns="90000" tIns="46800" rIns="90000" bIns="46800" numCol="1" rtlCol="0" anchor="ctr" anchorCtr="0" compatLnSpc="1">
+            <a:prstTxWarp prst="textNoShape">
+              <a:avLst/>
+            </a:prstTxWarp>
+          </a:bodyPr>
+          <a:lstStyle/>
+          <a:p>
+            <a:pPr algn="ctr"/>
+            <a:endParaRPr lang="pt-BR" sz="2000" dirty="0">
+              <a:solidFill>
+                <a:schemeClr val="tx1"/>
+              </a:solidFill>
+              <a:latin typeface="Arial" charset="0"/>
+            </a:endParaRPr>
+          </a:p>
+        </p:txBody>
+      </p:sp>
+      <p:cxnSp>
+        <p:nvCxnSpPr>
+          <p:cNvPr id="6" name="Conector de Seta Reta 5">
+            <a:extLst>
+              <a:ext uri="{FF2B5EF4-FFF2-40B4-BE49-F238E27FC236}">
+                <a16:creationId xmlns:a16="http://schemas.microsoft.com/office/drawing/2014/main" id="{6B257F01-2CCF-4D83-A188-D3D44BC6E842}"/>
+              </a:ext>
+            </a:extLst>
+          </p:cNvPr>
+          <p:cNvCxnSpPr/>
+          <p:nvPr/>
+        </p:nvCxnSpPr>
+        <p:spPr bwMode="auto">
+          <a:xfrm flipV="1">
+            <a:off x="2734733" y="2429933"/>
+            <a:ext cx="6434667" cy="2607734"/>
+          </a:xfrm>
+          <a:prstGeom prst="straightConnector1">
+            <a:avLst/>
+          </a:prstGeom>
+          <a:solidFill>
+            <a:schemeClr val="accent1"/>
+          </a:solidFill>
+          <a:ln w="38100" cap="flat" cmpd="sng" algn="ctr">
+            <a:solidFill>
+              <a:srgbClr val="FF0000"/>
+            </a:solidFill>
+            <a:prstDash val="solid"/>
+            <a:round/>
+            <a:headEnd type="none" w="med" len="med"/>
+            <a:tailEnd type="triangle"/>
+          </a:ln>
+          <a:effectLst/>
+        </p:spPr>
+      </p:cxnSp>
+    </p:spTree>
+    <p:extLst>
+      <p:ext uri="{BB962C8B-B14F-4D97-AF65-F5344CB8AC3E}">
+        <p14:creationId xmlns:p14="http://schemas.microsoft.com/office/powerpoint/2010/main" val="3421812649"/>
+      </p:ext>
+    </p:extLst>
+  </p:cSld>
+  <p:clrMapOvr>
+    <a:masterClrMapping/>
+  </p:clrMapOvr>
+</p:sld>
+</file>
+
+<file path=ppt/slides/slide112.xml><?xml version="1.0" encoding="utf-8"?>
+<p:sld xmlns:a="http://schemas.openxmlformats.org/drawingml/2006/main" xmlns:r="http://schemas.openxmlformats.org/officeDocument/2006/relationships" xmlns:p="http://schemas.openxmlformats.org/presentationml/2006/main">
+  <p:cSld>
+    <p:spTree>
+      <p:nvGrpSpPr>
+        <p:cNvPr id="1" name=""/>
+        <p:cNvGrpSpPr/>
+        <p:nvPr/>
+      </p:nvGrpSpPr>
+      <p:grpSpPr>
+        <a:xfrm>
+          <a:off x="0" y="0"/>
+          <a:ext cx="0" cy="0"/>
+          <a:chOff x="0" y="0"/>
+          <a:chExt cx="0" cy="0"/>
+        </a:xfrm>
+      </p:grpSpPr>
+      <p:sp>
+        <p:nvSpPr>
+          <p:cNvPr id="2" name="Título 1">
+            <a:extLst>
+              <a:ext uri="{FF2B5EF4-FFF2-40B4-BE49-F238E27FC236}">
+                <a16:creationId xmlns:a16="http://schemas.microsoft.com/office/drawing/2014/main" id="{E1663718-E4B1-4A05-A6F6-F269296E9F4E}"/>
+              </a:ext>
+            </a:extLst>
+          </p:cNvPr>
+          <p:cNvSpPr>
+            <a:spLocks noGrp="1"/>
+          </p:cNvSpPr>
+          <p:nvPr>
+            <p:ph type="ctrTitle"/>
+          </p:nvPr>
+        </p:nvSpPr>
+        <p:spPr/>
+        <p:txBody>
+          <a:bodyPr/>
+          <a:lstStyle/>
+          <a:p>
+            <a:r>
+              <a:rPr lang="pt-BR" dirty="0"/>
+              <a:t>Fim da aula </a:t>
+            </a:r>
+            <a:r>
+              <a:rPr lang="pt-BR"/>
+              <a:t>para turma A em 29/10</a:t>
+            </a:r>
+          </a:p>
+        </p:txBody>
+      </p:sp>
+      <p:sp>
+        <p:nvSpPr>
+          <p:cNvPr id="3" name="Subtítulo 2">
+            <a:extLst>
+              <a:ext uri="{FF2B5EF4-FFF2-40B4-BE49-F238E27FC236}">
+                <a16:creationId xmlns:a16="http://schemas.microsoft.com/office/drawing/2014/main" id="{30869682-08F5-45AB-B829-1CD868070BC5}"/>
+              </a:ext>
+            </a:extLst>
+          </p:cNvPr>
+          <p:cNvSpPr>
+            <a:spLocks noGrp="1"/>
+          </p:cNvSpPr>
+          <p:nvPr>
+            <p:ph type="subTitle" idx="1"/>
+          </p:nvPr>
+        </p:nvSpPr>
+        <p:spPr/>
+        <p:txBody>
+          <a:bodyPr/>
+          <a:lstStyle/>
+          <a:p>
+            <a:endParaRPr lang="pt-BR"/>
+          </a:p>
+        </p:txBody>
+      </p:sp>
+    </p:spTree>
+    <p:extLst>
+      <p:ext uri="{BB962C8B-B14F-4D97-AF65-F5344CB8AC3E}">
+        <p14:creationId xmlns:p14="http://schemas.microsoft.com/office/powerpoint/2010/main" val="5546742"/>
       </p:ext>
     </p:extLst>
   </p:cSld>
@@ -19516,10 +21073,1417 @@
           <a:chExt cx="0" cy="0"/>
         </a:xfrm>
       </p:grpSpPr>
+      <p:pic>
+        <p:nvPicPr>
+          <p:cNvPr id="2" name="Imagem 1">
+            <a:extLst>
+              <a:ext uri="{FF2B5EF4-FFF2-40B4-BE49-F238E27FC236}">
+                <a16:creationId xmlns:a16="http://schemas.microsoft.com/office/drawing/2014/main" id="{A190F1EB-B818-4148-BD1B-A7EE5CA19B6F}"/>
+              </a:ext>
+            </a:extLst>
+          </p:cNvPr>
+          <p:cNvPicPr>
+            <a:picLocks noChangeAspect="1"/>
+          </p:cNvPicPr>
+          <p:nvPr/>
+        </p:nvPicPr>
+        <p:blipFill>
+          <a:blip r:embed="rId2"/>
+          <a:stretch>
+            <a:fillRect/>
+          </a:stretch>
+        </p:blipFill>
+        <p:spPr>
+          <a:xfrm>
+            <a:off x="381234" y="3039534"/>
+            <a:ext cx="4869886" cy="2345362"/>
+          </a:xfrm>
+          <a:prstGeom prst="rect">
+            <a:avLst/>
+          </a:prstGeom>
+        </p:spPr>
+      </p:pic>
+      <p:pic>
+        <p:nvPicPr>
+          <p:cNvPr id="3" name="Imagem 2">
+            <a:extLst>
+              <a:ext uri="{FF2B5EF4-FFF2-40B4-BE49-F238E27FC236}">
+                <a16:creationId xmlns:a16="http://schemas.microsoft.com/office/drawing/2014/main" id="{052177DF-0EA3-4BAF-8499-B1E8968B8156}"/>
+              </a:ext>
+            </a:extLst>
+          </p:cNvPr>
+          <p:cNvPicPr>
+            <a:picLocks noChangeAspect="1"/>
+          </p:cNvPicPr>
+          <p:nvPr/>
+        </p:nvPicPr>
+        <p:blipFill>
+          <a:blip r:embed="rId3"/>
+          <a:stretch>
+            <a:fillRect/>
+          </a:stretch>
+        </p:blipFill>
+        <p:spPr>
+          <a:xfrm>
+            <a:off x="6593180" y="3072107"/>
+            <a:ext cx="4658151" cy="2312789"/>
+          </a:xfrm>
+          <a:prstGeom prst="rect">
+            <a:avLst/>
+          </a:prstGeom>
+        </p:spPr>
+      </p:pic>
+      <p:pic>
+        <p:nvPicPr>
+          <p:cNvPr id="4" name="Imagem 3">
+            <a:extLst>
+              <a:ext uri="{FF2B5EF4-FFF2-40B4-BE49-F238E27FC236}">
+                <a16:creationId xmlns:a16="http://schemas.microsoft.com/office/drawing/2014/main" id="{43F48E45-A2D8-4172-8F83-B831217FCE4A}"/>
+              </a:ext>
+            </a:extLst>
+          </p:cNvPr>
+          <p:cNvPicPr>
+            <a:picLocks noChangeAspect="1"/>
+          </p:cNvPicPr>
+          <p:nvPr/>
+        </p:nvPicPr>
+        <p:blipFill rotWithShape="1">
+          <a:blip r:embed="rId4"/>
+          <a:srcRect l="7717" t="15233" r="23563" b="52134"/>
+          <a:stretch/>
+        </p:blipFill>
+        <p:spPr>
+          <a:xfrm>
+            <a:off x="1811866" y="287867"/>
+            <a:ext cx="7526867" cy="1811867"/>
+          </a:xfrm>
+          <a:prstGeom prst="rect">
+            <a:avLst/>
+          </a:prstGeom>
+        </p:spPr>
+      </p:pic>
+      <p:cxnSp>
+        <p:nvCxnSpPr>
+          <p:cNvPr id="6" name="Conector de Seta Reta 5">
+            <a:extLst>
+              <a:ext uri="{FF2B5EF4-FFF2-40B4-BE49-F238E27FC236}">
+                <a16:creationId xmlns:a16="http://schemas.microsoft.com/office/drawing/2014/main" id="{9C8AC28D-794E-4E01-9BE0-6A0F8F570E9A}"/>
+              </a:ext>
+            </a:extLst>
+          </p:cNvPr>
+          <p:cNvCxnSpPr/>
+          <p:nvPr/>
+        </p:nvCxnSpPr>
+        <p:spPr bwMode="auto">
+          <a:xfrm flipH="1">
+            <a:off x="1921933" y="1193800"/>
+            <a:ext cx="3048000" cy="2150533"/>
+          </a:xfrm>
+          <a:prstGeom prst="straightConnector1">
+            <a:avLst/>
+          </a:prstGeom>
+          <a:solidFill>
+            <a:schemeClr val="accent1"/>
+          </a:solidFill>
+          <a:ln w="38100" cap="flat" cmpd="sng" algn="ctr">
+            <a:solidFill>
+              <a:srgbClr val="FF0000"/>
+            </a:solidFill>
+            <a:prstDash val="solid"/>
+            <a:round/>
+            <a:headEnd type="none" w="med" len="med"/>
+            <a:tailEnd type="triangle"/>
+          </a:ln>
+          <a:effectLst/>
+        </p:spPr>
+      </p:cxnSp>
+      <p:cxnSp>
+        <p:nvCxnSpPr>
+          <p:cNvPr id="8" name="Conector de Seta Reta 7">
+            <a:extLst>
+              <a:ext uri="{FF2B5EF4-FFF2-40B4-BE49-F238E27FC236}">
+                <a16:creationId xmlns:a16="http://schemas.microsoft.com/office/drawing/2014/main" id="{B83FAB86-8BEC-441F-B1CB-F6C2D8094D5F}"/>
+              </a:ext>
+            </a:extLst>
+          </p:cNvPr>
+          <p:cNvCxnSpPr/>
+          <p:nvPr/>
+        </p:nvCxnSpPr>
+        <p:spPr bwMode="auto">
+          <a:xfrm>
+            <a:off x="6290733" y="1109133"/>
+            <a:ext cx="931334" cy="1962974"/>
+          </a:xfrm>
+          <a:prstGeom prst="straightConnector1">
+            <a:avLst/>
+          </a:prstGeom>
+          <a:solidFill>
+            <a:schemeClr val="accent1"/>
+          </a:solidFill>
+          <a:ln w="38100" cap="flat" cmpd="sng" algn="ctr">
+            <a:solidFill>
+              <a:srgbClr val="FF0000"/>
+            </a:solidFill>
+            <a:prstDash val="solid"/>
+            <a:round/>
+            <a:headEnd type="none" w="med" len="med"/>
+            <a:tailEnd type="triangle"/>
+          </a:ln>
+          <a:effectLst/>
+        </p:spPr>
+      </p:cxnSp>
+    </p:spTree>
+    <p:extLst>
+      <p:ext uri="{BB962C8B-B14F-4D97-AF65-F5344CB8AC3E}">
+        <p14:creationId xmlns:p14="http://schemas.microsoft.com/office/powerpoint/2010/main" val="29822108"/>
+      </p:ext>
+    </p:extLst>
+  </p:cSld>
+  <p:clrMapOvr>
+    <a:masterClrMapping/>
+  </p:clrMapOvr>
+</p:sld>
+</file>
+
+<file path=ppt/slides/slide93.xml><?xml version="1.0" encoding="utf-8"?>
+<p:sld xmlns:a="http://schemas.openxmlformats.org/drawingml/2006/main" xmlns:r="http://schemas.openxmlformats.org/officeDocument/2006/relationships" xmlns:p="http://schemas.openxmlformats.org/presentationml/2006/main">
+  <p:cSld>
+    <p:spTree>
+      <p:nvGrpSpPr>
+        <p:cNvPr id="1" name=""/>
+        <p:cNvGrpSpPr/>
+        <p:nvPr/>
+      </p:nvGrpSpPr>
+      <p:grpSpPr>
+        <a:xfrm>
+          <a:off x="0" y="0"/>
+          <a:ext cx="0" cy="0"/>
+          <a:chOff x="0" y="0"/>
+          <a:chExt cx="0" cy="0"/>
+        </a:xfrm>
+      </p:grpSpPr>
+      <p:pic>
+        <p:nvPicPr>
+          <p:cNvPr id="2" name="Imagem 1">
+            <a:extLst>
+              <a:ext uri="{FF2B5EF4-FFF2-40B4-BE49-F238E27FC236}">
+                <a16:creationId xmlns:a16="http://schemas.microsoft.com/office/drawing/2014/main" id="{998E99B0-2431-42C0-8616-1AA371D91EAC}"/>
+              </a:ext>
+            </a:extLst>
+          </p:cNvPr>
+          <p:cNvPicPr>
+            <a:picLocks noChangeAspect="1"/>
+          </p:cNvPicPr>
+          <p:nvPr/>
+        </p:nvPicPr>
+        <p:blipFill>
+          <a:blip r:embed="rId2"/>
+          <a:stretch>
+            <a:fillRect/>
+          </a:stretch>
+        </p:blipFill>
+        <p:spPr>
+          <a:xfrm>
+            <a:off x="2176056" y="705750"/>
+            <a:ext cx="7839888" cy="5446499"/>
+          </a:xfrm>
+          <a:prstGeom prst="rect">
+            <a:avLst/>
+          </a:prstGeom>
+        </p:spPr>
+      </p:pic>
     </p:spTree>
     <p:extLst>
       <p:ext uri="{BB962C8B-B14F-4D97-AF65-F5344CB8AC3E}">
         <p14:creationId xmlns:p14="http://schemas.microsoft.com/office/powerpoint/2010/main" val="2304983919"/>
+      </p:ext>
+    </p:extLst>
+  </p:cSld>
+  <p:clrMapOvr>
+    <a:masterClrMapping/>
+  </p:clrMapOvr>
+</p:sld>
+</file>
+
+<file path=ppt/slides/slide94.xml><?xml version="1.0" encoding="utf-8"?>
+<p:sld xmlns:a="http://schemas.openxmlformats.org/drawingml/2006/main" xmlns:r="http://schemas.openxmlformats.org/officeDocument/2006/relationships" xmlns:p="http://schemas.openxmlformats.org/presentationml/2006/main">
+  <p:cSld>
+    <p:spTree>
+      <p:nvGrpSpPr>
+        <p:cNvPr id="1" name=""/>
+        <p:cNvGrpSpPr/>
+        <p:nvPr/>
+      </p:nvGrpSpPr>
+      <p:grpSpPr>
+        <a:xfrm>
+          <a:off x="0" y="0"/>
+          <a:ext cx="0" cy="0"/>
+          <a:chOff x="0" y="0"/>
+          <a:chExt cx="0" cy="0"/>
+        </a:xfrm>
+      </p:grpSpPr>
+      <p:pic>
+        <p:nvPicPr>
+          <p:cNvPr id="2" name="Imagem 1">
+            <a:extLst>
+              <a:ext uri="{FF2B5EF4-FFF2-40B4-BE49-F238E27FC236}">
+                <a16:creationId xmlns:a16="http://schemas.microsoft.com/office/drawing/2014/main" id="{26957EB0-45D2-4525-9EBC-37B7580731AA}"/>
+              </a:ext>
+            </a:extLst>
+          </p:cNvPr>
+          <p:cNvPicPr>
+            <a:picLocks noChangeAspect="1"/>
+          </p:cNvPicPr>
+          <p:nvPr/>
+        </p:nvPicPr>
+        <p:blipFill>
+          <a:blip r:embed="rId2"/>
+          <a:stretch>
+            <a:fillRect/>
+          </a:stretch>
+        </p:blipFill>
+        <p:spPr>
+          <a:xfrm>
+            <a:off x="607235" y="443159"/>
+            <a:ext cx="4921498" cy="5635908"/>
+          </a:xfrm>
+          <a:prstGeom prst="rect">
+            <a:avLst/>
+          </a:prstGeom>
+        </p:spPr>
+      </p:pic>
+      <p:sp>
+        <p:nvSpPr>
+          <p:cNvPr id="3" name="Retângulo 2">
+            <a:extLst>
+              <a:ext uri="{FF2B5EF4-FFF2-40B4-BE49-F238E27FC236}">
+                <a16:creationId xmlns:a16="http://schemas.microsoft.com/office/drawing/2014/main" id="{E2EA8DB0-BFB2-422A-9CA1-CD997D411D97}"/>
+              </a:ext>
+            </a:extLst>
+          </p:cNvPr>
+          <p:cNvSpPr/>
+          <p:nvPr/>
+        </p:nvSpPr>
+        <p:spPr bwMode="auto">
+          <a:xfrm>
+            <a:off x="1210733" y="4521200"/>
+            <a:ext cx="3175000" cy="1151467"/>
+          </a:xfrm>
+          <a:prstGeom prst="rect">
+            <a:avLst/>
+          </a:prstGeom>
+          <a:noFill/>
+          <a:ln w="38100">
+            <a:solidFill>
+              <a:srgbClr val="FF0000"/>
+            </a:solidFill>
+            <a:headEnd type="none" w="med" len="med"/>
+            <a:tailEnd type="triangle" w="med" len="med"/>
+          </a:ln>
+        </p:spPr>
+        <p:style>
+          <a:lnRef idx="1">
+            <a:schemeClr val="accent3"/>
+          </a:lnRef>
+          <a:fillRef idx="2">
+            <a:schemeClr val="accent3"/>
+          </a:fillRef>
+          <a:effectRef idx="1">
+            <a:schemeClr val="accent3"/>
+          </a:effectRef>
+          <a:fontRef idx="minor">
+            <a:schemeClr val="dk1"/>
+          </a:fontRef>
+        </p:style>
+        <p:txBody>
+          <a:bodyPr vert="horz" wrap="square" lIns="90000" tIns="46800" rIns="90000" bIns="46800" numCol="1" rtlCol="0" anchor="ctr" anchorCtr="0" compatLnSpc="1">
+            <a:prstTxWarp prst="textNoShape">
+              <a:avLst/>
+            </a:prstTxWarp>
+          </a:bodyPr>
+          <a:lstStyle/>
+          <a:p>
+            <a:pPr algn="ctr"/>
+            <a:endParaRPr lang="pt-BR" sz="2000" dirty="0">
+              <a:solidFill>
+                <a:schemeClr val="tx1"/>
+              </a:solidFill>
+              <a:latin typeface="Arial" charset="0"/>
+            </a:endParaRPr>
+          </a:p>
+        </p:txBody>
+      </p:sp>
+      <p:pic>
+        <p:nvPicPr>
+          <p:cNvPr id="4" name="Imagem 3">
+            <a:extLst>
+              <a:ext uri="{FF2B5EF4-FFF2-40B4-BE49-F238E27FC236}">
+                <a16:creationId xmlns:a16="http://schemas.microsoft.com/office/drawing/2014/main" id="{2D58A474-D720-4841-8519-BD662681D302}"/>
+              </a:ext>
+            </a:extLst>
+          </p:cNvPr>
+          <p:cNvPicPr>
+            <a:picLocks noChangeAspect="1"/>
+          </p:cNvPicPr>
+          <p:nvPr/>
+        </p:nvPicPr>
+        <p:blipFill>
+          <a:blip r:embed="rId3"/>
+          <a:stretch>
+            <a:fillRect/>
+          </a:stretch>
+        </p:blipFill>
+        <p:spPr>
+          <a:xfrm>
+            <a:off x="7583781" y="1027553"/>
+            <a:ext cx="3843633" cy="1851113"/>
+          </a:xfrm>
+          <a:prstGeom prst="rect">
+            <a:avLst/>
+          </a:prstGeom>
+          <a:ln w="38100">
+            <a:solidFill>
+              <a:srgbClr val="FF0000"/>
+            </a:solidFill>
+          </a:ln>
+        </p:spPr>
+      </p:pic>
+      <p:pic>
+        <p:nvPicPr>
+          <p:cNvPr id="5" name="Imagem 4">
+            <a:extLst>
+              <a:ext uri="{FF2B5EF4-FFF2-40B4-BE49-F238E27FC236}">
+                <a16:creationId xmlns:a16="http://schemas.microsoft.com/office/drawing/2014/main" id="{724904EE-907D-4036-9EA4-94F9A2F3BBF4}"/>
+              </a:ext>
+            </a:extLst>
+          </p:cNvPr>
+          <p:cNvPicPr>
+            <a:picLocks noChangeAspect="1"/>
+          </p:cNvPicPr>
+          <p:nvPr/>
+        </p:nvPicPr>
+        <p:blipFill>
+          <a:blip r:embed="rId4"/>
+          <a:stretch>
+            <a:fillRect/>
+          </a:stretch>
+        </p:blipFill>
+        <p:spPr>
+          <a:xfrm>
+            <a:off x="7583781" y="3847262"/>
+            <a:ext cx="3676518" cy="1825405"/>
+          </a:xfrm>
+          <a:prstGeom prst="rect">
+            <a:avLst/>
+          </a:prstGeom>
+          <a:ln w="38100">
+            <a:solidFill>
+              <a:srgbClr val="FF0000"/>
+            </a:solidFill>
+          </a:ln>
+        </p:spPr>
+      </p:pic>
+      <p:cxnSp>
+        <p:nvCxnSpPr>
+          <p:cNvPr id="7" name="Conector de Seta Reta 6">
+            <a:extLst>
+              <a:ext uri="{FF2B5EF4-FFF2-40B4-BE49-F238E27FC236}">
+                <a16:creationId xmlns:a16="http://schemas.microsoft.com/office/drawing/2014/main" id="{2EA692B0-8546-4899-821C-6A41D6A50BD9}"/>
+              </a:ext>
+            </a:extLst>
+          </p:cNvPr>
+          <p:cNvCxnSpPr>
+            <a:stCxn id="4" idx="1"/>
+          </p:cNvCxnSpPr>
+          <p:nvPr/>
+        </p:nvCxnSpPr>
+        <p:spPr bwMode="auto">
+          <a:xfrm flipH="1">
+            <a:off x="4461933" y="1953110"/>
+            <a:ext cx="3121848" cy="2788223"/>
+          </a:xfrm>
+          <a:prstGeom prst="straightConnector1">
+            <a:avLst/>
+          </a:prstGeom>
+          <a:solidFill>
+            <a:schemeClr val="accent1"/>
+          </a:solidFill>
+          <a:ln w="38100" cap="flat" cmpd="sng" algn="ctr">
+            <a:solidFill>
+              <a:srgbClr val="FF0000"/>
+            </a:solidFill>
+            <a:prstDash val="solid"/>
+            <a:round/>
+            <a:headEnd type="none" w="med" len="med"/>
+            <a:tailEnd type="triangle"/>
+          </a:ln>
+          <a:effectLst/>
+        </p:spPr>
+      </p:cxnSp>
+      <p:cxnSp>
+        <p:nvCxnSpPr>
+          <p:cNvPr id="9" name="Conector de Seta Reta 8">
+            <a:extLst>
+              <a:ext uri="{FF2B5EF4-FFF2-40B4-BE49-F238E27FC236}">
+                <a16:creationId xmlns:a16="http://schemas.microsoft.com/office/drawing/2014/main" id="{6DDBF2ED-AD4D-41E0-9F2A-28C61BCC0300}"/>
+              </a:ext>
+            </a:extLst>
+          </p:cNvPr>
+          <p:cNvCxnSpPr>
+            <a:stCxn id="5" idx="1"/>
+          </p:cNvCxnSpPr>
+          <p:nvPr/>
+        </p:nvCxnSpPr>
+        <p:spPr bwMode="auto">
+          <a:xfrm flipH="1">
+            <a:off x="4539309" y="4759965"/>
+            <a:ext cx="3044472" cy="150702"/>
+          </a:xfrm>
+          <a:prstGeom prst="straightConnector1">
+            <a:avLst/>
+          </a:prstGeom>
+          <a:solidFill>
+            <a:schemeClr val="accent1"/>
+          </a:solidFill>
+          <a:ln w="38100" cap="flat" cmpd="sng" algn="ctr">
+            <a:solidFill>
+              <a:srgbClr val="FF0000"/>
+            </a:solidFill>
+            <a:prstDash val="solid"/>
+            <a:round/>
+            <a:headEnd type="none" w="med" len="med"/>
+            <a:tailEnd type="triangle"/>
+          </a:ln>
+          <a:effectLst/>
+        </p:spPr>
+      </p:cxnSp>
+    </p:spTree>
+    <p:extLst>
+      <p:ext uri="{BB962C8B-B14F-4D97-AF65-F5344CB8AC3E}">
+        <p14:creationId xmlns:p14="http://schemas.microsoft.com/office/powerpoint/2010/main" val="4103508017"/>
+      </p:ext>
+    </p:extLst>
+  </p:cSld>
+  <p:clrMapOvr>
+    <a:masterClrMapping/>
+  </p:clrMapOvr>
+</p:sld>
+</file>
+
+<file path=ppt/slides/slide95.xml><?xml version="1.0" encoding="utf-8"?>
+<p:sld xmlns:a="http://schemas.openxmlformats.org/drawingml/2006/main" xmlns:r="http://schemas.openxmlformats.org/officeDocument/2006/relationships" xmlns:p="http://schemas.openxmlformats.org/presentationml/2006/main">
+  <p:cSld>
+    <p:spTree>
+      <p:nvGrpSpPr>
+        <p:cNvPr id="1" name=""/>
+        <p:cNvGrpSpPr/>
+        <p:nvPr/>
+      </p:nvGrpSpPr>
+      <p:grpSpPr>
+        <a:xfrm>
+          <a:off x="0" y="0"/>
+          <a:ext cx="0" cy="0"/>
+          <a:chOff x="0" y="0"/>
+          <a:chExt cx="0" cy="0"/>
+        </a:xfrm>
+      </p:grpSpPr>
+      <p:pic>
+        <p:nvPicPr>
+          <p:cNvPr id="2" name="Imagem 1">
+            <a:extLst>
+              <a:ext uri="{FF2B5EF4-FFF2-40B4-BE49-F238E27FC236}">
+                <a16:creationId xmlns:a16="http://schemas.microsoft.com/office/drawing/2014/main" id="{7469DFEF-DEB3-45B7-99CD-7C9C1460EDC7}"/>
+              </a:ext>
+            </a:extLst>
+          </p:cNvPr>
+          <p:cNvPicPr>
+            <a:picLocks noChangeAspect="1"/>
+          </p:cNvPicPr>
+          <p:nvPr/>
+        </p:nvPicPr>
+        <p:blipFill>
+          <a:blip r:embed="rId2"/>
+          <a:stretch>
+            <a:fillRect/>
+          </a:stretch>
+        </p:blipFill>
+        <p:spPr>
+          <a:xfrm>
+            <a:off x="1670304" y="438197"/>
+            <a:ext cx="8851392" cy="5981605"/>
+          </a:xfrm>
+          <a:prstGeom prst="rect">
+            <a:avLst/>
+          </a:prstGeom>
+        </p:spPr>
+      </p:pic>
+      <p:pic>
+        <p:nvPicPr>
+          <p:cNvPr id="3" name="Imagem 2">
+            <a:extLst>
+              <a:ext uri="{FF2B5EF4-FFF2-40B4-BE49-F238E27FC236}">
+                <a16:creationId xmlns:a16="http://schemas.microsoft.com/office/drawing/2014/main" id="{16902F5F-93FF-4439-83B5-1ECB13FC56EE}"/>
+              </a:ext>
+            </a:extLst>
+          </p:cNvPr>
+          <p:cNvPicPr>
+            <a:picLocks noChangeAspect="1"/>
+          </p:cNvPicPr>
+          <p:nvPr/>
+        </p:nvPicPr>
+        <p:blipFill>
+          <a:blip r:embed="rId3"/>
+          <a:stretch>
+            <a:fillRect/>
+          </a:stretch>
+        </p:blipFill>
+        <p:spPr>
+          <a:xfrm>
+            <a:off x="4632116" y="2532337"/>
+            <a:ext cx="2927767" cy="3064129"/>
+          </a:xfrm>
+          <a:prstGeom prst="rect">
+            <a:avLst/>
+          </a:prstGeom>
+        </p:spPr>
+      </p:pic>
+      <p:sp>
+        <p:nvSpPr>
+          <p:cNvPr id="4" name="Retângulo 3">
+            <a:extLst>
+              <a:ext uri="{FF2B5EF4-FFF2-40B4-BE49-F238E27FC236}">
+                <a16:creationId xmlns:a16="http://schemas.microsoft.com/office/drawing/2014/main" id="{12B75AFD-6D3E-4B61-8675-10B927DD62BA}"/>
+              </a:ext>
+            </a:extLst>
+          </p:cNvPr>
+          <p:cNvSpPr/>
+          <p:nvPr/>
+        </p:nvSpPr>
+        <p:spPr bwMode="auto">
+          <a:xfrm>
+            <a:off x="4986867" y="4563533"/>
+            <a:ext cx="2167466" cy="821267"/>
+          </a:xfrm>
+          <a:prstGeom prst="rect">
+            <a:avLst/>
+          </a:prstGeom>
+          <a:noFill/>
+          <a:ln w="38100">
+            <a:solidFill>
+              <a:srgbClr val="FF0000"/>
+            </a:solidFill>
+            <a:headEnd type="none" w="med" len="med"/>
+            <a:tailEnd type="triangle" w="med" len="med"/>
+          </a:ln>
+        </p:spPr>
+        <p:style>
+          <a:lnRef idx="1">
+            <a:schemeClr val="accent3"/>
+          </a:lnRef>
+          <a:fillRef idx="2">
+            <a:schemeClr val="accent3"/>
+          </a:fillRef>
+          <a:effectRef idx="1">
+            <a:schemeClr val="accent3"/>
+          </a:effectRef>
+          <a:fontRef idx="minor">
+            <a:schemeClr val="dk1"/>
+          </a:fontRef>
+        </p:style>
+        <p:txBody>
+          <a:bodyPr vert="horz" wrap="square" lIns="90000" tIns="46800" rIns="90000" bIns="46800" numCol="1" rtlCol="0" anchor="ctr" anchorCtr="0" compatLnSpc="1">
+            <a:prstTxWarp prst="textNoShape">
+              <a:avLst/>
+            </a:prstTxWarp>
+          </a:bodyPr>
+          <a:lstStyle/>
+          <a:p>
+            <a:pPr algn="ctr"/>
+            <a:endParaRPr lang="pt-BR" sz="2000" dirty="0">
+              <a:solidFill>
+                <a:schemeClr val="tx1"/>
+              </a:solidFill>
+              <a:latin typeface="Arial" charset="0"/>
+            </a:endParaRPr>
+          </a:p>
+        </p:txBody>
+      </p:sp>
+      <p:cxnSp>
+        <p:nvCxnSpPr>
+          <p:cNvPr id="6" name="Conector de Seta Reta 5">
+            <a:extLst>
+              <a:ext uri="{FF2B5EF4-FFF2-40B4-BE49-F238E27FC236}">
+                <a16:creationId xmlns:a16="http://schemas.microsoft.com/office/drawing/2014/main" id="{B6569E27-EF74-4A3F-B170-175693D1EE81}"/>
+              </a:ext>
+            </a:extLst>
+          </p:cNvPr>
+          <p:cNvCxnSpPr/>
+          <p:nvPr/>
+        </p:nvCxnSpPr>
+        <p:spPr bwMode="auto">
+          <a:xfrm flipH="1" flipV="1">
+            <a:off x="2768600" y="2091267"/>
+            <a:ext cx="1812717" cy="1930400"/>
+          </a:xfrm>
+          <a:prstGeom prst="straightConnector1">
+            <a:avLst/>
+          </a:prstGeom>
+          <a:solidFill>
+            <a:schemeClr val="accent1"/>
+          </a:solidFill>
+          <a:ln w="38100" cap="flat" cmpd="sng" algn="ctr">
+            <a:solidFill>
+              <a:srgbClr val="FF0000"/>
+            </a:solidFill>
+            <a:prstDash val="solid"/>
+            <a:round/>
+            <a:headEnd type="none" w="med" len="med"/>
+            <a:tailEnd type="triangle"/>
+          </a:ln>
+          <a:effectLst/>
+        </p:spPr>
+      </p:cxnSp>
+      <p:cxnSp>
+        <p:nvCxnSpPr>
+          <p:cNvPr id="8" name="Conector de Seta Reta 7">
+            <a:extLst>
+              <a:ext uri="{FF2B5EF4-FFF2-40B4-BE49-F238E27FC236}">
+                <a16:creationId xmlns:a16="http://schemas.microsoft.com/office/drawing/2014/main" id="{575FA333-7AA0-4A7C-8A0C-54DB2F1E04BB}"/>
+              </a:ext>
+            </a:extLst>
+          </p:cNvPr>
+          <p:cNvCxnSpPr/>
+          <p:nvPr/>
+        </p:nvCxnSpPr>
+        <p:spPr bwMode="auto">
+          <a:xfrm flipH="1">
+            <a:off x="2827867" y="4089400"/>
+            <a:ext cx="1753450" cy="1718733"/>
+          </a:xfrm>
+          <a:prstGeom prst="straightConnector1">
+            <a:avLst/>
+          </a:prstGeom>
+          <a:solidFill>
+            <a:schemeClr val="accent1"/>
+          </a:solidFill>
+          <a:ln w="38100" cap="flat" cmpd="sng" algn="ctr">
+            <a:solidFill>
+              <a:srgbClr val="FF0000"/>
+            </a:solidFill>
+            <a:prstDash val="solid"/>
+            <a:round/>
+            <a:headEnd type="none" w="med" len="med"/>
+            <a:tailEnd type="triangle"/>
+          </a:ln>
+          <a:effectLst/>
+        </p:spPr>
+      </p:cxnSp>
+      <p:cxnSp>
+        <p:nvCxnSpPr>
+          <p:cNvPr id="10" name="Conector de Seta Reta 9">
+            <a:extLst>
+              <a:ext uri="{FF2B5EF4-FFF2-40B4-BE49-F238E27FC236}">
+                <a16:creationId xmlns:a16="http://schemas.microsoft.com/office/drawing/2014/main" id="{8A3CDAEE-7232-49FD-A030-2A312BFF6B14}"/>
+              </a:ext>
+            </a:extLst>
+          </p:cNvPr>
+          <p:cNvCxnSpPr>
+            <a:stCxn id="3" idx="3"/>
+          </p:cNvCxnSpPr>
+          <p:nvPr/>
+        </p:nvCxnSpPr>
+        <p:spPr bwMode="auto">
+          <a:xfrm flipV="1">
+            <a:off x="7559883" y="2091267"/>
+            <a:ext cx="1804250" cy="1973135"/>
+          </a:xfrm>
+          <a:prstGeom prst="straightConnector1">
+            <a:avLst/>
+          </a:prstGeom>
+          <a:solidFill>
+            <a:schemeClr val="accent1"/>
+          </a:solidFill>
+          <a:ln w="38100" cap="flat" cmpd="sng" algn="ctr">
+            <a:solidFill>
+              <a:srgbClr val="FF0000"/>
+            </a:solidFill>
+            <a:prstDash val="solid"/>
+            <a:round/>
+            <a:headEnd type="none" w="med" len="med"/>
+            <a:tailEnd type="triangle"/>
+          </a:ln>
+          <a:effectLst/>
+        </p:spPr>
+      </p:cxnSp>
+      <p:cxnSp>
+        <p:nvCxnSpPr>
+          <p:cNvPr id="12" name="Conector de Seta Reta 11">
+            <a:extLst>
+              <a:ext uri="{FF2B5EF4-FFF2-40B4-BE49-F238E27FC236}">
+                <a16:creationId xmlns:a16="http://schemas.microsoft.com/office/drawing/2014/main" id="{C92AE27F-A526-44D2-8691-97E734652ACC}"/>
+              </a:ext>
+            </a:extLst>
+          </p:cNvPr>
+          <p:cNvCxnSpPr/>
+          <p:nvPr/>
+        </p:nvCxnSpPr>
+        <p:spPr bwMode="auto">
+          <a:xfrm>
+            <a:off x="7559883" y="4064402"/>
+            <a:ext cx="1685717" cy="1743731"/>
+          </a:xfrm>
+          <a:prstGeom prst="straightConnector1">
+            <a:avLst/>
+          </a:prstGeom>
+          <a:solidFill>
+            <a:schemeClr val="accent1"/>
+          </a:solidFill>
+          <a:ln w="38100" cap="flat" cmpd="sng" algn="ctr">
+            <a:solidFill>
+              <a:srgbClr val="FF0000"/>
+            </a:solidFill>
+            <a:prstDash val="solid"/>
+            <a:round/>
+            <a:headEnd type="none" w="med" len="med"/>
+            <a:tailEnd type="triangle"/>
+          </a:ln>
+          <a:effectLst/>
+        </p:spPr>
+      </p:cxnSp>
+    </p:spTree>
+    <p:extLst>
+      <p:ext uri="{BB962C8B-B14F-4D97-AF65-F5344CB8AC3E}">
+        <p14:creationId xmlns:p14="http://schemas.microsoft.com/office/powerpoint/2010/main" val="3037098084"/>
+      </p:ext>
+    </p:extLst>
+  </p:cSld>
+  <p:clrMapOvr>
+    <a:masterClrMapping/>
+  </p:clrMapOvr>
+</p:sld>
+</file>
+
+<file path=ppt/slides/slide96.xml><?xml version="1.0" encoding="utf-8"?>
+<p:sld xmlns:a="http://schemas.openxmlformats.org/drawingml/2006/main" xmlns:r="http://schemas.openxmlformats.org/officeDocument/2006/relationships" xmlns:p="http://schemas.openxmlformats.org/presentationml/2006/main">
+  <p:cSld>
+    <p:spTree>
+      <p:nvGrpSpPr>
+        <p:cNvPr id="1" name=""/>
+        <p:cNvGrpSpPr/>
+        <p:nvPr/>
+      </p:nvGrpSpPr>
+      <p:grpSpPr>
+        <a:xfrm>
+          <a:off x="0" y="0"/>
+          <a:ext cx="0" cy="0"/>
+          <a:chOff x="0" y="0"/>
+          <a:chExt cx="0" cy="0"/>
+        </a:xfrm>
+      </p:grpSpPr>
+      <p:sp>
+        <p:nvSpPr>
+          <p:cNvPr id="2" name="Subtítulo 1">
+            <a:extLst>
+              <a:ext uri="{FF2B5EF4-FFF2-40B4-BE49-F238E27FC236}">
+                <a16:creationId xmlns:a16="http://schemas.microsoft.com/office/drawing/2014/main" id="{C80592AF-D525-4530-830E-D42F232D1835}"/>
+              </a:ext>
+            </a:extLst>
+          </p:cNvPr>
+          <p:cNvSpPr>
+            <a:spLocks noGrp="1"/>
+          </p:cNvSpPr>
+          <p:nvPr>
+            <p:ph type="subTitle" idx="1"/>
+          </p:nvPr>
+        </p:nvSpPr>
+        <p:spPr/>
+        <p:txBody>
+          <a:bodyPr/>
+          <a:lstStyle/>
+          <a:p>
+            <a:endParaRPr lang="pt-BR"/>
+          </a:p>
+        </p:txBody>
+      </p:sp>
+      <p:sp>
+        <p:nvSpPr>
+          <p:cNvPr id="3" name="Título 2">
+            <a:extLst>
+              <a:ext uri="{FF2B5EF4-FFF2-40B4-BE49-F238E27FC236}">
+                <a16:creationId xmlns:a16="http://schemas.microsoft.com/office/drawing/2014/main" id="{4CD47362-C4AC-4557-9741-9D195C0BDDD8}"/>
+              </a:ext>
+            </a:extLst>
+          </p:cNvPr>
+          <p:cNvSpPr>
+            <a:spLocks noGrp="1"/>
+          </p:cNvSpPr>
+          <p:nvPr>
+            <p:ph type="ctrTitle"/>
+          </p:nvPr>
+        </p:nvSpPr>
+        <p:spPr/>
+        <p:txBody>
+          <a:bodyPr/>
+          <a:lstStyle/>
+          <a:p>
+            <a:r>
+              <a:rPr lang="pt-BR" dirty="0"/>
+              <a:t>Exercício 7</a:t>
+            </a:r>
+          </a:p>
+        </p:txBody>
+      </p:sp>
+    </p:spTree>
+    <p:extLst>
+      <p:ext uri="{BB962C8B-B14F-4D97-AF65-F5344CB8AC3E}">
+        <p14:creationId xmlns:p14="http://schemas.microsoft.com/office/powerpoint/2010/main" val="3899143807"/>
+      </p:ext>
+    </p:extLst>
+  </p:cSld>
+  <p:clrMapOvr>
+    <a:masterClrMapping/>
+  </p:clrMapOvr>
+</p:sld>
+</file>
+
+<file path=ppt/slides/slide97.xml><?xml version="1.0" encoding="utf-8"?>
+<p:sld xmlns:a="http://schemas.openxmlformats.org/drawingml/2006/main" xmlns:r="http://schemas.openxmlformats.org/officeDocument/2006/relationships" xmlns:p="http://schemas.openxmlformats.org/presentationml/2006/main">
+  <p:cSld>
+    <p:spTree>
+      <p:nvGrpSpPr>
+        <p:cNvPr id="1" name=""/>
+        <p:cNvGrpSpPr/>
+        <p:nvPr/>
+      </p:nvGrpSpPr>
+      <p:grpSpPr>
+        <a:xfrm>
+          <a:off x="0" y="0"/>
+          <a:ext cx="0" cy="0"/>
+          <a:chOff x="0" y="0"/>
+          <a:chExt cx="0" cy="0"/>
+        </a:xfrm>
+      </p:grpSpPr>
+      <p:pic>
+        <p:nvPicPr>
+          <p:cNvPr id="4" name="Imagem 3">
+            <a:extLst>
+              <a:ext uri="{FF2B5EF4-FFF2-40B4-BE49-F238E27FC236}">
+                <a16:creationId xmlns:a16="http://schemas.microsoft.com/office/drawing/2014/main" id="{CFAD3055-9EF5-4DB8-90DC-548758E95249}"/>
+              </a:ext>
+            </a:extLst>
+          </p:cNvPr>
+          <p:cNvPicPr>
+            <a:picLocks noChangeAspect="1"/>
+          </p:cNvPicPr>
+          <p:nvPr/>
+        </p:nvPicPr>
+        <p:blipFill>
+          <a:blip r:embed="rId2"/>
+          <a:stretch>
+            <a:fillRect/>
+          </a:stretch>
+        </p:blipFill>
+        <p:spPr>
+          <a:xfrm>
+            <a:off x="803596" y="366957"/>
+            <a:ext cx="4310271" cy="5866375"/>
+          </a:xfrm>
+          <a:prstGeom prst="rect">
+            <a:avLst/>
+          </a:prstGeom>
+        </p:spPr>
+      </p:pic>
+      <p:sp>
+        <p:nvSpPr>
+          <p:cNvPr id="5" name="Seta: para a Esquerda 4">
+            <a:extLst>
+              <a:ext uri="{FF2B5EF4-FFF2-40B4-BE49-F238E27FC236}">
+                <a16:creationId xmlns:a16="http://schemas.microsoft.com/office/drawing/2014/main" id="{A70B799B-9BA2-465A-82DC-753944E70C1F}"/>
+              </a:ext>
+            </a:extLst>
+          </p:cNvPr>
+          <p:cNvSpPr/>
+          <p:nvPr/>
+        </p:nvSpPr>
+        <p:spPr bwMode="auto">
+          <a:xfrm>
+            <a:off x="3378200" y="4842933"/>
+            <a:ext cx="5300133" cy="1651000"/>
+          </a:xfrm>
+          <a:prstGeom prst="leftArrow">
+            <a:avLst/>
+          </a:prstGeom>
+          <a:solidFill>
+            <a:srgbClr val="FFFF00"/>
+          </a:solidFill>
+          <a:ln w="38100">
+            <a:solidFill>
+              <a:srgbClr val="FF0000"/>
+            </a:solidFill>
+            <a:headEnd type="none" w="med" len="med"/>
+            <a:tailEnd type="triangle" w="med" len="med"/>
+          </a:ln>
+        </p:spPr>
+        <p:style>
+          <a:lnRef idx="1">
+            <a:schemeClr val="accent3"/>
+          </a:lnRef>
+          <a:fillRef idx="2">
+            <a:schemeClr val="accent3"/>
+          </a:fillRef>
+          <a:effectRef idx="1">
+            <a:schemeClr val="accent3"/>
+          </a:effectRef>
+          <a:fontRef idx="minor">
+            <a:schemeClr val="dk1"/>
+          </a:fontRef>
+        </p:style>
+        <p:txBody>
+          <a:bodyPr vert="horz" wrap="square" lIns="90000" tIns="46800" rIns="90000" bIns="46800" numCol="1" rtlCol="0" anchor="ctr" anchorCtr="0" compatLnSpc="1">
+            <a:prstTxWarp prst="textNoShape">
+              <a:avLst/>
+            </a:prstTxWarp>
+          </a:bodyPr>
+          <a:lstStyle/>
+          <a:p>
+            <a:pPr algn="ctr"/>
+            <a:r>
+              <a:rPr lang="pt-BR" sz="2000" dirty="0">
+                <a:solidFill>
+                  <a:schemeClr val="tx1"/>
+                </a:solidFill>
+                <a:latin typeface="Arial" charset="0"/>
+              </a:rPr>
+              <a:t>Criar o arquivo </a:t>
+            </a:r>
+            <a:r>
+              <a:rPr lang="pt-BR" sz="2000" b="1" dirty="0">
+                <a:solidFill>
+                  <a:schemeClr val="tx1"/>
+                </a:solidFill>
+                <a:latin typeface="Arial" charset="0"/>
+              </a:rPr>
+              <a:t>exercicio7.html</a:t>
+            </a:r>
+          </a:p>
+        </p:txBody>
+      </p:sp>
+    </p:spTree>
+    <p:extLst>
+      <p:ext uri="{BB962C8B-B14F-4D97-AF65-F5344CB8AC3E}">
+        <p14:creationId xmlns:p14="http://schemas.microsoft.com/office/powerpoint/2010/main" val="3893015119"/>
+      </p:ext>
+    </p:extLst>
+  </p:cSld>
+  <p:clrMapOvr>
+    <a:masterClrMapping/>
+  </p:clrMapOvr>
+</p:sld>
+</file>
+
+<file path=ppt/slides/slide98.xml><?xml version="1.0" encoding="utf-8"?>
+<p:sld xmlns:a="http://schemas.openxmlformats.org/drawingml/2006/main" xmlns:r="http://schemas.openxmlformats.org/officeDocument/2006/relationships" xmlns:p="http://schemas.openxmlformats.org/presentationml/2006/main">
+  <p:cSld>
+    <p:spTree>
+      <p:nvGrpSpPr>
+        <p:cNvPr id="1" name=""/>
+        <p:cNvGrpSpPr/>
+        <p:nvPr/>
+      </p:nvGrpSpPr>
+      <p:grpSpPr>
+        <a:xfrm>
+          <a:off x="0" y="0"/>
+          <a:ext cx="0" cy="0"/>
+          <a:chOff x="0" y="0"/>
+          <a:chExt cx="0" cy="0"/>
+        </a:xfrm>
+      </p:grpSpPr>
+      <p:pic>
+        <p:nvPicPr>
+          <p:cNvPr id="5" name="Imagem 4">
+            <a:extLst>
+              <a:ext uri="{FF2B5EF4-FFF2-40B4-BE49-F238E27FC236}">
+                <a16:creationId xmlns:a16="http://schemas.microsoft.com/office/drawing/2014/main" id="{5E5EF786-0B60-4F21-AD79-9E406A8104BD}"/>
+              </a:ext>
+            </a:extLst>
+          </p:cNvPr>
+          <p:cNvPicPr>
+            <a:picLocks noChangeAspect="1"/>
+          </p:cNvPicPr>
+          <p:nvPr/>
+        </p:nvPicPr>
+        <p:blipFill>
+          <a:blip r:embed="rId2"/>
+          <a:stretch>
+            <a:fillRect/>
+          </a:stretch>
+        </p:blipFill>
+        <p:spPr>
+          <a:xfrm>
+            <a:off x="1670304" y="438197"/>
+            <a:ext cx="8851392" cy="5981605"/>
+          </a:xfrm>
+          <a:prstGeom prst="rect">
+            <a:avLst/>
+          </a:prstGeom>
+        </p:spPr>
+      </p:pic>
+    </p:spTree>
+    <p:extLst>
+      <p:ext uri="{BB962C8B-B14F-4D97-AF65-F5344CB8AC3E}">
+        <p14:creationId xmlns:p14="http://schemas.microsoft.com/office/powerpoint/2010/main" val="1490990573"/>
+      </p:ext>
+    </p:extLst>
+  </p:cSld>
+  <p:clrMapOvr>
+    <a:masterClrMapping/>
+  </p:clrMapOvr>
+</p:sld>
+</file>
+
+<file path=ppt/slides/slide99.xml><?xml version="1.0" encoding="utf-8"?>
+<p:sld xmlns:a="http://schemas.openxmlformats.org/drawingml/2006/main" xmlns:r="http://schemas.openxmlformats.org/officeDocument/2006/relationships" xmlns:p="http://schemas.openxmlformats.org/presentationml/2006/main">
+  <p:cSld>
+    <p:spTree>
+      <p:nvGrpSpPr>
+        <p:cNvPr id="1" name=""/>
+        <p:cNvGrpSpPr/>
+        <p:nvPr/>
+      </p:nvGrpSpPr>
+      <p:grpSpPr>
+        <a:xfrm>
+          <a:off x="0" y="0"/>
+          <a:ext cx="0" cy="0"/>
+          <a:chOff x="0" y="0"/>
+          <a:chExt cx="0" cy="0"/>
+        </a:xfrm>
+      </p:grpSpPr>
+      <p:pic>
+        <p:nvPicPr>
+          <p:cNvPr id="2" name="Imagem 1">
+            <a:extLst>
+              <a:ext uri="{FF2B5EF4-FFF2-40B4-BE49-F238E27FC236}">
+                <a16:creationId xmlns:a16="http://schemas.microsoft.com/office/drawing/2014/main" id="{C4652098-9CE9-4809-8544-D6F3882DE2C0}"/>
+              </a:ext>
+            </a:extLst>
+          </p:cNvPr>
+          <p:cNvPicPr>
+            <a:picLocks noChangeAspect="1"/>
+          </p:cNvPicPr>
+          <p:nvPr/>
+        </p:nvPicPr>
+        <p:blipFill>
+          <a:blip r:embed="rId2"/>
+          <a:stretch>
+            <a:fillRect/>
+          </a:stretch>
+        </p:blipFill>
+        <p:spPr>
+          <a:xfrm>
+            <a:off x="496629" y="311119"/>
+            <a:ext cx="3856154" cy="5327681"/>
+          </a:xfrm>
+          <a:prstGeom prst="rect">
+            <a:avLst/>
+          </a:prstGeom>
+        </p:spPr>
+      </p:pic>
+      <p:pic>
+        <p:nvPicPr>
+          <p:cNvPr id="3" name="Imagem 2">
+            <a:extLst>
+              <a:ext uri="{FF2B5EF4-FFF2-40B4-BE49-F238E27FC236}">
+                <a16:creationId xmlns:a16="http://schemas.microsoft.com/office/drawing/2014/main" id="{AD753619-B3C3-41E4-A5AE-93BE8AB0D8D5}"/>
+              </a:ext>
+            </a:extLst>
+          </p:cNvPr>
+          <p:cNvPicPr>
+            <a:picLocks noChangeAspect="1"/>
+          </p:cNvPicPr>
+          <p:nvPr/>
+        </p:nvPicPr>
+        <p:blipFill>
+          <a:blip r:embed="rId3"/>
+          <a:stretch>
+            <a:fillRect/>
+          </a:stretch>
+        </p:blipFill>
+        <p:spPr>
+          <a:xfrm>
+            <a:off x="4500847" y="865748"/>
+            <a:ext cx="7560897" cy="5698067"/>
+          </a:xfrm>
+          <a:prstGeom prst="rect">
+            <a:avLst/>
+          </a:prstGeom>
+        </p:spPr>
+      </p:pic>
+      <p:sp>
+        <p:nvSpPr>
+          <p:cNvPr id="4" name="Retângulo 3">
+            <a:extLst>
+              <a:ext uri="{FF2B5EF4-FFF2-40B4-BE49-F238E27FC236}">
+                <a16:creationId xmlns:a16="http://schemas.microsoft.com/office/drawing/2014/main" id="{86402347-CFCE-4178-8660-33DE554C03F8}"/>
+              </a:ext>
+            </a:extLst>
+          </p:cNvPr>
+          <p:cNvSpPr/>
+          <p:nvPr/>
+        </p:nvSpPr>
+        <p:spPr bwMode="auto">
+          <a:xfrm>
+            <a:off x="496629" y="4334933"/>
+            <a:ext cx="2297371" cy="1303867"/>
+          </a:xfrm>
+          <a:prstGeom prst="rect">
+            <a:avLst/>
+          </a:prstGeom>
+          <a:noFill/>
+          <a:ln w="38100">
+            <a:solidFill>
+              <a:srgbClr val="FF0000"/>
+            </a:solidFill>
+            <a:headEnd type="none" w="med" len="med"/>
+            <a:tailEnd type="triangle" w="med" len="med"/>
+          </a:ln>
+        </p:spPr>
+        <p:style>
+          <a:lnRef idx="1">
+            <a:schemeClr val="accent3"/>
+          </a:lnRef>
+          <a:fillRef idx="2">
+            <a:schemeClr val="accent3"/>
+          </a:fillRef>
+          <a:effectRef idx="1">
+            <a:schemeClr val="accent3"/>
+          </a:effectRef>
+          <a:fontRef idx="minor">
+            <a:schemeClr val="dk1"/>
+          </a:fontRef>
+        </p:style>
+        <p:txBody>
+          <a:bodyPr vert="horz" wrap="square" lIns="90000" tIns="46800" rIns="90000" bIns="46800" numCol="1" rtlCol="0" anchor="ctr" anchorCtr="0" compatLnSpc="1">
+            <a:prstTxWarp prst="textNoShape">
+              <a:avLst/>
+            </a:prstTxWarp>
+          </a:bodyPr>
+          <a:lstStyle/>
+          <a:p>
+            <a:pPr algn="ctr"/>
+            <a:endParaRPr lang="pt-BR" sz="2000" dirty="0">
+              <a:solidFill>
+                <a:schemeClr val="tx1"/>
+              </a:solidFill>
+              <a:latin typeface="Arial" charset="0"/>
+            </a:endParaRPr>
+          </a:p>
+        </p:txBody>
+      </p:sp>
+      <p:sp>
+        <p:nvSpPr>
+          <p:cNvPr id="5" name="Retângulo 4">
+            <a:extLst>
+              <a:ext uri="{FF2B5EF4-FFF2-40B4-BE49-F238E27FC236}">
+                <a16:creationId xmlns:a16="http://schemas.microsoft.com/office/drawing/2014/main" id="{201CAFA8-E6C3-4101-AA89-662CFEF1A22C}"/>
+              </a:ext>
+            </a:extLst>
+          </p:cNvPr>
+          <p:cNvSpPr/>
+          <p:nvPr/>
+        </p:nvSpPr>
+        <p:spPr bwMode="auto">
+          <a:xfrm>
+            <a:off x="5308600" y="3835400"/>
+            <a:ext cx="4258733" cy="1803400"/>
+          </a:xfrm>
+          <a:prstGeom prst="rect">
+            <a:avLst/>
+          </a:prstGeom>
+          <a:noFill/>
+          <a:ln w="38100">
+            <a:solidFill>
+              <a:srgbClr val="FF0000"/>
+            </a:solidFill>
+            <a:headEnd type="none" w="med" len="med"/>
+            <a:tailEnd type="triangle" w="med" len="med"/>
+          </a:ln>
+        </p:spPr>
+        <p:style>
+          <a:lnRef idx="1">
+            <a:schemeClr val="accent3"/>
+          </a:lnRef>
+          <a:fillRef idx="2">
+            <a:schemeClr val="accent3"/>
+          </a:fillRef>
+          <a:effectRef idx="1">
+            <a:schemeClr val="accent3"/>
+          </a:effectRef>
+          <a:fontRef idx="minor">
+            <a:schemeClr val="dk1"/>
+          </a:fontRef>
+        </p:style>
+        <p:txBody>
+          <a:bodyPr vert="horz" wrap="square" lIns="90000" tIns="46800" rIns="90000" bIns="46800" numCol="1" rtlCol="0" anchor="ctr" anchorCtr="0" compatLnSpc="1">
+            <a:prstTxWarp prst="textNoShape">
+              <a:avLst/>
+            </a:prstTxWarp>
+          </a:bodyPr>
+          <a:lstStyle/>
+          <a:p>
+            <a:pPr algn="ctr"/>
+            <a:endParaRPr lang="pt-BR" sz="2000" dirty="0">
+              <a:solidFill>
+                <a:schemeClr val="tx1"/>
+              </a:solidFill>
+              <a:latin typeface="Arial" charset="0"/>
+            </a:endParaRPr>
+          </a:p>
+        </p:txBody>
+      </p:sp>
+      <p:cxnSp>
+        <p:nvCxnSpPr>
+          <p:cNvPr id="7" name="Conector de Seta Reta 6">
+            <a:extLst>
+              <a:ext uri="{FF2B5EF4-FFF2-40B4-BE49-F238E27FC236}">
+                <a16:creationId xmlns:a16="http://schemas.microsoft.com/office/drawing/2014/main" id="{2AC21CFE-63AC-497D-86EE-549F8CE5E262}"/>
+              </a:ext>
+            </a:extLst>
+          </p:cNvPr>
+          <p:cNvCxnSpPr/>
+          <p:nvPr/>
+        </p:nvCxnSpPr>
+        <p:spPr bwMode="auto">
+          <a:xfrm flipH="1">
+            <a:off x="7052733" y="3530600"/>
+            <a:ext cx="152400" cy="431800"/>
+          </a:xfrm>
+          <a:prstGeom prst="straightConnector1">
+            <a:avLst/>
+          </a:prstGeom>
+          <a:solidFill>
+            <a:schemeClr val="accent1"/>
+          </a:solidFill>
+          <a:ln w="38100" cap="flat" cmpd="sng" algn="ctr">
+            <a:solidFill>
+              <a:srgbClr val="FF0000"/>
+            </a:solidFill>
+            <a:prstDash val="solid"/>
+            <a:round/>
+            <a:headEnd type="none" w="med" len="med"/>
+            <a:tailEnd type="triangle"/>
+          </a:ln>
+          <a:effectLst/>
+        </p:spPr>
+      </p:cxnSp>
+      <p:cxnSp>
+        <p:nvCxnSpPr>
+          <p:cNvPr id="8" name="Conector de Seta Reta 7">
+            <a:extLst>
+              <a:ext uri="{FF2B5EF4-FFF2-40B4-BE49-F238E27FC236}">
+                <a16:creationId xmlns:a16="http://schemas.microsoft.com/office/drawing/2014/main" id="{44097B0F-5F33-42EE-8A6F-F79457A974B0}"/>
+              </a:ext>
+            </a:extLst>
+          </p:cNvPr>
+          <p:cNvCxnSpPr/>
+          <p:nvPr/>
+        </p:nvCxnSpPr>
+        <p:spPr bwMode="auto">
+          <a:xfrm flipH="1">
+            <a:off x="8281295" y="3543300"/>
+            <a:ext cx="152400" cy="431800"/>
+          </a:xfrm>
+          <a:prstGeom prst="straightConnector1">
+            <a:avLst/>
+          </a:prstGeom>
+          <a:solidFill>
+            <a:schemeClr val="accent1"/>
+          </a:solidFill>
+          <a:ln w="38100" cap="flat" cmpd="sng" algn="ctr">
+            <a:solidFill>
+              <a:srgbClr val="FF0000"/>
+            </a:solidFill>
+            <a:prstDash val="solid"/>
+            <a:round/>
+            <a:headEnd type="none" w="med" len="med"/>
+            <a:tailEnd type="triangle"/>
+          </a:ln>
+          <a:effectLst/>
+        </p:spPr>
+      </p:cxnSp>
+      <p:cxnSp>
+        <p:nvCxnSpPr>
+          <p:cNvPr id="9" name="Conector de Seta Reta 8">
+            <a:extLst>
+              <a:ext uri="{FF2B5EF4-FFF2-40B4-BE49-F238E27FC236}">
+                <a16:creationId xmlns:a16="http://schemas.microsoft.com/office/drawing/2014/main" id="{53BBDFF7-B750-4312-9BFE-53AFE074579E}"/>
+              </a:ext>
+            </a:extLst>
+          </p:cNvPr>
+          <p:cNvCxnSpPr/>
+          <p:nvPr/>
+        </p:nvCxnSpPr>
+        <p:spPr bwMode="auto">
+          <a:xfrm flipH="1">
+            <a:off x="9072114" y="3530600"/>
+            <a:ext cx="152400" cy="431800"/>
+          </a:xfrm>
+          <a:prstGeom prst="straightConnector1">
+            <a:avLst/>
+          </a:prstGeom>
+          <a:solidFill>
+            <a:schemeClr val="accent1"/>
+          </a:solidFill>
+          <a:ln w="38100" cap="flat" cmpd="sng" algn="ctr">
+            <a:solidFill>
+              <a:srgbClr val="FF0000"/>
+            </a:solidFill>
+            <a:prstDash val="solid"/>
+            <a:round/>
+            <a:headEnd type="none" w="med" len="med"/>
+            <a:tailEnd type="triangle"/>
+          </a:ln>
+          <a:effectLst/>
+        </p:spPr>
+      </p:cxnSp>
+      <p:cxnSp>
+        <p:nvCxnSpPr>
+          <p:cNvPr id="11" name="Conector de Seta Reta 10">
+            <a:extLst>
+              <a:ext uri="{FF2B5EF4-FFF2-40B4-BE49-F238E27FC236}">
+                <a16:creationId xmlns:a16="http://schemas.microsoft.com/office/drawing/2014/main" id="{35F89D5D-C389-4BC9-A09B-B50EC5E274E7}"/>
+              </a:ext>
+            </a:extLst>
+          </p:cNvPr>
+          <p:cNvCxnSpPr/>
+          <p:nvPr/>
+        </p:nvCxnSpPr>
+        <p:spPr bwMode="auto">
+          <a:xfrm flipH="1">
+            <a:off x="7351672" y="4233333"/>
+            <a:ext cx="200595" cy="220134"/>
+          </a:xfrm>
+          <a:prstGeom prst="straightConnector1">
+            <a:avLst/>
+          </a:prstGeom>
+          <a:solidFill>
+            <a:schemeClr val="accent1"/>
+          </a:solidFill>
+          <a:ln w="38100" cap="flat" cmpd="sng" algn="ctr">
+            <a:solidFill>
+              <a:srgbClr val="FF0000"/>
+            </a:solidFill>
+            <a:prstDash val="solid"/>
+            <a:round/>
+            <a:headEnd type="none" w="med" len="med"/>
+            <a:tailEnd type="triangle"/>
+          </a:ln>
+          <a:effectLst/>
+        </p:spPr>
+      </p:cxnSp>
+    </p:spTree>
+    <p:extLst>
+      <p:ext uri="{BB962C8B-B14F-4D97-AF65-F5344CB8AC3E}">
+        <p14:creationId xmlns:p14="http://schemas.microsoft.com/office/powerpoint/2010/main" val="1329671091"/>
       </p:ext>
     </p:extLst>
   </p:cSld>
